--- a/git_course/2_collaboration/git_collaboration.pptx
+++ b/git_course/2_collaboration/git_collaboration.pptx
@@ -18511,7 +18511,7 @@
             </a:r>
             <a:r>
               <a:rPr lang="nl-NL" sz="1800" dirty="0" err="1"/>
-              <a:t>you</a:t>
+              <a:t>your</a:t>
             </a:r>
             <a:r>
               <a:rPr lang="nl-NL" sz="1800" dirty="0"/>
@@ -19095,8 +19095,23 @@
               <a:rPr lang="nl-NL" sz="1800" dirty="0">
                 <a:cs typeface="Courier New" panose="02070309020205020404" pitchFamily="49" charset="0"/>
               </a:rPr>
-              <a:t>Tools om kwaliteit te controleren:</a:t>
-            </a:r>
+              <a:t>In een Workflow kun je tools gebruiken om de kwaliteit te controleren:</a:t>
+            </a:r>
+          </a:p>
+          <a:p>
+            <a:pPr marL="0" indent="0">
+              <a:lnSpc>
+                <a:spcPct val="100000"/>
+              </a:lnSpc>
+              <a:spcBef>
+                <a:spcPts val="600"/>
+              </a:spcBef>
+              <a:buFont typeface="Arial" panose="020B0604020202020204" pitchFamily="34" charset="0"/>
+              <a:buNone/>
+            </a:pPr>
+            <a:endParaRPr lang="nl-NL" sz="1800" dirty="0">
+              <a:cs typeface="Courier New" panose="02070309020205020404" pitchFamily="49" charset="0"/>
+            </a:endParaRPr>
           </a:p>
           <a:p>
             <a:pPr>
@@ -19109,666 +19124,830 @@
               <a:buFontTx/>
               <a:buChar char="-"/>
             </a:pPr>
+            <a:r>
+              <a:rPr lang="nl-NL" sz="1800" dirty="0">
+                <a:cs typeface="Courier New" panose="02070309020205020404" pitchFamily="49" charset="0"/>
+              </a:rPr>
+              <a:t>Opmaak</a:t>
+            </a:r>
+          </a:p>
+          <a:p>
+            <a:pPr>
+              <a:lnSpc>
+                <a:spcPct val="100000"/>
+              </a:lnSpc>
+              <a:spcBef>
+                <a:spcPts val="600"/>
+              </a:spcBef>
+              <a:buFontTx/>
+              <a:buChar char="-"/>
+            </a:pPr>
+            <a:r>
+              <a:rPr lang="nl-NL" sz="1800" dirty="0">
+                <a:cs typeface="Courier New" panose="02070309020205020404" pitchFamily="49" charset="0"/>
+              </a:rPr>
+              <a:t>Fouten</a:t>
+            </a:r>
+          </a:p>
+          <a:p>
+            <a:pPr>
+              <a:lnSpc>
+                <a:spcPct val="100000"/>
+              </a:lnSpc>
+              <a:spcBef>
+                <a:spcPts val="600"/>
+              </a:spcBef>
+              <a:buFontTx/>
+              <a:buChar char="-"/>
+            </a:pPr>
+            <a:r>
+              <a:rPr lang="nl-NL" sz="1800" dirty="0">
+                <a:cs typeface="Courier New" panose="02070309020205020404" pitchFamily="49" charset="0"/>
+              </a:rPr>
+              <a:t>Unit tests</a:t>
+            </a:r>
+          </a:p>
+          <a:p>
+            <a:pPr marL="0" indent="0">
+              <a:lnSpc>
+                <a:spcPct val="100000"/>
+              </a:lnSpc>
+              <a:spcBef>
+                <a:spcPts val="600"/>
+              </a:spcBef>
+              <a:buNone/>
+            </a:pPr>
             <a:endParaRPr lang="nl-NL" sz="1800" dirty="0">
-              <a:latin typeface="Courier New" panose="02070309020205020404" pitchFamily="49" charset="0"/>
               <a:cs typeface="Courier New" panose="02070309020205020404" pitchFamily="49" charset="0"/>
             </a:endParaRPr>
           </a:p>
           <a:p>
-            <a:pPr>
+            <a:pPr marL="0" indent="0">
               <a:lnSpc>
                 <a:spcPct val="100000"/>
               </a:lnSpc>
               <a:spcBef>
                 <a:spcPts val="600"/>
               </a:spcBef>
-              <a:buFontTx/>
-              <a:buChar char="-"/>
-            </a:pPr>
+              <a:buNone/>
+            </a:pPr>
+            <a:r>
+              <a:rPr lang="nl-NL" sz="1800" dirty="0">
+                <a:cs typeface="Courier New" panose="02070309020205020404" pitchFamily="49" charset="0"/>
+              </a:rPr>
+              <a:t>De Workflow start bij bijvoorbeeld een </a:t>
+            </a:r>
             <a:r>
               <a:rPr lang="nl-NL" sz="1800" dirty="0">
                 <a:latin typeface="Courier New" panose="02070309020205020404" pitchFamily="49" charset="0"/>
                 <a:cs typeface="Courier New" panose="02070309020205020404" pitchFamily="49" charset="0"/>
               </a:rPr>
-              <a:t>black</a:t>
-            </a:r>
-          </a:p>
-          <a:p>
-            <a:pPr>
-              <a:lnSpc>
-                <a:spcPct val="100000"/>
-              </a:lnSpc>
-              <a:spcBef>
-                <a:spcPts val="600"/>
-              </a:spcBef>
-              <a:buFontTx/>
-              <a:buChar char="-"/>
-            </a:pPr>
+              <a:t>git push</a:t>
+            </a:r>
+            <a:r>
+              <a:rPr lang="nl-NL" sz="1800" dirty="0">
+                <a:cs typeface="Courier New" panose="02070309020205020404" pitchFamily="49" charset="0"/>
+              </a:rPr>
+              <a:t> of een Pull </a:t>
+            </a:r>
             <a:r>
               <a:rPr lang="nl-NL" sz="1800" dirty="0" err="1">
+                <a:cs typeface="Courier New" panose="02070309020205020404" pitchFamily="49" charset="0"/>
+              </a:rPr>
+              <a:t>Request</a:t>
+            </a:r>
+            <a:r>
+              <a:rPr lang="nl-NL" sz="1800" dirty="0">
+                <a:cs typeface="Courier New" panose="02070309020205020404" pitchFamily="49" charset="0"/>
+              </a:rPr>
+              <a:t>.</a:t>
+            </a:r>
+          </a:p>
+        </p:txBody>
+      </p:sp>
+      <p:sp>
+        <p:nvSpPr>
+          <p:cNvPr id="5" name="Rectangle 4">
+            <a:extLst>
+              <a:ext uri="{FF2B5EF4-FFF2-40B4-BE49-F238E27FC236}">
+                <a16:creationId xmlns:a16="http://schemas.microsoft.com/office/drawing/2014/main" id="{170391FE-8159-720D-E458-6B6B14DF3103}"/>
+              </a:ext>
+            </a:extLst>
+          </p:cNvPr>
+          <p:cNvSpPr/>
+          <p:nvPr/>
+        </p:nvSpPr>
+        <p:spPr>
+          <a:xfrm>
+            <a:off x="7157927" y="583937"/>
+            <a:ext cx="1493043" cy="595048"/>
+          </a:xfrm>
+          <a:prstGeom prst="rect">
+            <a:avLst/>
+          </a:prstGeom>
+          <a:solidFill>
+            <a:schemeClr val="accent5">
+              <a:lumMod val="40000"/>
+              <a:lumOff val="60000"/>
+            </a:schemeClr>
+          </a:solidFill>
+        </p:spPr>
+        <p:style>
+          <a:lnRef idx="1">
+            <a:schemeClr val="accent5"/>
+          </a:lnRef>
+          <a:fillRef idx="2">
+            <a:schemeClr val="accent5"/>
+          </a:fillRef>
+          <a:effectRef idx="1">
+            <a:schemeClr val="accent5"/>
+          </a:effectRef>
+          <a:fontRef idx="minor">
+            <a:schemeClr val="dk1"/>
+          </a:fontRef>
+        </p:style>
+        <p:txBody>
+          <a:bodyPr rtlCol="0" anchor="ctr"/>
+          <a:lstStyle/>
+          <a:p>
+            <a:pPr algn="ctr"/>
+            <a:r>
+              <a:rPr lang="nl-NL" dirty="0"/>
+              <a:t>git push</a:t>
+            </a:r>
+          </a:p>
+        </p:txBody>
+      </p:sp>
+      <p:sp>
+        <p:nvSpPr>
+          <p:cNvPr id="6" name="Rectangle 5">
+            <a:extLst>
+              <a:ext uri="{FF2B5EF4-FFF2-40B4-BE49-F238E27FC236}">
+                <a16:creationId xmlns:a16="http://schemas.microsoft.com/office/drawing/2014/main" id="{04F2A86E-C55A-893A-7C85-495CD631CAEE}"/>
+              </a:ext>
+            </a:extLst>
+          </p:cNvPr>
+          <p:cNvSpPr/>
+          <p:nvPr/>
+        </p:nvSpPr>
+        <p:spPr>
+          <a:xfrm>
+            <a:off x="7157927" y="2757880"/>
+            <a:ext cx="3924974" cy="3734993"/>
+          </a:xfrm>
+          <a:prstGeom prst="rect">
+            <a:avLst/>
+          </a:prstGeom>
+          <a:solidFill>
+            <a:schemeClr val="bg1">
+              <a:lumMod val="95000"/>
+            </a:schemeClr>
+          </a:solidFill>
+        </p:spPr>
+        <p:style>
+          <a:lnRef idx="1">
+            <a:schemeClr val="accent3"/>
+          </a:lnRef>
+          <a:fillRef idx="2">
+            <a:schemeClr val="accent3"/>
+          </a:fillRef>
+          <a:effectRef idx="1">
+            <a:schemeClr val="accent3"/>
+          </a:effectRef>
+          <a:fontRef idx="minor">
+            <a:schemeClr val="dk1"/>
+          </a:fontRef>
+        </p:style>
+        <p:txBody>
+          <a:bodyPr vert="vert270" rtlCol="0" anchor="t"/>
+          <a:lstStyle/>
+          <a:p>
+            <a:pPr algn="ctr"/>
+            <a:r>
+              <a:rPr lang="nl-NL" dirty="0"/>
+              <a:t>Virtual Machine</a:t>
+            </a:r>
+          </a:p>
+        </p:txBody>
+      </p:sp>
+      <p:sp>
+        <p:nvSpPr>
+          <p:cNvPr id="7" name="Rectangle: Rounded Corners 6">
+            <a:extLst>
+              <a:ext uri="{FF2B5EF4-FFF2-40B4-BE49-F238E27FC236}">
+                <a16:creationId xmlns:a16="http://schemas.microsoft.com/office/drawing/2014/main" id="{796E9195-DDC1-96BA-1B5E-693236B34920}"/>
+              </a:ext>
+            </a:extLst>
+          </p:cNvPr>
+          <p:cNvSpPr/>
+          <p:nvPr/>
+        </p:nvSpPr>
+        <p:spPr>
+          <a:xfrm>
+            <a:off x="7697208" y="3011484"/>
+            <a:ext cx="3024554" cy="595047"/>
+          </a:xfrm>
+          <a:prstGeom prst="roundRect">
+            <a:avLst/>
+          </a:prstGeom>
+          <a:solidFill>
+            <a:schemeClr val="accent6">
+              <a:lumMod val="40000"/>
+              <a:lumOff val="60000"/>
+            </a:schemeClr>
+          </a:solidFill>
+        </p:spPr>
+        <p:style>
+          <a:lnRef idx="1">
+            <a:schemeClr val="accent6"/>
+          </a:lnRef>
+          <a:fillRef idx="2">
+            <a:schemeClr val="accent6"/>
+          </a:fillRef>
+          <a:effectRef idx="1">
+            <a:schemeClr val="accent6"/>
+          </a:effectRef>
+          <a:fontRef idx="minor">
+            <a:schemeClr val="dk1"/>
+          </a:fontRef>
+        </p:style>
+        <p:txBody>
+          <a:bodyPr rtlCol="0" anchor="ctr"/>
+          <a:lstStyle/>
+          <a:p>
+            <a:pPr algn="ctr"/>
+            <a:r>
+              <a:rPr lang="nl-NL" sz="1200" dirty="0"/>
+              <a:t>Action 1</a:t>
+            </a:r>
+          </a:p>
+          <a:p>
+            <a:pPr algn="ctr"/>
+            <a:r>
+              <a:rPr lang="nl-NL" sz="1400" dirty="0">
                 <a:latin typeface="Courier New" panose="02070309020205020404" pitchFamily="49" charset="0"/>
                 <a:cs typeface="Courier New" panose="02070309020205020404" pitchFamily="49" charset="0"/>
               </a:rPr>
-              <a:t>pylint</a:t>
-            </a:r>
-            <a:endParaRPr lang="nl-NL" sz="1800" dirty="0">
-              <a:latin typeface="Courier New" panose="02070309020205020404" pitchFamily="49" charset="0"/>
-              <a:cs typeface="Courier New" panose="02070309020205020404" pitchFamily="49" charset="0"/>
-            </a:endParaRPr>
-          </a:p>
-          <a:p>
-            <a:pPr>
-              <a:lnSpc>
-                <a:spcPct val="100000"/>
-              </a:lnSpc>
-              <a:spcBef>
-                <a:spcPts val="600"/>
-              </a:spcBef>
-              <a:buFontTx/>
-              <a:buChar char="-"/>
-            </a:pPr>
-            <a:r>
-              <a:rPr lang="nl-NL" sz="1800" dirty="0" err="1">
+              <a:t>git </a:t>
+            </a:r>
+            <a:r>
+              <a:rPr lang="nl-NL" sz="1400" dirty="0" err="1">
+                <a:latin typeface="Courier New" panose="02070309020205020404" pitchFamily="49" charset="0"/>
+                <a:cs typeface="Courier New" panose="02070309020205020404" pitchFamily="49" charset="0"/>
+              </a:rPr>
+              <a:t>clone</a:t>
+            </a:r>
+            <a:r>
+              <a:rPr lang="nl-NL" sz="1400" dirty="0">
+                <a:latin typeface="Courier New" panose="02070309020205020404" pitchFamily="49" charset="0"/>
+                <a:cs typeface="Courier New" panose="02070309020205020404" pitchFamily="49" charset="0"/>
+              </a:rPr>
+              <a:t> &lt;</a:t>
+            </a:r>
+            <a:r>
+              <a:rPr lang="nl-NL" sz="1400" dirty="0" err="1">
+                <a:latin typeface="Courier New" panose="02070309020205020404" pitchFamily="49" charset="0"/>
+                <a:cs typeface="Courier New" panose="02070309020205020404" pitchFamily="49" charset="0"/>
+              </a:rPr>
+              <a:t>repo</a:t>
+            </a:r>
+            <a:r>
+              <a:rPr lang="nl-NL" sz="1400" dirty="0">
+                <a:latin typeface="Courier New" panose="02070309020205020404" pitchFamily="49" charset="0"/>
+                <a:cs typeface="Courier New" panose="02070309020205020404" pitchFamily="49" charset="0"/>
+              </a:rPr>
+              <a:t>&gt;</a:t>
+            </a:r>
+          </a:p>
+        </p:txBody>
+      </p:sp>
+      <p:sp>
+        <p:nvSpPr>
+          <p:cNvPr id="8" name="Rectangle: Rounded Corners 7">
+            <a:extLst>
+              <a:ext uri="{FF2B5EF4-FFF2-40B4-BE49-F238E27FC236}">
+                <a16:creationId xmlns:a16="http://schemas.microsoft.com/office/drawing/2014/main" id="{53B4483D-1BCD-46D7-F099-80616DFC7B1A}"/>
+              </a:ext>
+            </a:extLst>
+          </p:cNvPr>
+          <p:cNvSpPr/>
+          <p:nvPr/>
+        </p:nvSpPr>
+        <p:spPr>
+          <a:xfrm>
+            <a:off x="7697208" y="3894266"/>
+            <a:ext cx="3024553" cy="595047"/>
+          </a:xfrm>
+          <a:prstGeom prst="roundRect">
+            <a:avLst/>
+          </a:prstGeom>
+          <a:solidFill>
+            <a:schemeClr val="accent6">
+              <a:lumMod val="40000"/>
+              <a:lumOff val="60000"/>
+            </a:schemeClr>
+          </a:solidFill>
+        </p:spPr>
+        <p:style>
+          <a:lnRef idx="1">
+            <a:schemeClr val="accent6"/>
+          </a:lnRef>
+          <a:fillRef idx="2">
+            <a:schemeClr val="accent6"/>
+          </a:fillRef>
+          <a:effectRef idx="1">
+            <a:schemeClr val="accent6"/>
+          </a:effectRef>
+          <a:fontRef idx="minor">
+            <a:schemeClr val="dk1"/>
+          </a:fontRef>
+        </p:style>
+        <p:txBody>
+          <a:bodyPr rtlCol="0" anchor="ctr"/>
+          <a:lstStyle/>
+          <a:p>
+            <a:pPr algn="ctr"/>
+            <a:r>
+              <a:rPr lang="nl-NL" sz="1200" dirty="0"/>
+              <a:t>Action 2</a:t>
+            </a:r>
+          </a:p>
+          <a:p>
+            <a:pPr algn="ctr"/>
+            <a:r>
+              <a:rPr lang="nl-NL" sz="1400" dirty="0" err="1">
+                <a:latin typeface="Courier New" panose="02070309020205020404" pitchFamily="49" charset="0"/>
+                <a:cs typeface="Courier New" panose="02070309020205020404" pitchFamily="49" charset="0"/>
+              </a:rPr>
+              <a:t>install</a:t>
+            </a:r>
+            <a:r>
+              <a:rPr lang="nl-NL" sz="1400" dirty="0">
+                <a:latin typeface="Courier New" panose="02070309020205020404" pitchFamily="49" charset="0"/>
+                <a:cs typeface="Courier New" panose="02070309020205020404" pitchFamily="49" charset="0"/>
+              </a:rPr>
+              <a:t> python</a:t>
+            </a:r>
+          </a:p>
+        </p:txBody>
+      </p:sp>
+      <p:sp>
+        <p:nvSpPr>
+          <p:cNvPr id="9" name="Rectangle: Rounded Corners 8">
+            <a:extLst>
+              <a:ext uri="{FF2B5EF4-FFF2-40B4-BE49-F238E27FC236}">
+                <a16:creationId xmlns:a16="http://schemas.microsoft.com/office/drawing/2014/main" id="{C118A17D-D1D0-ECE7-6E59-59089E4AE054}"/>
+              </a:ext>
+            </a:extLst>
+          </p:cNvPr>
+          <p:cNvSpPr/>
+          <p:nvPr/>
+        </p:nvSpPr>
+        <p:spPr>
+          <a:xfrm>
+            <a:off x="7697208" y="4777048"/>
+            <a:ext cx="3024553" cy="595047"/>
+          </a:xfrm>
+          <a:prstGeom prst="roundRect">
+            <a:avLst/>
+          </a:prstGeom>
+          <a:solidFill>
+            <a:schemeClr val="accent6">
+              <a:lumMod val="40000"/>
+              <a:lumOff val="60000"/>
+            </a:schemeClr>
+          </a:solidFill>
+        </p:spPr>
+        <p:style>
+          <a:lnRef idx="1">
+            <a:schemeClr val="accent6"/>
+          </a:lnRef>
+          <a:fillRef idx="2">
+            <a:schemeClr val="accent6"/>
+          </a:fillRef>
+          <a:effectRef idx="1">
+            <a:schemeClr val="accent6"/>
+          </a:effectRef>
+          <a:fontRef idx="minor">
+            <a:schemeClr val="dk1"/>
+          </a:fontRef>
+        </p:style>
+        <p:txBody>
+          <a:bodyPr rtlCol="0" anchor="ctr"/>
+          <a:lstStyle/>
+          <a:p>
+            <a:pPr algn="ctr"/>
+            <a:r>
+              <a:rPr lang="nl-NL" sz="1200" dirty="0"/>
+              <a:t>Action 3</a:t>
+            </a:r>
+          </a:p>
+          <a:p>
+            <a:pPr algn="ctr"/>
+            <a:r>
+              <a:rPr lang="nl-NL" sz="1400" dirty="0">
+                <a:latin typeface="Courier New" panose="02070309020205020404" pitchFamily="49" charset="0"/>
+                <a:cs typeface="Courier New" panose="02070309020205020404" pitchFamily="49" charset="0"/>
+              </a:rPr>
+              <a:t>pip </a:t>
+            </a:r>
+            <a:r>
+              <a:rPr lang="nl-NL" sz="1400" dirty="0" err="1">
+                <a:latin typeface="Courier New" panose="02070309020205020404" pitchFamily="49" charset="0"/>
+                <a:cs typeface="Courier New" panose="02070309020205020404" pitchFamily="49" charset="0"/>
+              </a:rPr>
+              <a:t>install</a:t>
+            </a:r>
+            <a:r>
+              <a:rPr lang="nl-NL" sz="1400" dirty="0">
+                <a:latin typeface="Courier New" panose="02070309020205020404" pitchFamily="49" charset="0"/>
+                <a:cs typeface="Courier New" panose="02070309020205020404" pitchFamily="49" charset="0"/>
+              </a:rPr>
+              <a:t> .</a:t>
+            </a:r>
+          </a:p>
+        </p:txBody>
+      </p:sp>
+      <p:pic>
+        <p:nvPicPr>
+          <p:cNvPr id="21" name="Graphic 20" descr="Checkmark with solid fill">
+            <a:extLst>
+              <a:ext uri="{FF2B5EF4-FFF2-40B4-BE49-F238E27FC236}">
+                <a16:creationId xmlns:a16="http://schemas.microsoft.com/office/drawing/2014/main" id="{B770E1A5-7367-A485-4B38-FD64612DD221}"/>
+              </a:ext>
+            </a:extLst>
+          </p:cNvPr>
+          <p:cNvPicPr>
+            <a:picLocks noChangeAspect="1"/>
+          </p:cNvPicPr>
+          <p:nvPr/>
+        </p:nvPicPr>
+        <p:blipFill>
+          <a:blip r:embed="rId3">
+            <a:extLst>
+              <a:ext uri="{96DAC541-7B7A-43D3-8B79-37D633B846F1}">
+                <asvg:svgBlip xmlns:asvg="http://schemas.microsoft.com/office/drawing/2016/SVG/main" r:embed="rId4"/>
+              </a:ext>
+            </a:extLst>
+          </a:blip>
+          <a:stretch>
+            <a:fillRect/>
+          </a:stretch>
+        </p:blipFill>
+        <p:spPr>
+          <a:xfrm>
+            <a:off x="9616796" y="2349502"/>
+            <a:ext cx="274375" cy="332411"/>
+          </a:xfrm>
+          <a:prstGeom prst="rect">
+            <a:avLst/>
+          </a:prstGeom>
+        </p:spPr>
+      </p:pic>
+      <p:sp>
+        <p:nvSpPr>
+          <p:cNvPr id="4" name="Rectangle 3">
+            <a:extLst>
+              <a:ext uri="{FF2B5EF4-FFF2-40B4-BE49-F238E27FC236}">
+                <a16:creationId xmlns:a16="http://schemas.microsoft.com/office/drawing/2014/main" id="{1FD34295-0E2A-CD4D-4F28-FF9B301FB412}"/>
+              </a:ext>
+            </a:extLst>
+          </p:cNvPr>
+          <p:cNvSpPr/>
+          <p:nvPr/>
+        </p:nvSpPr>
+        <p:spPr>
+          <a:xfrm>
+            <a:off x="9589858" y="583937"/>
+            <a:ext cx="1493043" cy="595048"/>
+          </a:xfrm>
+          <a:prstGeom prst="rect">
+            <a:avLst/>
+          </a:prstGeom>
+          <a:solidFill>
+            <a:schemeClr val="accent5">
+              <a:lumMod val="40000"/>
+              <a:lumOff val="60000"/>
+            </a:schemeClr>
+          </a:solidFill>
+        </p:spPr>
+        <p:style>
+          <a:lnRef idx="1">
+            <a:schemeClr val="accent5"/>
+          </a:lnRef>
+          <a:fillRef idx="2">
+            <a:schemeClr val="accent5"/>
+          </a:fillRef>
+          <a:effectRef idx="1">
+            <a:schemeClr val="accent5"/>
+          </a:effectRef>
+          <a:fontRef idx="minor">
+            <a:schemeClr val="dk1"/>
+          </a:fontRef>
+        </p:style>
+        <p:txBody>
+          <a:bodyPr rtlCol="0" anchor="ctr"/>
+          <a:lstStyle/>
+          <a:p>
+            <a:pPr algn="ctr"/>
+            <a:r>
+              <a:rPr lang="nl-NL" dirty="0"/>
+              <a:t>PR</a:t>
+            </a:r>
+          </a:p>
+        </p:txBody>
+      </p:sp>
+      <p:sp>
+        <p:nvSpPr>
+          <p:cNvPr id="10" name="Rectangle 9">
+            <a:extLst>
+              <a:ext uri="{FF2B5EF4-FFF2-40B4-BE49-F238E27FC236}">
+                <a16:creationId xmlns:a16="http://schemas.microsoft.com/office/drawing/2014/main" id="{21C429C6-B30A-2F2B-BB3C-8DDF1C058933}"/>
+              </a:ext>
+            </a:extLst>
+          </p:cNvPr>
+          <p:cNvSpPr/>
+          <p:nvPr/>
+        </p:nvSpPr>
+        <p:spPr>
+          <a:xfrm>
+            <a:off x="8462961" y="1670908"/>
+            <a:ext cx="1493043" cy="595048"/>
+          </a:xfrm>
+          <a:prstGeom prst="rect">
+            <a:avLst/>
+          </a:prstGeom>
+          <a:solidFill>
+            <a:schemeClr val="accent5">
+              <a:lumMod val="40000"/>
+              <a:lumOff val="60000"/>
+            </a:schemeClr>
+          </a:solidFill>
+        </p:spPr>
+        <p:style>
+          <a:lnRef idx="1">
+            <a:schemeClr val="accent5"/>
+          </a:lnRef>
+          <a:fillRef idx="2">
+            <a:schemeClr val="accent5"/>
+          </a:fillRef>
+          <a:effectRef idx="1">
+            <a:schemeClr val="accent5"/>
+          </a:effectRef>
+          <a:fontRef idx="minor">
+            <a:schemeClr val="dk1"/>
+          </a:fontRef>
+        </p:style>
+        <p:txBody>
+          <a:bodyPr rtlCol="0" anchor="ctr"/>
+          <a:lstStyle/>
+          <a:p>
+            <a:pPr algn="ctr"/>
+            <a:r>
+              <a:rPr lang="nl-NL" dirty="0"/>
+              <a:t>Workflow</a:t>
+            </a:r>
+          </a:p>
+        </p:txBody>
+      </p:sp>
+      <p:sp>
+        <p:nvSpPr>
+          <p:cNvPr id="12" name="Rectangle: Rounded Corners 11">
+            <a:extLst>
+              <a:ext uri="{FF2B5EF4-FFF2-40B4-BE49-F238E27FC236}">
+                <a16:creationId xmlns:a16="http://schemas.microsoft.com/office/drawing/2014/main" id="{AEBB17E3-B43B-389B-E1C9-4E4DDB17F5CA}"/>
+              </a:ext>
+            </a:extLst>
+          </p:cNvPr>
+          <p:cNvSpPr/>
+          <p:nvPr/>
+        </p:nvSpPr>
+        <p:spPr>
+          <a:xfrm>
+            <a:off x="7697207" y="5659830"/>
+            <a:ext cx="3024553" cy="595047"/>
+          </a:xfrm>
+          <a:prstGeom prst="roundRect">
+            <a:avLst/>
+          </a:prstGeom>
+          <a:solidFill>
+            <a:schemeClr val="accent6">
+              <a:lumMod val="40000"/>
+              <a:lumOff val="60000"/>
+            </a:schemeClr>
+          </a:solidFill>
+        </p:spPr>
+        <p:style>
+          <a:lnRef idx="1">
+            <a:schemeClr val="accent6"/>
+          </a:lnRef>
+          <a:fillRef idx="2">
+            <a:schemeClr val="accent6"/>
+          </a:fillRef>
+          <a:effectRef idx="1">
+            <a:schemeClr val="accent6"/>
+          </a:effectRef>
+          <a:fontRef idx="minor">
+            <a:schemeClr val="dk1"/>
+          </a:fontRef>
+        </p:style>
+        <p:txBody>
+          <a:bodyPr rtlCol="0" anchor="ctr"/>
+          <a:lstStyle/>
+          <a:p>
+            <a:pPr algn="ctr"/>
+            <a:r>
+              <a:rPr lang="nl-NL" sz="1200" dirty="0"/>
+              <a:t>Action 4</a:t>
+            </a:r>
+          </a:p>
+          <a:p>
+            <a:pPr algn="ctr"/>
+            <a:r>
+              <a:rPr lang="nl-NL" sz="1400" dirty="0">
+                <a:latin typeface="Courier New" panose="02070309020205020404" pitchFamily="49" charset="0"/>
+                <a:cs typeface="Courier New" panose="02070309020205020404" pitchFamily="49" charset="0"/>
+              </a:rPr>
+              <a:t>python -m </a:t>
+            </a:r>
+            <a:r>
+              <a:rPr lang="nl-NL" sz="1400" dirty="0" err="1">
                 <a:latin typeface="Courier New" panose="02070309020205020404" pitchFamily="49" charset="0"/>
                 <a:cs typeface="Courier New" panose="02070309020205020404" pitchFamily="49" charset="0"/>
               </a:rPr>
               <a:t>pytest</a:t>
             </a:r>
-            <a:endParaRPr lang="nl-NL" sz="1800" dirty="0">
+            <a:endParaRPr lang="nl-NL" sz="1400" dirty="0">
               <a:latin typeface="Courier New" panose="02070309020205020404" pitchFamily="49" charset="0"/>
               <a:cs typeface="Courier New" panose="02070309020205020404" pitchFamily="49" charset="0"/>
             </a:endParaRPr>
           </a:p>
-          <a:p>
-            <a:pPr marL="0" indent="0">
-              <a:lnSpc>
-                <a:spcPct val="100000"/>
-              </a:lnSpc>
-              <a:spcBef>
-                <a:spcPts val="600"/>
-              </a:spcBef>
-              <a:buNone/>
-            </a:pPr>
-            <a:endParaRPr lang="nl-NL" sz="1800" dirty="0">
-              <a:cs typeface="Courier New" panose="02070309020205020404" pitchFamily="49" charset="0"/>
-            </a:endParaRPr>
-          </a:p>
-          <a:p>
-            <a:pPr marL="0" indent="0">
-              <a:lnSpc>
-                <a:spcPct val="100000"/>
-              </a:lnSpc>
-              <a:spcBef>
-                <a:spcPts val="600"/>
-              </a:spcBef>
-              <a:buNone/>
-            </a:pPr>
-            <a:r>
-              <a:rPr lang="nl-NL" sz="1800" dirty="0">
-                <a:cs typeface="Courier New" panose="02070309020205020404" pitchFamily="49" charset="0"/>
-              </a:rPr>
-              <a:t>In een workflow kun je deze tools als acties opnemen.</a:t>
-            </a:r>
-          </a:p>
-          <a:p>
-            <a:pPr marL="0" indent="0">
-              <a:lnSpc>
-                <a:spcPct val="100000"/>
-              </a:lnSpc>
-              <a:spcBef>
-                <a:spcPts val="600"/>
-              </a:spcBef>
-              <a:buNone/>
-            </a:pPr>
-            <a:endParaRPr lang="nl-NL" sz="1800" dirty="0">
-              <a:cs typeface="Courier New" panose="02070309020205020404" pitchFamily="49" charset="0"/>
-            </a:endParaRPr>
-          </a:p>
-          <a:p>
-            <a:pPr marL="0" indent="0">
-              <a:lnSpc>
-                <a:spcPct val="100000"/>
-              </a:lnSpc>
-              <a:spcBef>
-                <a:spcPts val="600"/>
-              </a:spcBef>
-              <a:buNone/>
-            </a:pPr>
-            <a:r>
-              <a:rPr lang="nl-NL" sz="1800" dirty="0">
-                <a:cs typeface="Courier New" panose="02070309020205020404" pitchFamily="49" charset="0"/>
-              </a:rPr>
-              <a:t>Bij het pushen van code draait de workflow.</a:t>
-            </a:r>
-          </a:p>
         </p:txBody>
       </p:sp>
-      <p:grpSp>
-        <p:nvGrpSpPr>
-          <p:cNvPr id="31" name="Group 30">
-            <a:extLst>
-              <a:ext uri="{FF2B5EF4-FFF2-40B4-BE49-F238E27FC236}">
-                <a16:creationId xmlns:a16="http://schemas.microsoft.com/office/drawing/2014/main" id="{FF8E1765-0BBD-85C1-2ACF-779951D2C35A}"/>
-              </a:ext>
-            </a:extLst>
-          </p:cNvPr>
-          <p:cNvGrpSpPr/>
+      <p:cxnSp>
+        <p:nvCxnSpPr>
+          <p:cNvPr id="17" name="Straight Arrow Connector 16">
+            <a:extLst>
+              <a:ext uri="{FF2B5EF4-FFF2-40B4-BE49-F238E27FC236}">
+                <a16:creationId xmlns:a16="http://schemas.microsoft.com/office/drawing/2014/main" id="{2468B279-6417-9DBB-04C7-15F29D9D351B}"/>
+              </a:ext>
+            </a:extLst>
+          </p:cNvPr>
+          <p:cNvCxnSpPr>
+            <a:stCxn id="5" idx="2"/>
+            <a:endCxn id="10" idx="0"/>
+          </p:cNvCxnSpPr>
           <p:nvPr/>
-        </p:nvGrpSpPr>
-        <p:grpSpPr>
+        </p:nvCxnSpPr>
+        <p:spPr>
           <a:xfrm>
-            <a:off x="7972435" y="1456267"/>
-            <a:ext cx="2474103" cy="4736567"/>
-            <a:chOff x="8879691" y="1067330"/>
-            <a:chExt cx="2474103" cy="4736567"/>
+            <a:off x="7904449" y="1178985"/>
+            <a:ext cx="1305034" cy="491923"/>
           </a:xfrm>
-        </p:grpSpPr>
-        <p:sp>
-          <p:nvSpPr>
-            <p:cNvPr id="5" name="Rectangle 4">
-              <a:extLst>
-                <a:ext uri="{FF2B5EF4-FFF2-40B4-BE49-F238E27FC236}">
-                  <a16:creationId xmlns:a16="http://schemas.microsoft.com/office/drawing/2014/main" id="{170391FE-8159-720D-E458-6B6B14DF3103}"/>
-                </a:ext>
-              </a:extLst>
-            </p:cNvPr>
-            <p:cNvSpPr/>
-            <p:nvPr/>
-          </p:nvSpPr>
-          <p:spPr>
-            <a:xfrm>
-              <a:off x="9429749" y="1067330"/>
-              <a:ext cx="1493043" cy="595048"/>
-            </a:xfrm>
-            <a:prstGeom prst="rect">
-              <a:avLst/>
-            </a:prstGeom>
-            <a:solidFill>
-              <a:schemeClr val="accent5">
-                <a:lumMod val="40000"/>
-                <a:lumOff val="60000"/>
-              </a:schemeClr>
-            </a:solidFill>
-          </p:spPr>
-          <p:style>
-            <a:lnRef idx="1">
-              <a:schemeClr val="accent5"/>
-            </a:lnRef>
-            <a:fillRef idx="2">
-              <a:schemeClr val="accent5"/>
-            </a:fillRef>
-            <a:effectRef idx="1">
-              <a:schemeClr val="accent5"/>
-            </a:effectRef>
-            <a:fontRef idx="minor">
-              <a:schemeClr val="dk1"/>
-            </a:fontRef>
-          </p:style>
-          <p:txBody>
-            <a:bodyPr rtlCol="0" anchor="ctr"/>
-            <a:lstStyle/>
-            <a:p>
-              <a:pPr algn="ctr"/>
-              <a:r>
-                <a:rPr lang="nl-NL" dirty="0"/>
-                <a:t>push</a:t>
-              </a:r>
-            </a:p>
-          </p:txBody>
-        </p:sp>
-        <p:sp>
-          <p:nvSpPr>
-            <p:cNvPr id="6" name="Rectangle 5">
-              <a:extLst>
-                <a:ext uri="{FF2B5EF4-FFF2-40B4-BE49-F238E27FC236}">
-                  <a16:creationId xmlns:a16="http://schemas.microsoft.com/office/drawing/2014/main" id="{04F2A86E-C55A-893A-7C85-495CD631CAEE}"/>
-                </a:ext>
-              </a:extLst>
-            </p:cNvPr>
-            <p:cNvSpPr/>
-            <p:nvPr/>
-          </p:nvSpPr>
-          <p:spPr>
-            <a:xfrm>
-              <a:off x="8879691" y="2100263"/>
-              <a:ext cx="2474103" cy="2936081"/>
-            </a:xfrm>
-            <a:prstGeom prst="rect">
-              <a:avLst/>
-            </a:prstGeom>
-            <a:solidFill>
-              <a:schemeClr val="bg1">
-                <a:lumMod val="95000"/>
-              </a:schemeClr>
-            </a:solidFill>
-          </p:spPr>
-          <p:style>
-            <a:lnRef idx="1">
-              <a:schemeClr val="accent3"/>
-            </a:lnRef>
-            <a:fillRef idx="2">
-              <a:schemeClr val="accent3"/>
-            </a:fillRef>
-            <a:effectRef idx="1">
-              <a:schemeClr val="accent3"/>
-            </a:effectRef>
-            <a:fontRef idx="minor">
-              <a:schemeClr val="dk1"/>
-            </a:fontRef>
-          </p:style>
-          <p:txBody>
-            <a:bodyPr vert="vert270" rtlCol="0" anchor="t"/>
-            <a:lstStyle/>
-            <a:p>
-              <a:pPr algn="ctr"/>
-              <a:r>
-                <a:rPr lang="nl-NL" dirty="0"/>
-                <a:t>Pipeline</a:t>
-              </a:r>
-            </a:p>
-          </p:txBody>
-        </p:sp>
-        <p:sp>
-          <p:nvSpPr>
-            <p:cNvPr id="7" name="Rectangle: Rounded Corners 6">
-              <a:extLst>
-                <a:ext uri="{FF2B5EF4-FFF2-40B4-BE49-F238E27FC236}">
-                  <a16:creationId xmlns:a16="http://schemas.microsoft.com/office/drawing/2014/main" id="{796E9195-DDC1-96BA-1B5E-693236B34920}"/>
-                </a:ext>
-              </a:extLst>
-            </p:cNvPr>
-            <p:cNvSpPr/>
-            <p:nvPr/>
-          </p:nvSpPr>
-          <p:spPr>
-            <a:xfrm>
-              <a:off x="9429747" y="2353867"/>
-              <a:ext cx="1493043" cy="595047"/>
-            </a:xfrm>
-            <a:prstGeom prst="roundRect">
-              <a:avLst/>
-            </a:prstGeom>
-            <a:solidFill>
-              <a:schemeClr val="accent6">
-                <a:lumMod val="40000"/>
-                <a:lumOff val="60000"/>
-              </a:schemeClr>
-            </a:solidFill>
-          </p:spPr>
-          <p:style>
-            <a:lnRef idx="1">
-              <a:schemeClr val="accent6"/>
-            </a:lnRef>
-            <a:fillRef idx="2">
-              <a:schemeClr val="accent6"/>
-            </a:fillRef>
-            <a:effectRef idx="1">
-              <a:schemeClr val="accent6"/>
-            </a:effectRef>
-            <a:fontRef idx="minor">
-              <a:schemeClr val="dk1"/>
-            </a:fontRef>
-          </p:style>
-          <p:txBody>
-            <a:bodyPr rtlCol="0" anchor="ctr"/>
-            <a:lstStyle/>
-            <a:p>
-              <a:pPr algn="ctr"/>
-              <a:r>
-                <a:rPr lang="nl-NL" sz="1200" dirty="0"/>
-                <a:t>Step 1</a:t>
-              </a:r>
-            </a:p>
-            <a:p>
-              <a:pPr algn="ctr"/>
-              <a:r>
-                <a:rPr lang="nl-NL" dirty="0">
-                  <a:latin typeface="Courier New" panose="02070309020205020404" pitchFamily="49" charset="0"/>
-                  <a:cs typeface="Courier New" panose="02070309020205020404" pitchFamily="49" charset="0"/>
-                </a:rPr>
-                <a:t>black</a:t>
-              </a:r>
-            </a:p>
-          </p:txBody>
-        </p:sp>
-        <p:sp>
-          <p:nvSpPr>
-            <p:cNvPr id="8" name="Rectangle: Rounded Corners 7">
-              <a:extLst>
-                <a:ext uri="{FF2B5EF4-FFF2-40B4-BE49-F238E27FC236}">
-                  <a16:creationId xmlns:a16="http://schemas.microsoft.com/office/drawing/2014/main" id="{53B4483D-1BCD-46D7-F099-80616DFC7B1A}"/>
-                </a:ext>
-              </a:extLst>
-            </p:cNvPr>
-            <p:cNvSpPr/>
-            <p:nvPr/>
-          </p:nvSpPr>
-          <p:spPr>
-            <a:xfrm>
-              <a:off x="9429749" y="3236648"/>
-              <a:ext cx="1493043" cy="595047"/>
-            </a:xfrm>
-            <a:prstGeom prst="roundRect">
-              <a:avLst/>
-            </a:prstGeom>
-            <a:solidFill>
-              <a:schemeClr val="accent6">
-                <a:lumMod val="40000"/>
-                <a:lumOff val="60000"/>
-              </a:schemeClr>
-            </a:solidFill>
-          </p:spPr>
-          <p:style>
-            <a:lnRef idx="1">
-              <a:schemeClr val="accent6"/>
-            </a:lnRef>
-            <a:fillRef idx="2">
-              <a:schemeClr val="accent6"/>
-            </a:fillRef>
-            <a:effectRef idx="1">
-              <a:schemeClr val="accent6"/>
-            </a:effectRef>
-            <a:fontRef idx="minor">
-              <a:schemeClr val="dk1"/>
-            </a:fontRef>
-          </p:style>
-          <p:txBody>
-            <a:bodyPr rtlCol="0" anchor="ctr"/>
-            <a:lstStyle/>
-            <a:p>
-              <a:pPr algn="ctr"/>
-              <a:r>
-                <a:rPr lang="nl-NL" sz="1200" dirty="0"/>
-                <a:t>Step 2</a:t>
-              </a:r>
-            </a:p>
-            <a:p>
-              <a:pPr algn="ctr"/>
-              <a:r>
-                <a:rPr lang="nl-NL" dirty="0" err="1">
-                  <a:latin typeface="Courier New" panose="02070309020205020404" pitchFamily="49" charset="0"/>
-                  <a:cs typeface="Courier New" panose="02070309020205020404" pitchFamily="49" charset="0"/>
-                </a:rPr>
-                <a:t>pylint</a:t>
-              </a:r>
-              <a:endParaRPr lang="nl-NL" dirty="0">
-                <a:latin typeface="Courier New" panose="02070309020205020404" pitchFamily="49" charset="0"/>
-                <a:cs typeface="Courier New" panose="02070309020205020404" pitchFamily="49" charset="0"/>
-              </a:endParaRPr>
-            </a:p>
-          </p:txBody>
-        </p:sp>
-        <p:sp>
-          <p:nvSpPr>
-            <p:cNvPr id="9" name="Rectangle: Rounded Corners 8">
-              <a:extLst>
-                <a:ext uri="{FF2B5EF4-FFF2-40B4-BE49-F238E27FC236}">
-                  <a16:creationId xmlns:a16="http://schemas.microsoft.com/office/drawing/2014/main" id="{C118A17D-D1D0-ECE7-6E59-59089E4AE054}"/>
-                </a:ext>
-              </a:extLst>
-            </p:cNvPr>
-            <p:cNvSpPr/>
-            <p:nvPr/>
-          </p:nvSpPr>
-          <p:spPr>
-            <a:xfrm>
-              <a:off x="9429748" y="4119430"/>
-              <a:ext cx="1493043" cy="595047"/>
-            </a:xfrm>
-            <a:prstGeom prst="roundRect">
-              <a:avLst/>
-            </a:prstGeom>
-            <a:solidFill>
-              <a:schemeClr val="accent6">
-                <a:lumMod val="40000"/>
-                <a:lumOff val="60000"/>
-              </a:schemeClr>
-            </a:solidFill>
-          </p:spPr>
-          <p:style>
-            <a:lnRef idx="1">
-              <a:schemeClr val="accent6"/>
-            </a:lnRef>
-            <a:fillRef idx="2">
-              <a:schemeClr val="accent6"/>
-            </a:fillRef>
-            <a:effectRef idx="1">
-              <a:schemeClr val="accent6"/>
-            </a:effectRef>
-            <a:fontRef idx="minor">
-              <a:schemeClr val="dk1"/>
-            </a:fontRef>
-          </p:style>
-          <p:txBody>
-            <a:bodyPr rtlCol="0" anchor="ctr"/>
-            <a:lstStyle/>
-            <a:p>
-              <a:pPr algn="ctr"/>
-              <a:r>
-                <a:rPr lang="nl-NL" sz="1200" dirty="0"/>
-                <a:t>Step 3</a:t>
-              </a:r>
-            </a:p>
-            <a:p>
-              <a:pPr algn="ctr"/>
-              <a:r>
-                <a:rPr lang="nl-NL" dirty="0" err="1">
-                  <a:latin typeface="Courier New" panose="02070309020205020404" pitchFamily="49" charset="0"/>
-                  <a:cs typeface="Courier New" panose="02070309020205020404" pitchFamily="49" charset="0"/>
-                </a:rPr>
-                <a:t>pytest</a:t>
-              </a:r>
-              <a:endParaRPr lang="nl-NL" dirty="0">
-                <a:latin typeface="Courier New" panose="02070309020205020404" pitchFamily="49" charset="0"/>
-                <a:cs typeface="Courier New" panose="02070309020205020404" pitchFamily="49" charset="0"/>
-              </a:endParaRPr>
-            </a:p>
-          </p:txBody>
-        </p:sp>
-        <p:cxnSp>
-          <p:nvCxnSpPr>
-            <p:cNvPr id="11" name="Straight Arrow Connector 10">
-              <a:extLst>
-                <a:ext uri="{FF2B5EF4-FFF2-40B4-BE49-F238E27FC236}">
-                  <a16:creationId xmlns:a16="http://schemas.microsoft.com/office/drawing/2014/main" id="{5A060B03-3ACE-0921-C1BE-B675A4480303}"/>
-                </a:ext>
-              </a:extLst>
-            </p:cNvPr>
-            <p:cNvCxnSpPr>
-              <a:stCxn id="5" idx="2"/>
-              <a:endCxn id="7" idx="0"/>
-            </p:cNvCxnSpPr>
-            <p:nvPr/>
-          </p:nvCxnSpPr>
-          <p:spPr>
-            <a:xfrm flipH="1">
-              <a:off x="10176269" y="1662378"/>
-              <a:ext cx="2" cy="691489"/>
-            </a:xfrm>
-            <a:prstGeom prst="straightConnector1">
-              <a:avLst/>
-            </a:prstGeom>
-            <a:ln>
-              <a:tailEnd type="triangle"/>
-            </a:ln>
-          </p:spPr>
-          <p:style>
-            <a:lnRef idx="2">
-              <a:schemeClr val="dk1"/>
-            </a:lnRef>
-            <a:fillRef idx="0">
-              <a:schemeClr val="dk1"/>
-            </a:fillRef>
-            <a:effectRef idx="1">
-              <a:schemeClr val="dk1"/>
-            </a:effectRef>
-            <a:fontRef idx="minor">
-              <a:schemeClr val="tx1"/>
-            </a:fontRef>
-          </p:style>
-        </p:cxnSp>
-        <p:cxnSp>
-          <p:nvCxnSpPr>
-            <p:cNvPr id="13" name="Straight Arrow Connector 12">
-              <a:extLst>
-                <a:ext uri="{FF2B5EF4-FFF2-40B4-BE49-F238E27FC236}">
-                  <a16:creationId xmlns:a16="http://schemas.microsoft.com/office/drawing/2014/main" id="{8350F651-0454-FD12-2F64-A3478ACBAE77}"/>
-                </a:ext>
-              </a:extLst>
-            </p:cNvPr>
-            <p:cNvCxnSpPr>
-              <a:stCxn id="7" idx="2"/>
-              <a:endCxn id="8" idx="0"/>
-            </p:cNvCxnSpPr>
-            <p:nvPr/>
-          </p:nvCxnSpPr>
-          <p:spPr>
-            <a:xfrm>
-              <a:off x="10176269" y="2948914"/>
-              <a:ext cx="2" cy="287734"/>
-            </a:xfrm>
-            <a:prstGeom prst="straightConnector1">
-              <a:avLst/>
-            </a:prstGeom>
-            <a:ln>
-              <a:tailEnd type="triangle"/>
-            </a:ln>
-          </p:spPr>
-          <p:style>
-            <a:lnRef idx="2">
-              <a:schemeClr val="dk1"/>
-            </a:lnRef>
-            <a:fillRef idx="0">
-              <a:schemeClr val="dk1"/>
-            </a:fillRef>
-            <a:effectRef idx="1">
-              <a:schemeClr val="dk1"/>
-            </a:effectRef>
-            <a:fontRef idx="minor">
-              <a:schemeClr val="tx1"/>
-            </a:fontRef>
-          </p:style>
-        </p:cxnSp>
-        <p:cxnSp>
-          <p:nvCxnSpPr>
-            <p:cNvPr id="16" name="Straight Arrow Connector 15">
-              <a:extLst>
-                <a:ext uri="{FF2B5EF4-FFF2-40B4-BE49-F238E27FC236}">
-                  <a16:creationId xmlns:a16="http://schemas.microsoft.com/office/drawing/2014/main" id="{E3BE73B0-F292-0DE4-DECA-F9AC8F31041E}"/>
-                </a:ext>
-              </a:extLst>
-            </p:cNvPr>
-            <p:cNvCxnSpPr>
-              <a:stCxn id="8" idx="2"/>
-              <a:endCxn id="9" idx="0"/>
-            </p:cNvCxnSpPr>
-            <p:nvPr/>
-          </p:nvCxnSpPr>
-          <p:spPr>
-            <a:xfrm flipH="1">
-              <a:off x="10176270" y="3831695"/>
-              <a:ext cx="1" cy="287735"/>
-            </a:xfrm>
-            <a:prstGeom prst="straightConnector1">
-              <a:avLst/>
-            </a:prstGeom>
-            <a:ln>
-              <a:tailEnd type="triangle"/>
-            </a:ln>
-          </p:spPr>
-          <p:style>
-            <a:lnRef idx="2">
-              <a:schemeClr val="dk1"/>
-            </a:lnRef>
-            <a:fillRef idx="0">
-              <a:schemeClr val="dk1"/>
-            </a:fillRef>
-            <a:effectRef idx="1">
-              <a:schemeClr val="dk1"/>
-            </a:effectRef>
-            <a:fontRef idx="minor">
-              <a:schemeClr val="tx1"/>
-            </a:fontRef>
-          </p:style>
-        </p:cxnSp>
-        <p:pic>
-          <p:nvPicPr>
-            <p:cNvPr id="21" name="Graphic 20" descr="Checkmark with solid fill">
-              <a:extLst>
-                <a:ext uri="{FF2B5EF4-FFF2-40B4-BE49-F238E27FC236}">
-                  <a16:creationId xmlns:a16="http://schemas.microsoft.com/office/drawing/2014/main" id="{B770E1A5-7367-A485-4B38-FD64612DD221}"/>
-                </a:ext>
-              </a:extLst>
-            </p:cNvPr>
-            <p:cNvPicPr>
-              <a:picLocks noChangeAspect="1"/>
-            </p:cNvPicPr>
-            <p:nvPr/>
-          </p:nvPicPr>
-          <p:blipFill>
-            <a:blip r:embed="rId3">
-              <a:extLst>
-                <a:ext uri="{96DAC541-7B7A-43D3-8B79-37D633B846F1}">
-                  <asvg:svgBlip xmlns:asvg="http://schemas.microsoft.com/office/drawing/2016/SVG/main" r:embed="rId4"/>
-                </a:ext>
-              </a:extLst>
-            </a:blip>
-            <a:stretch>
-              <a:fillRect/>
-            </a:stretch>
-          </p:blipFill>
-          <p:spPr>
-            <a:xfrm>
-              <a:off x="9986428" y="5289946"/>
-              <a:ext cx="379679" cy="513951"/>
-            </a:xfrm>
-            <a:prstGeom prst="rect">
-              <a:avLst/>
-            </a:prstGeom>
-          </p:spPr>
-        </p:pic>
-        <p:cxnSp>
-          <p:nvCxnSpPr>
-            <p:cNvPr id="30" name="Straight Arrow Connector 29">
-              <a:extLst>
-                <a:ext uri="{FF2B5EF4-FFF2-40B4-BE49-F238E27FC236}">
-                  <a16:creationId xmlns:a16="http://schemas.microsoft.com/office/drawing/2014/main" id="{B3CB4D9E-83B2-9B18-B4BF-2B250392EA0A}"/>
-                </a:ext>
-              </a:extLst>
-            </p:cNvPr>
-            <p:cNvCxnSpPr>
-              <a:stCxn id="9" idx="2"/>
-            </p:cNvCxnSpPr>
-            <p:nvPr/>
-          </p:nvCxnSpPr>
-          <p:spPr>
-            <a:xfrm flipH="1">
-              <a:off x="10176268" y="4714477"/>
-              <a:ext cx="2" cy="575471"/>
-            </a:xfrm>
-            <a:prstGeom prst="straightConnector1">
-              <a:avLst/>
-            </a:prstGeom>
-            <a:ln>
-              <a:tailEnd type="triangle"/>
-            </a:ln>
-          </p:spPr>
-          <p:style>
-            <a:lnRef idx="2">
-              <a:schemeClr val="dk1"/>
-            </a:lnRef>
-            <a:fillRef idx="0">
-              <a:schemeClr val="dk1"/>
-            </a:fillRef>
-            <a:effectRef idx="1">
-              <a:schemeClr val="dk1"/>
-            </a:effectRef>
-            <a:fontRef idx="minor">
-              <a:schemeClr val="tx1"/>
-            </a:fontRef>
-          </p:style>
-        </p:cxnSp>
-      </p:grpSp>
+          <a:prstGeom prst="straightConnector1">
+            <a:avLst/>
+          </a:prstGeom>
+          <a:ln>
+            <a:tailEnd type="triangle"/>
+          </a:ln>
+        </p:spPr>
+        <p:style>
+          <a:lnRef idx="2">
+            <a:schemeClr val="dk1"/>
+          </a:lnRef>
+          <a:fillRef idx="0">
+            <a:schemeClr val="dk1"/>
+          </a:fillRef>
+          <a:effectRef idx="1">
+            <a:schemeClr val="dk1"/>
+          </a:effectRef>
+          <a:fontRef idx="minor">
+            <a:schemeClr val="tx1"/>
+          </a:fontRef>
+        </p:style>
+      </p:cxnSp>
+      <p:cxnSp>
+        <p:nvCxnSpPr>
+          <p:cNvPr id="19" name="Straight Arrow Connector 18">
+            <a:extLst>
+              <a:ext uri="{FF2B5EF4-FFF2-40B4-BE49-F238E27FC236}">
+                <a16:creationId xmlns:a16="http://schemas.microsoft.com/office/drawing/2014/main" id="{1B2E4CEA-8650-619D-C318-AE600CA70D75}"/>
+              </a:ext>
+            </a:extLst>
+          </p:cNvPr>
+          <p:cNvCxnSpPr>
+            <a:stCxn id="4" idx="2"/>
+            <a:endCxn id="10" idx="0"/>
+          </p:cNvCxnSpPr>
+          <p:nvPr/>
+        </p:nvCxnSpPr>
+        <p:spPr>
+          <a:xfrm flipH="1">
+            <a:off x="9209483" y="1178985"/>
+            <a:ext cx="1126897" cy="491923"/>
+          </a:xfrm>
+          <a:prstGeom prst="straightConnector1">
+            <a:avLst/>
+          </a:prstGeom>
+          <a:ln>
+            <a:tailEnd type="triangle"/>
+          </a:ln>
+        </p:spPr>
+        <p:style>
+          <a:lnRef idx="2">
+            <a:schemeClr val="dk1"/>
+          </a:lnRef>
+          <a:fillRef idx="0">
+            <a:schemeClr val="dk1"/>
+          </a:fillRef>
+          <a:effectRef idx="1">
+            <a:schemeClr val="dk1"/>
+          </a:effectRef>
+          <a:fontRef idx="minor">
+            <a:schemeClr val="tx1"/>
+          </a:fontRef>
+        </p:style>
+      </p:cxnSp>
+      <p:cxnSp>
+        <p:nvCxnSpPr>
+          <p:cNvPr id="22" name="Straight Arrow Connector 21">
+            <a:extLst>
+              <a:ext uri="{FF2B5EF4-FFF2-40B4-BE49-F238E27FC236}">
+                <a16:creationId xmlns:a16="http://schemas.microsoft.com/office/drawing/2014/main" id="{9897E8C8-40FD-F88A-7084-7C0DA4AA310F}"/>
+              </a:ext>
+            </a:extLst>
+          </p:cNvPr>
+          <p:cNvCxnSpPr/>
+          <p:nvPr/>
+        </p:nvCxnSpPr>
+        <p:spPr>
+          <a:xfrm>
+            <a:off x="9003323" y="2265956"/>
+            <a:ext cx="0" cy="491924"/>
+          </a:xfrm>
+          <a:prstGeom prst="straightConnector1">
+            <a:avLst/>
+          </a:prstGeom>
+          <a:ln>
+            <a:tailEnd type="triangle"/>
+          </a:ln>
+        </p:spPr>
+        <p:style>
+          <a:lnRef idx="2">
+            <a:schemeClr val="dk1"/>
+          </a:lnRef>
+          <a:fillRef idx="0">
+            <a:schemeClr val="dk1"/>
+          </a:fillRef>
+          <a:effectRef idx="1">
+            <a:schemeClr val="dk1"/>
+          </a:effectRef>
+          <a:fontRef idx="minor">
+            <a:schemeClr val="tx1"/>
+          </a:fontRef>
+        </p:style>
+      </p:cxnSp>
+      <p:cxnSp>
+        <p:nvCxnSpPr>
+          <p:cNvPr id="23" name="Straight Arrow Connector 22">
+            <a:extLst>
+              <a:ext uri="{FF2B5EF4-FFF2-40B4-BE49-F238E27FC236}">
+                <a16:creationId xmlns:a16="http://schemas.microsoft.com/office/drawing/2014/main" id="{65818A20-5217-AF12-F877-8F366A382CC8}"/>
+              </a:ext>
+            </a:extLst>
+          </p:cNvPr>
+          <p:cNvCxnSpPr>
+            <a:cxnSpLocks/>
+          </p:cNvCxnSpPr>
+          <p:nvPr/>
+        </p:nvCxnSpPr>
+        <p:spPr>
+          <a:xfrm flipV="1">
+            <a:off x="9493347" y="2265956"/>
+            <a:ext cx="0" cy="491924"/>
+          </a:xfrm>
+          <a:prstGeom prst="straightConnector1">
+            <a:avLst/>
+          </a:prstGeom>
+          <a:ln>
+            <a:tailEnd type="triangle"/>
+          </a:ln>
+        </p:spPr>
+        <p:style>
+          <a:lnRef idx="2">
+            <a:schemeClr val="dk1"/>
+          </a:lnRef>
+          <a:fillRef idx="0">
+            <a:schemeClr val="dk1"/>
+          </a:fillRef>
+          <a:effectRef idx="1">
+            <a:schemeClr val="dk1"/>
+          </a:effectRef>
+          <a:fontRef idx="minor">
+            <a:schemeClr val="tx1"/>
+          </a:fontRef>
+        </p:style>
+      </p:cxnSp>
     </p:spTree>
     <p:extLst>
       <p:ext uri="{BB962C8B-B14F-4D97-AF65-F5344CB8AC3E}">
@@ -20162,7 +20341,71 @@
               <a:spcBef>
                 <a:spcPts val="600"/>
               </a:spcBef>
-              <a:buFont typeface="Arial" panose="020B0604020202020204" pitchFamily="34" charset="0"/>
+              <a:buNone/>
+            </a:pPr>
+            <a:r>
+              <a:rPr lang="nl-NL" sz="1800" dirty="0">
+                <a:cs typeface="Courier New" panose="02070309020205020404" pitchFamily="49" charset="0"/>
+              </a:rPr>
+              <a:t>Kies bestaande workflow (vb. Python package).</a:t>
+            </a:r>
+          </a:p>
+          <a:p>
+            <a:pPr marL="0" indent="0">
+              <a:lnSpc>
+                <a:spcPct val="100000"/>
+              </a:lnSpc>
+              <a:spcBef>
+                <a:spcPts val="600"/>
+              </a:spcBef>
+              <a:buFont typeface="Arial" panose="020B0604020202020204" pitchFamily="34" charset="0"/>
+              <a:buNone/>
+            </a:pPr>
+            <a:endParaRPr lang="nl-NL" sz="1800" dirty="0">
+              <a:cs typeface="Courier New" panose="02070309020205020404" pitchFamily="49" charset="0"/>
+            </a:endParaRPr>
+          </a:p>
+          <a:p>
+            <a:pPr marL="0" indent="0">
+              <a:lnSpc>
+                <a:spcPct val="100000"/>
+              </a:lnSpc>
+              <a:spcBef>
+                <a:spcPts val="600"/>
+              </a:spcBef>
+              <a:buFont typeface="Arial" panose="020B0604020202020204" pitchFamily="34" charset="0"/>
+              <a:buNone/>
+            </a:pPr>
+            <a:r>
+              <a:rPr lang="nl-NL" sz="1800" dirty="0">
+                <a:cs typeface="Courier New" panose="02070309020205020404" pitchFamily="49" charset="0"/>
+              </a:rPr>
+              <a:t>Of:</a:t>
+            </a:r>
+          </a:p>
+          <a:p>
+            <a:pPr marL="0" indent="0">
+              <a:lnSpc>
+                <a:spcPct val="100000"/>
+              </a:lnSpc>
+              <a:spcBef>
+                <a:spcPts val="600"/>
+              </a:spcBef>
+              <a:buFont typeface="Arial" panose="020B0604020202020204" pitchFamily="34" charset="0"/>
+              <a:buNone/>
+            </a:pPr>
+            <a:endParaRPr lang="nl-NL" sz="1800" dirty="0">
+              <a:cs typeface="Courier New" panose="02070309020205020404" pitchFamily="49" charset="0"/>
+            </a:endParaRPr>
+          </a:p>
+          <a:p>
+            <a:pPr marL="0" indent="0">
+              <a:lnSpc>
+                <a:spcPct val="100000"/>
+              </a:lnSpc>
+              <a:spcBef>
+                <a:spcPts val="600"/>
+              </a:spcBef>
               <a:buNone/>
             </a:pPr>
             <a:r>
@@ -20182,72 +20425,6 @@
                 <a:cs typeface="Courier New" panose="02070309020205020404" pitchFamily="49" charset="0"/>
               </a:rPr>
               <a:t>].</a:t>
-            </a:r>
-          </a:p>
-          <a:p>
-            <a:pPr marL="0" indent="0">
-              <a:lnSpc>
-                <a:spcPct val="100000"/>
-              </a:lnSpc>
-              <a:spcBef>
-                <a:spcPts val="600"/>
-              </a:spcBef>
-              <a:buFont typeface="Arial" panose="020B0604020202020204" pitchFamily="34" charset="0"/>
-              <a:buNone/>
-            </a:pPr>
-            <a:endParaRPr lang="nl-NL" sz="1800" dirty="0">
-              <a:cs typeface="Courier New" panose="02070309020205020404" pitchFamily="49" charset="0"/>
-            </a:endParaRPr>
-          </a:p>
-          <a:p>
-            <a:pPr marL="0" indent="0">
-              <a:lnSpc>
-                <a:spcPct val="100000"/>
-              </a:lnSpc>
-              <a:spcBef>
-                <a:spcPts val="600"/>
-              </a:spcBef>
-              <a:buFont typeface="Arial" panose="020B0604020202020204" pitchFamily="34" charset="0"/>
-              <a:buNone/>
-            </a:pPr>
-            <a:r>
-              <a:rPr lang="nl-NL" sz="1800" dirty="0">
-                <a:cs typeface="Courier New" panose="02070309020205020404" pitchFamily="49" charset="0"/>
-              </a:rPr>
-              <a:t>Of:</a:t>
-            </a:r>
-          </a:p>
-          <a:p>
-            <a:pPr marL="0" indent="0">
-              <a:lnSpc>
-                <a:spcPct val="100000"/>
-              </a:lnSpc>
-              <a:spcBef>
-                <a:spcPts val="600"/>
-              </a:spcBef>
-              <a:buFont typeface="Arial" panose="020B0604020202020204" pitchFamily="34" charset="0"/>
-              <a:buNone/>
-            </a:pPr>
-            <a:endParaRPr lang="nl-NL" sz="1800" dirty="0">
-              <a:cs typeface="Courier New" panose="02070309020205020404" pitchFamily="49" charset="0"/>
-            </a:endParaRPr>
-          </a:p>
-          <a:p>
-            <a:pPr marL="0" indent="0">
-              <a:lnSpc>
-                <a:spcPct val="100000"/>
-              </a:lnSpc>
-              <a:spcBef>
-                <a:spcPts val="600"/>
-              </a:spcBef>
-              <a:buFont typeface="Arial" panose="020B0604020202020204" pitchFamily="34" charset="0"/>
-              <a:buNone/>
-            </a:pPr>
-            <a:r>
-              <a:rPr lang="nl-NL" sz="1800" dirty="0">
-                <a:cs typeface="Courier New" panose="02070309020205020404" pitchFamily="49" charset="0"/>
-              </a:rPr>
-              <a:t>Kies bestaande workflow, bv. Python package.</a:t>
             </a:r>
           </a:p>
           <a:p>

--- a/git_course/2_collaboration/git_collaboration.pptx
+++ b/git_course/2_collaboration/git_collaboration.pptx
@@ -5,7 +5,7 @@
     <p:sldMasterId id="2147483648" r:id="rId1"/>
   </p:sldMasterIdLst>
   <p:notesMasterIdLst>
-    <p:notesMasterId r:id="rId67"/>
+    <p:notesMasterId r:id="rId68"/>
   </p:notesMasterIdLst>
   <p:sldIdLst>
     <p:sldId id="256" r:id="rId2"/>
@@ -35,44 +35,45 @@
     <p:sldId id="468" r:id="rId26"/>
     <p:sldId id="469" r:id="rId27"/>
     <p:sldId id="470" r:id="rId28"/>
-    <p:sldId id="463" r:id="rId29"/>
-    <p:sldId id="475" r:id="rId30"/>
-    <p:sldId id="476" r:id="rId31"/>
-    <p:sldId id="477" r:id="rId32"/>
-    <p:sldId id="478" r:id="rId33"/>
-    <p:sldId id="479" r:id="rId34"/>
-    <p:sldId id="459" r:id="rId35"/>
-    <p:sldId id="483" r:id="rId36"/>
-    <p:sldId id="484" r:id="rId37"/>
-    <p:sldId id="481" r:id="rId38"/>
-    <p:sldId id="482" r:id="rId39"/>
-    <p:sldId id="449" r:id="rId40"/>
-    <p:sldId id="389" r:id="rId41"/>
-    <p:sldId id="445" r:id="rId42"/>
-    <p:sldId id="448" r:id="rId43"/>
-    <p:sldId id="444" r:id="rId44"/>
-    <p:sldId id="493" r:id="rId45"/>
-    <p:sldId id="385" r:id="rId46"/>
-    <p:sldId id="384" r:id="rId47"/>
-    <p:sldId id="388" r:id="rId48"/>
-    <p:sldId id="494" r:id="rId49"/>
-    <p:sldId id="471" r:id="rId50"/>
-    <p:sldId id="472" r:id="rId51"/>
-    <p:sldId id="473" r:id="rId52"/>
-    <p:sldId id="474" r:id="rId53"/>
-    <p:sldId id="495" r:id="rId54"/>
-    <p:sldId id="486" r:id="rId55"/>
-    <p:sldId id="487" r:id="rId56"/>
-    <p:sldId id="489" r:id="rId57"/>
-    <p:sldId id="490" r:id="rId58"/>
-    <p:sldId id="496" r:id="rId59"/>
-    <p:sldId id="491" r:id="rId60"/>
-    <p:sldId id="492" r:id="rId61"/>
-    <p:sldId id="497" r:id="rId62"/>
-    <p:sldId id="387" r:id="rId63"/>
-    <p:sldId id="383" r:id="rId64"/>
-    <p:sldId id="386" r:id="rId65"/>
-    <p:sldId id="443" r:id="rId66"/>
+    <p:sldId id="505" r:id="rId29"/>
+    <p:sldId id="506" r:id="rId30"/>
+    <p:sldId id="463" r:id="rId31"/>
+    <p:sldId id="475" r:id="rId32"/>
+    <p:sldId id="476" r:id="rId33"/>
+    <p:sldId id="477" r:id="rId34"/>
+    <p:sldId id="478" r:id="rId35"/>
+    <p:sldId id="479" r:id="rId36"/>
+    <p:sldId id="459" r:id="rId37"/>
+    <p:sldId id="483" r:id="rId38"/>
+    <p:sldId id="484" r:id="rId39"/>
+    <p:sldId id="481" r:id="rId40"/>
+    <p:sldId id="482" r:id="rId41"/>
+    <p:sldId id="449" r:id="rId42"/>
+    <p:sldId id="445" r:id="rId43"/>
+    <p:sldId id="448" r:id="rId44"/>
+    <p:sldId id="444" r:id="rId45"/>
+    <p:sldId id="493" r:id="rId46"/>
+    <p:sldId id="385" r:id="rId47"/>
+    <p:sldId id="384" r:id="rId48"/>
+    <p:sldId id="388" r:id="rId49"/>
+    <p:sldId id="494" r:id="rId50"/>
+    <p:sldId id="471" r:id="rId51"/>
+    <p:sldId id="472" r:id="rId52"/>
+    <p:sldId id="473" r:id="rId53"/>
+    <p:sldId id="474" r:id="rId54"/>
+    <p:sldId id="495" r:id="rId55"/>
+    <p:sldId id="486" r:id="rId56"/>
+    <p:sldId id="487" r:id="rId57"/>
+    <p:sldId id="489" r:id="rId58"/>
+    <p:sldId id="490" r:id="rId59"/>
+    <p:sldId id="496" r:id="rId60"/>
+    <p:sldId id="491" r:id="rId61"/>
+    <p:sldId id="492" r:id="rId62"/>
+    <p:sldId id="497" r:id="rId63"/>
+    <p:sldId id="387" r:id="rId64"/>
+    <p:sldId id="383" r:id="rId65"/>
+    <p:sldId id="386" r:id="rId66"/>
+    <p:sldId id="443" r:id="rId67"/>
   </p:sldIdLst>
   <p:sldSz cx="12192000" cy="6858000"/>
   <p:notesSz cx="6858000" cy="9144000"/>
@@ -261,7 +262,7 @@
           <a:p>
             <a:fld id="{3BADDCAA-88FC-44D4-A91A-DD0530AB88E0}" type="datetimeFigureOut">
               <a:rPr lang="en-NL" smtClean="0"/>
-              <a:t>04/10/2026</a:t>
+              <a:t>05/10/2026</a:t>
             </a:fld>
             <a:endParaRPr lang="en-NL"/>
           </a:p>
@@ -1284,6 +1285,256 @@
         <p:cNvPr id="1" name="">
           <a:extLst>
             <a:ext uri="{FF2B5EF4-FFF2-40B4-BE49-F238E27FC236}">
+              <a16:creationId xmlns:a16="http://schemas.microsoft.com/office/drawing/2014/main" id="{5B9BF3E9-3135-67BF-46C3-C73907DAD3D6}"/>
+            </a:ext>
+          </a:extLst>
+        </p:cNvPr>
+        <p:cNvGrpSpPr/>
+        <p:nvPr/>
+      </p:nvGrpSpPr>
+      <p:grpSpPr>
+        <a:xfrm>
+          <a:off x="0" y="0"/>
+          <a:ext cx="0" cy="0"/>
+          <a:chOff x="0" y="0"/>
+          <a:chExt cx="0" cy="0"/>
+        </a:xfrm>
+      </p:grpSpPr>
+      <p:sp>
+        <p:nvSpPr>
+          <p:cNvPr id="2" name="Slide Image Placeholder 1">
+            <a:extLst>
+              <a:ext uri="{FF2B5EF4-FFF2-40B4-BE49-F238E27FC236}">
+                <a16:creationId xmlns:a16="http://schemas.microsoft.com/office/drawing/2014/main" id="{E8CEFE9E-0886-43FF-12FB-A20D161BE59E}"/>
+              </a:ext>
+            </a:extLst>
+          </p:cNvPr>
+          <p:cNvSpPr>
+            <a:spLocks noGrp="1" noRot="1" noChangeAspect="1"/>
+          </p:cNvSpPr>
+          <p:nvPr>
+            <p:ph type="sldImg"/>
+          </p:nvPr>
+        </p:nvSpPr>
+        <p:spPr/>
+      </p:sp>
+      <p:sp>
+        <p:nvSpPr>
+          <p:cNvPr id="3" name="Notes Placeholder 2">
+            <a:extLst>
+              <a:ext uri="{FF2B5EF4-FFF2-40B4-BE49-F238E27FC236}">
+                <a16:creationId xmlns:a16="http://schemas.microsoft.com/office/drawing/2014/main" id="{7CAD6125-5447-675F-C6F3-8AAF0DFEF03B}"/>
+              </a:ext>
+            </a:extLst>
+          </p:cNvPr>
+          <p:cNvSpPr>
+            <a:spLocks noGrp="1"/>
+          </p:cNvSpPr>
+          <p:nvPr>
+            <p:ph type="body" idx="1"/>
+          </p:nvPr>
+        </p:nvSpPr>
+        <p:spPr/>
+        <p:txBody>
+          <a:bodyPr/>
+          <a:lstStyle/>
+          <a:p>
+            <a:pPr marL="0" marR="0" lvl="0" indent="0" algn="l" defTabSz="914400" rtl="0" eaLnBrk="1" fontAlgn="auto" latinLnBrk="0" hangingPunct="1">
+              <a:lnSpc>
+                <a:spcPct val="100000"/>
+              </a:lnSpc>
+              <a:spcBef>
+                <a:spcPts val="0"/>
+              </a:spcBef>
+              <a:spcAft>
+                <a:spcPts val="0"/>
+              </a:spcAft>
+              <a:buClrTx/>
+              <a:buSzTx/>
+              <a:buFontTx/>
+              <a:buNone/>
+              <a:tabLst/>
+              <a:defRPr/>
+            </a:pPr>
+            <a:endParaRPr lang="nl-NL" dirty="0"/>
+          </a:p>
+        </p:txBody>
+      </p:sp>
+      <p:sp>
+        <p:nvSpPr>
+          <p:cNvPr id="4" name="Slide Number Placeholder 3">
+            <a:extLst>
+              <a:ext uri="{FF2B5EF4-FFF2-40B4-BE49-F238E27FC236}">
+                <a16:creationId xmlns:a16="http://schemas.microsoft.com/office/drawing/2014/main" id="{9170C181-52C0-6F9F-FE9C-733CC75EC9F3}"/>
+              </a:ext>
+            </a:extLst>
+          </p:cNvPr>
+          <p:cNvSpPr>
+            <a:spLocks noGrp="1"/>
+          </p:cNvSpPr>
+          <p:nvPr>
+            <p:ph type="sldNum" sz="quarter" idx="5"/>
+          </p:nvPr>
+        </p:nvSpPr>
+        <p:spPr/>
+        <p:txBody>
+          <a:bodyPr/>
+          <a:lstStyle/>
+          <a:p>
+            <a:fld id="{4BAF0DEA-1372-46C0-8FC9-2869E9CCF7DA}" type="slidenum">
+              <a:rPr lang="en-NL" smtClean="0"/>
+              <a:t>28</a:t>
+            </a:fld>
+            <a:endParaRPr lang="en-NL"/>
+          </a:p>
+        </p:txBody>
+      </p:sp>
+    </p:spTree>
+    <p:extLst>
+      <p:ext uri="{BB962C8B-B14F-4D97-AF65-F5344CB8AC3E}">
+        <p14:creationId xmlns:p14="http://schemas.microsoft.com/office/powerpoint/2010/main" val="3319547435"/>
+      </p:ext>
+    </p:extLst>
+  </p:cSld>
+  <p:clrMapOvr>
+    <a:masterClrMapping/>
+  </p:clrMapOvr>
+</p:notes>
+</file>
+
+<file path=ppt/notesSlides/notesSlide16.xml><?xml version="1.0" encoding="utf-8"?>
+<p:notes xmlns:a="http://schemas.openxmlformats.org/drawingml/2006/main" xmlns:r="http://schemas.openxmlformats.org/officeDocument/2006/relationships" xmlns:p="http://schemas.openxmlformats.org/presentationml/2006/main">
+  <p:cSld>
+    <p:spTree>
+      <p:nvGrpSpPr>
+        <p:cNvPr id="1" name="">
+          <a:extLst>
+            <a:ext uri="{FF2B5EF4-FFF2-40B4-BE49-F238E27FC236}">
+              <a16:creationId xmlns:a16="http://schemas.microsoft.com/office/drawing/2014/main" id="{FA5A00C3-5C69-6BEF-14E3-C7C85C3BA3A2}"/>
+            </a:ext>
+          </a:extLst>
+        </p:cNvPr>
+        <p:cNvGrpSpPr/>
+        <p:nvPr/>
+      </p:nvGrpSpPr>
+      <p:grpSpPr>
+        <a:xfrm>
+          <a:off x="0" y="0"/>
+          <a:ext cx="0" cy="0"/>
+          <a:chOff x="0" y="0"/>
+          <a:chExt cx="0" cy="0"/>
+        </a:xfrm>
+      </p:grpSpPr>
+      <p:sp>
+        <p:nvSpPr>
+          <p:cNvPr id="2" name="Slide Image Placeholder 1">
+            <a:extLst>
+              <a:ext uri="{FF2B5EF4-FFF2-40B4-BE49-F238E27FC236}">
+                <a16:creationId xmlns:a16="http://schemas.microsoft.com/office/drawing/2014/main" id="{78042742-22F1-5009-7667-AC7464550473}"/>
+              </a:ext>
+            </a:extLst>
+          </p:cNvPr>
+          <p:cNvSpPr>
+            <a:spLocks noGrp="1" noRot="1" noChangeAspect="1"/>
+          </p:cNvSpPr>
+          <p:nvPr>
+            <p:ph type="sldImg"/>
+          </p:nvPr>
+        </p:nvSpPr>
+        <p:spPr/>
+      </p:sp>
+      <p:sp>
+        <p:nvSpPr>
+          <p:cNvPr id="3" name="Notes Placeholder 2">
+            <a:extLst>
+              <a:ext uri="{FF2B5EF4-FFF2-40B4-BE49-F238E27FC236}">
+                <a16:creationId xmlns:a16="http://schemas.microsoft.com/office/drawing/2014/main" id="{323B03D1-7C33-4067-6CBD-A26A169E7255}"/>
+              </a:ext>
+            </a:extLst>
+          </p:cNvPr>
+          <p:cNvSpPr>
+            <a:spLocks noGrp="1"/>
+          </p:cNvSpPr>
+          <p:nvPr>
+            <p:ph type="body" idx="1"/>
+          </p:nvPr>
+        </p:nvSpPr>
+        <p:spPr/>
+        <p:txBody>
+          <a:bodyPr/>
+          <a:lstStyle/>
+          <a:p>
+            <a:pPr marL="0" marR="0" lvl="0" indent="0" algn="l" defTabSz="914400" rtl="0" eaLnBrk="1" fontAlgn="auto" latinLnBrk="0" hangingPunct="1">
+              <a:lnSpc>
+                <a:spcPct val="100000"/>
+              </a:lnSpc>
+              <a:spcBef>
+                <a:spcPts val="0"/>
+              </a:spcBef>
+              <a:spcAft>
+                <a:spcPts val="0"/>
+              </a:spcAft>
+              <a:buClrTx/>
+              <a:buSzTx/>
+              <a:buFontTx/>
+              <a:buNone/>
+              <a:tabLst/>
+              <a:defRPr/>
+            </a:pPr>
+            <a:endParaRPr lang="nl-NL" dirty="0"/>
+          </a:p>
+        </p:txBody>
+      </p:sp>
+      <p:sp>
+        <p:nvSpPr>
+          <p:cNvPr id="4" name="Slide Number Placeholder 3">
+            <a:extLst>
+              <a:ext uri="{FF2B5EF4-FFF2-40B4-BE49-F238E27FC236}">
+                <a16:creationId xmlns:a16="http://schemas.microsoft.com/office/drawing/2014/main" id="{EF9D65E8-945F-CB5A-A9A5-7F53915ED246}"/>
+              </a:ext>
+            </a:extLst>
+          </p:cNvPr>
+          <p:cNvSpPr>
+            <a:spLocks noGrp="1"/>
+          </p:cNvSpPr>
+          <p:nvPr>
+            <p:ph type="sldNum" sz="quarter" idx="5"/>
+          </p:nvPr>
+        </p:nvSpPr>
+        <p:spPr/>
+        <p:txBody>
+          <a:bodyPr/>
+          <a:lstStyle/>
+          <a:p>
+            <a:fld id="{4BAF0DEA-1372-46C0-8FC9-2869E9CCF7DA}" type="slidenum">
+              <a:rPr lang="en-NL" smtClean="0"/>
+              <a:t>29</a:t>
+            </a:fld>
+            <a:endParaRPr lang="en-NL"/>
+          </a:p>
+        </p:txBody>
+      </p:sp>
+    </p:spTree>
+    <p:extLst>
+      <p:ext uri="{BB962C8B-B14F-4D97-AF65-F5344CB8AC3E}">
+        <p14:creationId xmlns:p14="http://schemas.microsoft.com/office/powerpoint/2010/main" val="3024331843"/>
+      </p:ext>
+    </p:extLst>
+  </p:cSld>
+  <p:clrMapOvr>
+    <a:masterClrMapping/>
+  </p:clrMapOvr>
+</p:notes>
+</file>
+
+<file path=ppt/notesSlides/notesSlide17.xml><?xml version="1.0" encoding="utf-8"?>
+<p:notes xmlns:a="http://schemas.openxmlformats.org/drawingml/2006/main" xmlns:r="http://schemas.openxmlformats.org/officeDocument/2006/relationships" xmlns:p="http://schemas.openxmlformats.org/presentationml/2006/main">
+  <p:cSld>
+    <p:spTree>
+      <p:nvGrpSpPr>
+        <p:cNvPr id="1" name="">
+          <a:extLst>
+            <a:ext uri="{FF2B5EF4-FFF2-40B4-BE49-F238E27FC236}">
               <a16:creationId xmlns:a16="http://schemas.microsoft.com/office/drawing/2014/main" id="{342E4EBA-20D8-40A3-5677-BC18A2A4DF2C}"/>
             </a:ext>
           </a:extLst>
@@ -1382,7 +1633,7 @@
           <a:p>
             <a:fld id="{4BAF0DEA-1372-46C0-8FC9-2869E9CCF7DA}" type="slidenum">
               <a:rPr lang="en-NL" smtClean="0"/>
-              <a:t>29</a:t>
+              <a:t>31</a:t>
             </a:fld>
             <a:endParaRPr lang="en-NL"/>
           </a:p>
@@ -1401,7 +1652,7 @@
 </p:notes>
 </file>
 
-<file path=ppt/notesSlides/notesSlide16.xml><?xml version="1.0" encoding="utf-8"?>
+<file path=ppt/notesSlides/notesSlide18.xml><?xml version="1.0" encoding="utf-8"?>
 <p:notes xmlns:a="http://schemas.openxmlformats.org/drawingml/2006/main" xmlns:r="http://schemas.openxmlformats.org/officeDocument/2006/relationships" xmlns:p="http://schemas.openxmlformats.org/presentationml/2006/main">
   <p:cSld>
     <p:spTree>
@@ -1507,7 +1758,7 @@
           <a:p>
             <a:fld id="{4BAF0DEA-1372-46C0-8FC9-2869E9CCF7DA}" type="slidenum">
               <a:rPr lang="en-NL" smtClean="0"/>
-              <a:t>30</a:t>
+              <a:t>32</a:t>
             </a:fld>
             <a:endParaRPr lang="en-NL"/>
           </a:p>
@@ -1526,7 +1777,7 @@
 </p:notes>
 </file>
 
-<file path=ppt/notesSlides/notesSlide17.xml><?xml version="1.0" encoding="utf-8"?>
+<file path=ppt/notesSlides/notesSlide19.xml><?xml version="1.0" encoding="utf-8"?>
 <p:notes xmlns:a="http://schemas.openxmlformats.org/drawingml/2006/main" xmlns:r="http://schemas.openxmlformats.org/officeDocument/2006/relationships" xmlns:p="http://schemas.openxmlformats.org/presentationml/2006/main">
   <p:cSld>
     <p:spTree>
@@ -1643,7 +1894,7 @@
           <a:p>
             <a:fld id="{4BAF0DEA-1372-46C0-8FC9-2869E9CCF7DA}" type="slidenum">
               <a:rPr lang="en-NL" smtClean="0"/>
-              <a:t>31</a:t>
+              <a:t>33</a:t>
             </a:fld>
             <a:endParaRPr lang="en-NL"/>
           </a:p>
@@ -1653,256 +1904,6 @@
     <p:extLst>
       <p:ext uri="{BB962C8B-B14F-4D97-AF65-F5344CB8AC3E}">
         <p14:creationId xmlns:p14="http://schemas.microsoft.com/office/powerpoint/2010/main" val="1624887372"/>
-      </p:ext>
-    </p:extLst>
-  </p:cSld>
-  <p:clrMapOvr>
-    <a:masterClrMapping/>
-  </p:clrMapOvr>
-</p:notes>
-</file>
-
-<file path=ppt/notesSlides/notesSlide18.xml><?xml version="1.0" encoding="utf-8"?>
-<p:notes xmlns:a="http://schemas.openxmlformats.org/drawingml/2006/main" xmlns:r="http://schemas.openxmlformats.org/officeDocument/2006/relationships" xmlns:p="http://schemas.openxmlformats.org/presentationml/2006/main">
-  <p:cSld>
-    <p:spTree>
-      <p:nvGrpSpPr>
-        <p:cNvPr id="1" name="">
-          <a:extLst>
-            <a:ext uri="{FF2B5EF4-FFF2-40B4-BE49-F238E27FC236}">
-              <a16:creationId xmlns:a16="http://schemas.microsoft.com/office/drawing/2014/main" id="{95D2CE35-B790-BD96-A2B2-2B02F6310F43}"/>
-            </a:ext>
-          </a:extLst>
-        </p:cNvPr>
-        <p:cNvGrpSpPr/>
-        <p:nvPr/>
-      </p:nvGrpSpPr>
-      <p:grpSpPr>
-        <a:xfrm>
-          <a:off x="0" y="0"/>
-          <a:ext cx="0" cy="0"/>
-          <a:chOff x="0" y="0"/>
-          <a:chExt cx="0" cy="0"/>
-        </a:xfrm>
-      </p:grpSpPr>
-      <p:sp>
-        <p:nvSpPr>
-          <p:cNvPr id="2" name="Slide Image Placeholder 1">
-            <a:extLst>
-              <a:ext uri="{FF2B5EF4-FFF2-40B4-BE49-F238E27FC236}">
-                <a16:creationId xmlns:a16="http://schemas.microsoft.com/office/drawing/2014/main" id="{F8DCE851-69F8-0AA9-77FB-A5F6AA652323}"/>
-              </a:ext>
-            </a:extLst>
-          </p:cNvPr>
-          <p:cNvSpPr>
-            <a:spLocks noGrp="1" noRot="1" noChangeAspect="1"/>
-          </p:cNvSpPr>
-          <p:nvPr>
-            <p:ph type="sldImg"/>
-          </p:nvPr>
-        </p:nvSpPr>
-        <p:spPr/>
-      </p:sp>
-      <p:sp>
-        <p:nvSpPr>
-          <p:cNvPr id="3" name="Notes Placeholder 2">
-            <a:extLst>
-              <a:ext uri="{FF2B5EF4-FFF2-40B4-BE49-F238E27FC236}">
-                <a16:creationId xmlns:a16="http://schemas.microsoft.com/office/drawing/2014/main" id="{F172E9CE-0858-1E3B-DAA4-3969EDE0EFFE}"/>
-              </a:ext>
-            </a:extLst>
-          </p:cNvPr>
-          <p:cNvSpPr>
-            <a:spLocks noGrp="1"/>
-          </p:cNvSpPr>
-          <p:nvPr>
-            <p:ph type="body" idx="1"/>
-          </p:nvPr>
-        </p:nvSpPr>
-        <p:spPr/>
-        <p:txBody>
-          <a:bodyPr/>
-          <a:lstStyle/>
-          <a:p>
-            <a:pPr marL="0" marR="0" lvl="0" indent="0" algn="l" defTabSz="914400" rtl="0" eaLnBrk="1" fontAlgn="auto" latinLnBrk="0" hangingPunct="1">
-              <a:lnSpc>
-                <a:spcPct val="100000"/>
-              </a:lnSpc>
-              <a:spcBef>
-                <a:spcPts val="0"/>
-              </a:spcBef>
-              <a:spcAft>
-                <a:spcPts val="0"/>
-              </a:spcAft>
-              <a:buClrTx/>
-              <a:buSzTx/>
-              <a:buFontTx/>
-              <a:buNone/>
-              <a:tabLst/>
-              <a:defRPr/>
-            </a:pPr>
-            <a:endParaRPr lang="nl-NL" dirty="0"/>
-          </a:p>
-        </p:txBody>
-      </p:sp>
-      <p:sp>
-        <p:nvSpPr>
-          <p:cNvPr id="4" name="Slide Number Placeholder 3">
-            <a:extLst>
-              <a:ext uri="{FF2B5EF4-FFF2-40B4-BE49-F238E27FC236}">
-                <a16:creationId xmlns:a16="http://schemas.microsoft.com/office/drawing/2014/main" id="{C0347354-F370-B00B-157A-056BA6FD2D29}"/>
-              </a:ext>
-            </a:extLst>
-          </p:cNvPr>
-          <p:cNvSpPr>
-            <a:spLocks noGrp="1"/>
-          </p:cNvSpPr>
-          <p:nvPr>
-            <p:ph type="sldNum" sz="quarter" idx="5"/>
-          </p:nvPr>
-        </p:nvSpPr>
-        <p:spPr/>
-        <p:txBody>
-          <a:bodyPr/>
-          <a:lstStyle/>
-          <a:p>
-            <a:fld id="{4BAF0DEA-1372-46C0-8FC9-2869E9CCF7DA}" type="slidenum">
-              <a:rPr lang="en-NL" smtClean="0"/>
-              <a:t>32</a:t>
-            </a:fld>
-            <a:endParaRPr lang="en-NL"/>
-          </a:p>
-        </p:txBody>
-      </p:sp>
-    </p:spTree>
-    <p:extLst>
-      <p:ext uri="{BB962C8B-B14F-4D97-AF65-F5344CB8AC3E}">
-        <p14:creationId xmlns:p14="http://schemas.microsoft.com/office/powerpoint/2010/main" val="693241520"/>
-      </p:ext>
-    </p:extLst>
-  </p:cSld>
-  <p:clrMapOvr>
-    <a:masterClrMapping/>
-  </p:clrMapOvr>
-</p:notes>
-</file>
-
-<file path=ppt/notesSlides/notesSlide19.xml><?xml version="1.0" encoding="utf-8"?>
-<p:notes xmlns:a="http://schemas.openxmlformats.org/drawingml/2006/main" xmlns:r="http://schemas.openxmlformats.org/officeDocument/2006/relationships" xmlns:p="http://schemas.openxmlformats.org/presentationml/2006/main">
-  <p:cSld>
-    <p:spTree>
-      <p:nvGrpSpPr>
-        <p:cNvPr id="1" name="">
-          <a:extLst>
-            <a:ext uri="{FF2B5EF4-FFF2-40B4-BE49-F238E27FC236}">
-              <a16:creationId xmlns:a16="http://schemas.microsoft.com/office/drawing/2014/main" id="{50A39300-04C7-D5B9-22F3-E6A0F0E53377}"/>
-            </a:ext>
-          </a:extLst>
-        </p:cNvPr>
-        <p:cNvGrpSpPr/>
-        <p:nvPr/>
-      </p:nvGrpSpPr>
-      <p:grpSpPr>
-        <a:xfrm>
-          <a:off x="0" y="0"/>
-          <a:ext cx="0" cy="0"/>
-          <a:chOff x="0" y="0"/>
-          <a:chExt cx="0" cy="0"/>
-        </a:xfrm>
-      </p:grpSpPr>
-      <p:sp>
-        <p:nvSpPr>
-          <p:cNvPr id="2" name="Slide Image Placeholder 1">
-            <a:extLst>
-              <a:ext uri="{FF2B5EF4-FFF2-40B4-BE49-F238E27FC236}">
-                <a16:creationId xmlns:a16="http://schemas.microsoft.com/office/drawing/2014/main" id="{670A7FEA-63D1-B322-3C46-5B4270FBDC49}"/>
-              </a:ext>
-            </a:extLst>
-          </p:cNvPr>
-          <p:cNvSpPr>
-            <a:spLocks noGrp="1" noRot="1" noChangeAspect="1"/>
-          </p:cNvSpPr>
-          <p:nvPr>
-            <p:ph type="sldImg"/>
-          </p:nvPr>
-        </p:nvSpPr>
-        <p:spPr/>
-      </p:sp>
-      <p:sp>
-        <p:nvSpPr>
-          <p:cNvPr id="3" name="Notes Placeholder 2">
-            <a:extLst>
-              <a:ext uri="{FF2B5EF4-FFF2-40B4-BE49-F238E27FC236}">
-                <a16:creationId xmlns:a16="http://schemas.microsoft.com/office/drawing/2014/main" id="{619D692B-C510-1A74-B586-723B184B16AD}"/>
-              </a:ext>
-            </a:extLst>
-          </p:cNvPr>
-          <p:cNvSpPr>
-            <a:spLocks noGrp="1"/>
-          </p:cNvSpPr>
-          <p:nvPr>
-            <p:ph type="body" idx="1"/>
-          </p:nvPr>
-        </p:nvSpPr>
-        <p:spPr/>
-        <p:txBody>
-          <a:bodyPr/>
-          <a:lstStyle/>
-          <a:p>
-            <a:pPr marL="0" marR="0" lvl="0" indent="0" algn="l" defTabSz="914400" rtl="0" eaLnBrk="1" fontAlgn="auto" latinLnBrk="0" hangingPunct="1">
-              <a:lnSpc>
-                <a:spcPct val="100000"/>
-              </a:lnSpc>
-              <a:spcBef>
-                <a:spcPts val="0"/>
-              </a:spcBef>
-              <a:spcAft>
-                <a:spcPts val="0"/>
-              </a:spcAft>
-              <a:buClrTx/>
-              <a:buSzTx/>
-              <a:buFontTx/>
-              <a:buNone/>
-              <a:tabLst/>
-              <a:defRPr/>
-            </a:pPr>
-            <a:endParaRPr lang="nl-NL" dirty="0"/>
-          </a:p>
-        </p:txBody>
-      </p:sp>
-      <p:sp>
-        <p:nvSpPr>
-          <p:cNvPr id="4" name="Slide Number Placeholder 3">
-            <a:extLst>
-              <a:ext uri="{FF2B5EF4-FFF2-40B4-BE49-F238E27FC236}">
-                <a16:creationId xmlns:a16="http://schemas.microsoft.com/office/drawing/2014/main" id="{AA1A5506-F8BD-3CC2-5E1D-0EE482472D64}"/>
-              </a:ext>
-            </a:extLst>
-          </p:cNvPr>
-          <p:cNvSpPr>
-            <a:spLocks noGrp="1"/>
-          </p:cNvSpPr>
-          <p:nvPr>
-            <p:ph type="sldNum" sz="quarter" idx="5"/>
-          </p:nvPr>
-        </p:nvSpPr>
-        <p:spPr/>
-        <p:txBody>
-          <a:bodyPr/>
-          <a:lstStyle/>
-          <a:p>
-            <a:fld id="{4BAF0DEA-1372-46C0-8FC9-2869E9CCF7DA}" type="slidenum">
-              <a:rPr lang="en-NL" smtClean="0"/>
-              <a:t>33</a:t>
-            </a:fld>
-            <a:endParaRPr lang="en-NL"/>
-          </a:p>
-        </p:txBody>
-      </p:sp>
-    </p:spTree>
-    <p:extLst>
-      <p:ext uri="{BB962C8B-B14F-4D97-AF65-F5344CB8AC3E}">
-        <p14:creationId xmlns:p14="http://schemas.microsoft.com/office/powerpoint/2010/main" val="3073864420"/>
       </p:ext>
     </p:extLst>
   </p:cSld>
@@ -2015,6 +2016,256 @@
         <p:cNvPr id="1" name="">
           <a:extLst>
             <a:ext uri="{FF2B5EF4-FFF2-40B4-BE49-F238E27FC236}">
+              <a16:creationId xmlns:a16="http://schemas.microsoft.com/office/drawing/2014/main" id="{95D2CE35-B790-BD96-A2B2-2B02F6310F43}"/>
+            </a:ext>
+          </a:extLst>
+        </p:cNvPr>
+        <p:cNvGrpSpPr/>
+        <p:nvPr/>
+      </p:nvGrpSpPr>
+      <p:grpSpPr>
+        <a:xfrm>
+          <a:off x="0" y="0"/>
+          <a:ext cx="0" cy="0"/>
+          <a:chOff x="0" y="0"/>
+          <a:chExt cx="0" cy="0"/>
+        </a:xfrm>
+      </p:grpSpPr>
+      <p:sp>
+        <p:nvSpPr>
+          <p:cNvPr id="2" name="Slide Image Placeholder 1">
+            <a:extLst>
+              <a:ext uri="{FF2B5EF4-FFF2-40B4-BE49-F238E27FC236}">
+                <a16:creationId xmlns:a16="http://schemas.microsoft.com/office/drawing/2014/main" id="{F8DCE851-69F8-0AA9-77FB-A5F6AA652323}"/>
+              </a:ext>
+            </a:extLst>
+          </p:cNvPr>
+          <p:cNvSpPr>
+            <a:spLocks noGrp="1" noRot="1" noChangeAspect="1"/>
+          </p:cNvSpPr>
+          <p:nvPr>
+            <p:ph type="sldImg"/>
+          </p:nvPr>
+        </p:nvSpPr>
+        <p:spPr/>
+      </p:sp>
+      <p:sp>
+        <p:nvSpPr>
+          <p:cNvPr id="3" name="Notes Placeholder 2">
+            <a:extLst>
+              <a:ext uri="{FF2B5EF4-FFF2-40B4-BE49-F238E27FC236}">
+                <a16:creationId xmlns:a16="http://schemas.microsoft.com/office/drawing/2014/main" id="{F172E9CE-0858-1E3B-DAA4-3969EDE0EFFE}"/>
+              </a:ext>
+            </a:extLst>
+          </p:cNvPr>
+          <p:cNvSpPr>
+            <a:spLocks noGrp="1"/>
+          </p:cNvSpPr>
+          <p:nvPr>
+            <p:ph type="body" idx="1"/>
+          </p:nvPr>
+        </p:nvSpPr>
+        <p:spPr/>
+        <p:txBody>
+          <a:bodyPr/>
+          <a:lstStyle/>
+          <a:p>
+            <a:pPr marL="0" marR="0" lvl="0" indent="0" algn="l" defTabSz="914400" rtl="0" eaLnBrk="1" fontAlgn="auto" latinLnBrk="0" hangingPunct="1">
+              <a:lnSpc>
+                <a:spcPct val="100000"/>
+              </a:lnSpc>
+              <a:spcBef>
+                <a:spcPts val="0"/>
+              </a:spcBef>
+              <a:spcAft>
+                <a:spcPts val="0"/>
+              </a:spcAft>
+              <a:buClrTx/>
+              <a:buSzTx/>
+              <a:buFontTx/>
+              <a:buNone/>
+              <a:tabLst/>
+              <a:defRPr/>
+            </a:pPr>
+            <a:endParaRPr lang="nl-NL" dirty="0"/>
+          </a:p>
+        </p:txBody>
+      </p:sp>
+      <p:sp>
+        <p:nvSpPr>
+          <p:cNvPr id="4" name="Slide Number Placeholder 3">
+            <a:extLst>
+              <a:ext uri="{FF2B5EF4-FFF2-40B4-BE49-F238E27FC236}">
+                <a16:creationId xmlns:a16="http://schemas.microsoft.com/office/drawing/2014/main" id="{C0347354-F370-B00B-157A-056BA6FD2D29}"/>
+              </a:ext>
+            </a:extLst>
+          </p:cNvPr>
+          <p:cNvSpPr>
+            <a:spLocks noGrp="1"/>
+          </p:cNvSpPr>
+          <p:nvPr>
+            <p:ph type="sldNum" sz="quarter" idx="5"/>
+          </p:nvPr>
+        </p:nvSpPr>
+        <p:spPr/>
+        <p:txBody>
+          <a:bodyPr/>
+          <a:lstStyle/>
+          <a:p>
+            <a:fld id="{4BAF0DEA-1372-46C0-8FC9-2869E9CCF7DA}" type="slidenum">
+              <a:rPr lang="en-NL" smtClean="0"/>
+              <a:t>34</a:t>
+            </a:fld>
+            <a:endParaRPr lang="en-NL"/>
+          </a:p>
+        </p:txBody>
+      </p:sp>
+    </p:spTree>
+    <p:extLst>
+      <p:ext uri="{BB962C8B-B14F-4D97-AF65-F5344CB8AC3E}">
+        <p14:creationId xmlns:p14="http://schemas.microsoft.com/office/powerpoint/2010/main" val="693241520"/>
+      </p:ext>
+    </p:extLst>
+  </p:cSld>
+  <p:clrMapOvr>
+    <a:masterClrMapping/>
+  </p:clrMapOvr>
+</p:notes>
+</file>
+
+<file path=ppt/notesSlides/notesSlide21.xml><?xml version="1.0" encoding="utf-8"?>
+<p:notes xmlns:a="http://schemas.openxmlformats.org/drawingml/2006/main" xmlns:r="http://schemas.openxmlformats.org/officeDocument/2006/relationships" xmlns:p="http://schemas.openxmlformats.org/presentationml/2006/main">
+  <p:cSld>
+    <p:spTree>
+      <p:nvGrpSpPr>
+        <p:cNvPr id="1" name="">
+          <a:extLst>
+            <a:ext uri="{FF2B5EF4-FFF2-40B4-BE49-F238E27FC236}">
+              <a16:creationId xmlns:a16="http://schemas.microsoft.com/office/drawing/2014/main" id="{50A39300-04C7-D5B9-22F3-E6A0F0E53377}"/>
+            </a:ext>
+          </a:extLst>
+        </p:cNvPr>
+        <p:cNvGrpSpPr/>
+        <p:nvPr/>
+      </p:nvGrpSpPr>
+      <p:grpSpPr>
+        <a:xfrm>
+          <a:off x="0" y="0"/>
+          <a:ext cx="0" cy="0"/>
+          <a:chOff x="0" y="0"/>
+          <a:chExt cx="0" cy="0"/>
+        </a:xfrm>
+      </p:grpSpPr>
+      <p:sp>
+        <p:nvSpPr>
+          <p:cNvPr id="2" name="Slide Image Placeholder 1">
+            <a:extLst>
+              <a:ext uri="{FF2B5EF4-FFF2-40B4-BE49-F238E27FC236}">
+                <a16:creationId xmlns:a16="http://schemas.microsoft.com/office/drawing/2014/main" id="{670A7FEA-63D1-B322-3C46-5B4270FBDC49}"/>
+              </a:ext>
+            </a:extLst>
+          </p:cNvPr>
+          <p:cNvSpPr>
+            <a:spLocks noGrp="1" noRot="1" noChangeAspect="1"/>
+          </p:cNvSpPr>
+          <p:nvPr>
+            <p:ph type="sldImg"/>
+          </p:nvPr>
+        </p:nvSpPr>
+        <p:spPr/>
+      </p:sp>
+      <p:sp>
+        <p:nvSpPr>
+          <p:cNvPr id="3" name="Notes Placeholder 2">
+            <a:extLst>
+              <a:ext uri="{FF2B5EF4-FFF2-40B4-BE49-F238E27FC236}">
+                <a16:creationId xmlns:a16="http://schemas.microsoft.com/office/drawing/2014/main" id="{619D692B-C510-1A74-B586-723B184B16AD}"/>
+              </a:ext>
+            </a:extLst>
+          </p:cNvPr>
+          <p:cNvSpPr>
+            <a:spLocks noGrp="1"/>
+          </p:cNvSpPr>
+          <p:nvPr>
+            <p:ph type="body" idx="1"/>
+          </p:nvPr>
+        </p:nvSpPr>
+        <p:spPr/>
+        <p:txBody>
+          <a:bodyPr/>
+          <a:lstStyle/>
+          <a:p>
+            <a:pPr marL="0" marR="0" lvl="0" indent="0" algn="l" defTabSz="914400" rtl="0" eaLnBrk="1" fontAlgn="auto" latinLnBrk="0" hangingPunct="1">
+              <a:lnSpc>
+                <a:spcPct val="100000"/>
+              </a:lnSpc>
+              <a:spcBef>
+                <a:spcPts val="0"/>
+              </a:spcBef>
+              <a:spcAft>
+                <a:spcPts val="0"/>
+              </a:spcAft>
+              <a:buClrTx/>
+              <a:buSzTx/>
+              <a:buFontTx/>
+              <a:buNone/>
+              <a:tabLst/>
+              <a:defRPr/>
+            </a:pPr>
+            <a:endParaRPr lang="nl-NL" dirty="0"/>
+          </a:p>
+        </p:txBody>
+      </p:sp>
+      <p:sp>
+        <p:nvSpPr>
+          <p:cNvPr id="4" name="Slide Number Placeholder 3">
+            <a:extLst>
+              <a:ext uri="{FF2B5EF4-FFF2-40B4-BE49-F238E27FC236}">
+                <a16:creationId xmlns:a16="http://schemas.microsoft.com/office/drawing/2014/main" id="{AA1A5506-F8BD-3CC2-5E1D-0EE482472D64}"/>
+              </a:ext>
+            </a:extLst>
+          </p:cNvPr>
+          <p:cNvSpPr>
+            <a:spLocks noGrp="1"/>
+          </p:cNvSpPr>
+          <p:nvPr>
+            <p:ph type="sldNum" sz="quarter" idx="5"/>
+          </p:nvPr>
+        </p:nvSpPr>
+        <p:spPr/>
+        <p:txBody>
+          <a:bodyPr/>
+          <a:lstStyle/>
+          <a:p>
+            <a:fld id="{4BAF0DEA-1372-46C0-8FC9-2869E9CCF7DA}" type="slidenum">
+              <a:rPr lang="en-NL" smtClean="0"/>
+              <a:t>35</a:t>
+            </a:fld>
+            <a:endParaRPr lang="en-NL"/>
+          </a:p>
+        </p:txBody>
+      </p:sp>
+    </p:spTree>
+    <p:extLst>
+      <p:ext uri="{BB962C8B-B14F-4D97-AF65-F5344CB8AC3E}">
+        <p14:creationId xmlns:p14="http://schemas.microsoft.com/office/powerpoint/2010/main" val="3073864420"/>
+      </p:ext>
+    </p:extLst>
+  </p:cSld>
+  <p:clrMapOvr>
+    <a:masterClrMapping/>
+  </p:clrMapOvr>
+</p:notes>
+</file>
+
+<file path=ppt/notesSlides/notesSlide22.xml><?xml version="1.0" encoding="utf-8"?>
+<p:notes xmlns:a="http://schemas.openxmlformats.org/drawingml/2006/main" xmlns:r="http://schemas.openxmlformats.org/officeDocument/2006/relationships" xmlns:p="http://schemas.openxmlformats.org/presentationml/2006/main">
+  <p:cSld>
+    <p:spTree>
+      <p:nvGrpSpPr>
+        <p:cNvPr id="1" name="">
+          <a:extLst>
+            <a:ext uri="{FF2B5EF4-FFF2-40B4-BE49-F238E27FC236}">
               <a16:creationId xmlns:a16="http://schemas.microsoft.com/office/drawing/2014/main" id="{044CE2BA-9311-F4A4-3F7C-685C4369392D}"/>
             </a:ext>
           </a:extLst>
@@ -2113,7 +2364,7 @@
           <a:p>
             <a:fld id="{4BAF0DEA-1372-46C0-8FC9-2869E9CCF7DA}" type="slidenum">
               <a:rPr lang="en-NL" smtClean="0"/>
-              <a:t>35</a:t>
+              <a:t>37</a:t>
             </a:fld>
             <a:endParaRPr lang="en-NL"/>
           </a:p>
@@ -2132,7 +2383,7 @@
 </p:notes>
 </file>
 
-<file path=ppt/notesSlides/notesSlide21.xml><?xml version="1.0" encoding="utf-8"?>
+<file path=ppt/notesSlides/notesSlide23.xml><?xml version="1.0" encoding="utf-8"?>
 <p:notes xmlns:a="http://schemas.openxmlformats.org/drawingml/2006/main" xmlns:r="http://schemas.openxmlformats.org/officeDocument/2006/relationships" xmlns:p="http://schemas.openxmlformats.org/presentationml/2006/main">
   <p:cSld>
     <p:spTree>
@@ -2238,7 +2489,7 @@
           <a:p>
             <a:fld id="{4BAF0DEA-1372-46C0-8FC9-2869E9CCF7DA}" type="slidenum">
               <a:rPr lang="en-NL" smtClean="0"/>
-              <a:t>36</a:t>
+              <a:t>38</a:t>
             </a:fld>
             <a:endParaRPr lang="en-NL"/>
           </a:p>
@@ -2257,7 +2508,7 @@
 </p:notes>
 </file>
 
-<file path=ppt/notesSlides/notesSlide22.xml><?xml version="1.0" encoding="utf-8"?>
+<file path=ppt/notesSlides/notesSlide24.xml><?xml version="1.0" encoding="utf-8"?>
 <p:notes xmlns:a="http://schemas.openxmlformats.org/drawingml/2006/main" xmlns:r="http://schemas.openxmlformats.org/officeDocument/2006/relationships" xmlns:p="http://schemas.openxmlformats.org/presentationml/2006/main">
   <p:cSld>
     <p:spTree>
@@ -2379,7 +2630,7 @@
           <a:p>
             <a:fld id="{4BAF0DEA-1372-46C0-8FC9-2869E9CCF7DA}" type="slidenum">
               <a:rPr lang="en-NL" smtClean="0"/>
-              <a:t>37</a:t>
+              <a:t>39</a:t>
             </a:fld>
             <a:endParaRPr lang="en-NL"/>
           </a:p>
@@ -2389,185 +2640,6 @@
     <p:extLst>
       <p:ext uri="{BB962C8B-B14F-4D97-AF65-F5344CB8AC3E}">
         <p14:creationId xmlns:p14="http://schemas.microsoft.com/office/powerpoint/2010/main" val="1318154234"/>
-      </p:ext>
-    </p:extLst>
-  </p:cSld>
-  <p:clrMapOvr>
-    <a:masterClrMapping/>
-  </p:clrMapOvr>
-</p:notes>
-</file>
-
-<file path=ppt/notesSlides/notesSlide23.xml><?xml version="1.0" encoding="utf-8"?>
-<p:notes xmlns:a="http://schemas.openxmlformats.org/drawingml/2006/main" xmlns:r="http://schemas.openxmlformats.org/officeDocument/2006/relationships" xmlns:p="http://schemas.openxmlformats.org/presentationml/2006/main">
-  <p:cSld>
-    <p:spTree>
-      <p:nvGrpSpPr>
-        <p:cNvPr id="1" name=""/>
-        <p:cNvGrpSpPr/>
-        <p:nvPr/>
-      </p:nvGrpSpPr>
-      <p:grpSpPr>
-        <a:xfrm>
-          <a:off x="0" y="0"/>
-          <a:ext cx="0" cy="0"/>
-          <a:chOff x="0" y="0"/>
-          <a:chExt cx="0" cy="0"/>
-        </a:xfrm>
-      </p:grpSpPr>
-      <p:sp>
-        <p:nvSpPr>
-          <p:cNvPr id="2" name="Slide Image Placeholder 1"/>
-          <p:cNvSpPr>
-            <a:spLocks noGrp="1" noRot="1" noChangeAspect="1"/>
-          </p:cNvSpPr>
-          <p:nvPr>
-            <p:ph type="sldImg"/>
-          </p:nvPr>
-        </p:nvSpPr>
-        <p:spPr/>
-      </p:sp>
-      <p:sp>
-        <p:nvSpPr>
-          <p:cNvPr id="3" name="Notes Placeholder 2"/>
-          <p:cNvSpPr>
-            <a:spLocks noGrp="1"/>
-          </p:cNvSpPr>
-          <p:nvPr>
-            <p:ph type="body" idx="1"/>
-          </p:nvPr>
-        </p:nvSpPr>
-        <p:spPr/>
-        <p:txBody>
-          <a:bodyPr/>
-          <a:lstStyle/>
-          <a:p>
-            <a:r>
-              <a:rPr lang="nl-NL" dirty="0"/>
-              <a:t>Demo: </a:t>
-            </a:r>
-            <a:r>
-              <a:rPr lang="nl-NL" dirty="0" err="1"/>
-              <a:t>create</a:t>
-            </a:r>
-            <a:r>
-              <a:rPr lang="nl-NL" dirty="0"/>
-              <a:t> issue</a:t>
-            </a:r>
-          </a:p>
-        </p:txBody>
-      </p:sp>
-      <p:sp>
-        <p:nvSpPr>
-          <p:cNvPr id="4" name="Slide Number Placeholder 3"/>
-          <p:cNvSpPr>
-            <a:spLocks noGrp="1"/>
-          </p:cNvSpPr>
-          <p:nvPr>
-            <p:ph type="sldNum" sz="quarter" idx="5"/>
-          </p:nvPr>
-        </p:nvSpPr>
-        <p:spPr/>
-        <p:txBody>
-          <a:bodyPr/>
-          <a:lstStyle/>
-          <a:p>
-            <a:fld id="{4BAF0DEA-1372-46C0-8FC9-2869E9CCF7DA}" type="slidenum">
-              <a:rPr lang="en-NL" smtClean="0"/>
-              <a:t>39</a:t>
-            </a:fld>
-            <a:endParaRPr lang="en-NL"/>
-          </a:p>
-        </p:txBody>
-      </p:sp>
-    </p:spTree>
-    <p:extLst>
-      <p:ext uri="{BB962C8B-B14F-4D97-AF65-F5344CB8AC3E}">
-        <p14:creationId xmlns:p14="http://schemas.microsoft.com/office/powerpoint/2010/main" val="3065146948"/>
-      </p:ext>
-    </p:extLst>
-  </p:cSld>
-  <p:clrMapOvr>
-    <a:masterClrMapping/>
-  </p:clrMapOvr>
-</p:notes>
-</file>
-
-<file path=ppt/notesSlides/notesSlide24.xml><?xml version="1.0" encoding="utf-8"?>
-<p:notes xmlns:a="http://schemas.openxmlformats.org/drawingml/2006/main" xmlns:r="http://schemas.openxmlformats.org/officeDocument/2006/relationships" xmlns:p="http://schemas.openxmlformats.org/presentationml/2006/main">
-  <p:cSld>
-    <p:spTree>
-      <p:nvGrpSpPr>
-        <p:cNvPr id="1" name=""/>
-        <p:cNvGrpSpPr/>
-        <p:nvPr/>
-      </p:nvGrpSpPr>
-      <p:grpSpPr>
-        <a:xfrm>
-          <a:off x="0" y="0"/>
-          <a:ext cx="0" cy="0"/>
-          <a:chOff x="0" y="0"/>
-          <a:chExt cx="0" cy="0"/>
-        </a:xfrm>
-      </p:grpSpPr>
-      <p:sp>
-        <p:nvSpPr>
-          <p:cNvPr id="2" name="Slide Image Placeholder 1"/>
-          <p:cNvSpPr>
-            <a:spLocks noGrp="1" noRot="1" noChangeAspect="1"/>
-          </p:cNvSpPr>
-          <p:nvPr>
-            <p:ph type="sldImg"/>
-          </p:nvPr>
-        </p:nvSpPr>
-        <p:spPr/>
-      </p:sp>
-      <p:sp>
-        <p:nvSpPr>
-          <p:cNvPr id="3" name="Notes Placeholder 2"/>
-          <p:cNvSpPr>
-            <a:spLocks noGrp="1"/>
-          </p:cNvSpPr>
-          <p:nvPr>
-            <p:ph type="body" idx="1"/>
-          </p:nvPr>
-        </p:nvSpPr>
-        <p:spPr/>
-        <p:txBody>
-          <a:bodyPr/>
-          <a:lstStyle/>
-          <a:p>
-            <a:endParaRPr lang="nl-NL" dirty="0"/>
-          </a:p>
-        </p:txBody>
-      </p:sp>
-      <p:sp>
-        <p:nvSpPr>
-          <p:cNvPr id="4" name="Slide Number Placeholder 3"/>
-          <p:cNvSpPr>
-            <a:spLocks noGrp="1"/>
-          </p:cNvSpPr>
-          <p:nvPr>
-            <p:ph type="sldNum" sz="quarter" idx="5"/>
-          </p:nvPr>
-        </p:nvSpPr>
-        <p:spPr/>
-        <p:txBody>
-          <a:bodyPr/>
-          <a:lstStyle/>
-          <a:p>
-            <a:fld id="{4BAF0DEA-1372-46C0-8FC9-2869E9CCF7DA}" type="slidenum">
-              <a:rPr lang="en-NL" smtClean="0"/>
-              <a:t>45</a:t>
-            </a:fld>
-            <a:endParaRPr lang="en-NL"/>
-          </a:p>
-        </p:txBody>
-      </p:sp>
-    </p:spTree>
-    <p:extLst>
-      <p:ext uri="{BB962C8B-B14F-4D97-AF65-F5344CB8AC3E}">
-        <p14:creationId xmlns:p14="http://schemas.microsoft.com/office/powerpoint/2010/main" val="2525951610"/>
       </p:ext>
     </p:extLst>
   </p:cSld>
@@ -2623,7 +2695,7 @@
           <a:p>
             <a:r>
               <a:rPr lang="nl-NL" dirty="0"/>
-              <a:t>Demo: AD: </a:t>
+              <a:t>Demo: </a:t>
             </a:r>
             <a:r>
               <a:rPr lang="nl-NL" dirty="0" err="1"/>
@@ -2631,13 +2703,8 @@
             </a:r>
             <a:r>
               <a:rPr lang="nl-NL" dirty="0"/>
-              <a:t> project + </a:t>
-            </a:r>
-            <a:r>
-              <a:rPr lang="nl-NL" dirty="0" err="1"/>
-              <a:t>repo</a:t>
-            </a:r>
-            <a:endParaRPr lang="nl-NL" dirty="0"/>
+              <a:t> issue</a:t>
+            </a:r>
           </a:p>
         </p:txBody>
       </p:sp>
@@ -2658,7 +2725,279 @@
           <a:p>
             <a:fld id="{4BAF0DEA-1372-46C0-8FC9-2869E9CCF7DA}" type="slidenum">
               <a:rPr lang="en-NL" smtClean="0"/>
-              <a:t>47</a:t>
+              <a:t>41</a:t>
+            </a:fld>
+            <a:endParaRPr lang="en-NL"/>
+          </a:p>
+        </p:txBody>
+      </p:sp>
+    </p:spTree>
+    <p:extLst>
+      <p:ext uri="{BB962C8B-B14F-4D97-AF65-F5344CB8AC3E}">
+        <p14:creationId xmlns:p14="http://schemas.microsoft.com/office/powerpoint/2010/main" val="3065146948"/>
+      </p:ext>
+    </p:extLst>
+  </p:cSld>
+  <p:clrMapOvr>
+    <a:masterClrMapping/>
+  </p:clrMapOvr>
+</p:notes>
+</file>
+
+<file path=ppt/notesSlides/notesSlide26.xml><?xml version="1.0" encoding="utf-8"?>
+<p:notes xmlns:a="http://schemas.openxmlformats.org/drawingml/2006/main" xmlns:r="http://schemas.openxmlformats.org/officeDocument/2006/relationships" xmlns:p="http://schemas.openxmlformats.org/presentationml/2006/main">
+  <p:cSld>
+    <p:spTree>
+      <p:nvGrpSpPr>
+        <p:cNvPr id="1" name=""/>
+        <p:cNvGrpSpPr/>
+        <p:nvPr/>
+      </p:nvGrpSpPr>
+      <p:grpSpPr>
+        <a:xfrm>
+          <a:off x="0" y="0"/>
+          <a:ext cx="0" cy="0"/>
+          <a:chOff x="0" y="0"/>
+          <a:chExt cx="0" cy="0"/>
+        </a:xfrm>
+      </p:grpSpPr>
+      <p:sp>
+        <p:nvSpPr>
+          <p:cNvPr id="2" name="Slide Image Placeholder 1"/>
+          <p:cNvSpPr>
+            <a:spLocks noGrp="1" noRot="1" noChangeAspect="1"/>
+          </p:cNvSpPr>
+          <p:nvPr>
+            <p:ph type="sldImg"/>
+          </p:nvPr>
+        </p:nvSpPr>
+        <p:spPr/>
+      </p:sp>
+      <p:sp>
+        <p:nvSpPr>
+          <p:cNvPr id="3" name="Notes Placeholder 2"/>
+          <p:cNvSpPr>
+            <a:spLocks noGrp="1"/>
+          </p:cNvSpPr>
+          <p:nvPr>
+            <p:ph type="body" idx="1"/>
+          </p:nvPr>
+        </p:nvSpPr>
+        <p:spPr/>
+        <p:txBody>
+          <a:bodyPr/>
+          <a:lstStyle/>
+          <a:p>
+            <a:r>
+              <a:rPr lang="en-US" dirty="0"/>
+              <a:t>Demo: GH create project</a:t>
+            </a:r>
+            <a:endParaRPr lang="en-NL" dirty="0"/>
+          </a:p>
+        </p:txBody>
+      </p:sp>
+      <p:sp>
+        <p:nvSpPr>
+          <p:cNvPr id="4" name="Slide Number Placeholder 3"/>
+          <p:cNvSpPr>
+            <a:spLocks noGrp="1"/>
+          </p:cNvSpPr>
+          <p:nvPr>
+            <p:ph type="sldNum" sz="quarter" idx="5"/>
+          </p:nvPr>
+        </p:nvSpPr>
+        <p:spPr/>
+        <p:txBody>
+          <a:bodyPr/>
+          <a:lstStyle/>
+          <a:p>
+            <a:fld id="{4BAF0DEA-1372-46C0-8FC9-2869E9CCF7DA}" type="slidenum">
+              <a:rPr lang="en-NL" smtClean="0"/>
+              <a:t>44</a:t>
+            </a:fld>
+            <a:endParaRPr lang="en-NL"/>
+          </a:p>
+        </p:txBody>
+      </p:sp>
+    </p:spTree>
+    <p:extLst>
+      <p:ext uri="{BB962C8B-B14F-4D97-AF65-F5344CB8AC3E}">
+        <p14:creationId xmlns:p14="http://schemas.microsoft.com/office/powerpoint/2010/main" val="755282292"/>
+      </p:ext>
+    </p:extLst>
+  </p:cSld>
+  <p:clrMapOvr>
+    <a:masterClrMapping/>
+  </p:clrMapOvr>
+</p:notes>
+</file>
+
+<file path=ppt/notesSlides/notesSlide27.xml><?xml version="1.0" encoding="utf-8"?>
+<p:notes xmlns:a="http://schemas.openxmlformats.org/drawingml/2006/main" xmlns:r="http://schemas.openxmlformats.org/officeDocument/2006/relationships" xmlns:p="http://schemas.openxmlformats.org/presentationml/2006/main">
+  <p:cSld>
+    <p:spTree>
+      <p:nvGrpSpPr>
+        <p:cNvPr id="1" name=""/>
+        <p:cNvGrpSpPr/>
+        <p:nvPr/>
+      </p:nvGrpSpPr>
+      <p:grpSpPr>
+        <a:xfrm>
+          <a:off x="0" y="0"/>
+          <a:ext cx="0" cy="0"/>
+          <a:chOff x="0" y="0"/>
+          <a:chExt cx="0" cy="0"/>
+        </a:xfrm>
+      </p:grpSpPr>
+      <p:sp>
+        <p:nvSpPr>
+          <p:cNvPr id="2" name="Slide Image Placeholder 1"/>
+          <p:cNvSpPr>
+            <a:spLocks noGrp="1" noRot="1" noChangeAspect="1"/>
+          </p:cNvSpPr>
+          <p:nvPr>
+            <p:ph type="sldImg"/>
+          </p:nvPr>
+        </p:nvSpPr>
+        <p:spPr/>
+      </p:sp>
+      <p:sp>
+        <p:nvSpPr>
+          <p:cNvPr id="3" name="Notes Placeholder 2"/>
+          <p:cNvSpPr>
+            <a:spLocks noGrp="1"/>
+          </p:cNvSpPr>
+          <p:nvPr>
+            <p:ph type="body" idx="1"/>
+          </p:nvPr>
+        </p:nvSpPr>
+        <p:spPr/>
+        <p:txBody>
+          <a:bodyPr/>
+          <a:lstStyle/>
+          <a:p>
+            <a:endParaRPr lang="nl-NL" dirty="0"/>
+          </a:p>
+        </p:txBody>
+      </p:sp>
+      <p:sp>
+        <p:nvSpPr>
+          <p:cNvPr id="4" name="Slide Number Placeholder 3"/>
+          <p:cNvSpPr>
+            <a:spLocks noGrp="1"/>
+          </p:cNvSpPr>
+          <p:nvPr>
+            <p:ph type="sldNum" sz="quarter" idx="5"/>
+          </p:nvPr>
+        </p:nvSpPr>
+        <p:spPr/>
+        <p:txBody>
+          <a:bodyPr/>
+          <a:lstStyle/>
+          <a:p>
+            <a:fld id="{4BAF0DEA-1372-46C0-8FC9-2869E9CCF7DA}" type="slidenum">
+              <a:rPr lang="en-NL" smtClean="0"/>
+              <a:t>46</a:t>
+            </a:fld>
+            <a:endParaRPr lang="en-NL"/>
+          </a:p>
+        </p:txBody>
+      </p:sp>
+    </p:spTree>
+    <p:extLst>
+      <p:ext uri="{BB962C8B-B14F-4D97-AF65-F5344CB8AC3E}">
+        <p14:creationId xmlns:p14="http://schemas.microsoft.com/office/powerpoint/2010/main" val="2525951610"/>
+      </p:ext>
+    </p:extLst>
+  </p:cSld>
+  <p:clrMapOvr>
+    <a:masterClrMapping/>
+  </p:clrMapOvr>
+</p:notes>
+</file>
+
+<file path=ppt/notesSlides/notesSlide28.xml><?xml version="1.0" encoding="utf-8"?>
+<p:notes xmlns:a="http://schemas.openxmlformats.org/drawingml/2006/main" xmlns:r="http://schemas.openxmlformats.org/officeDocument/2006/relationships" xmlns:p="http://schemas.openxmlformats.org/presentationml/2006/main">
+  <p:cSld>
+    <p:spTree>
+      <p:nvGrpSpPr>
+        <p:cNvPr id="1" name=""/>
+        <p:cNvGrpSpPr/>
+        <p:nvPr/>
+      </p:nvGrpSpPr>
+      <p:grpSpPr>
+        <a:xfrm>
+          <a:off x="0" y="0"/>
+          <a:ext cx="0" cy="0"/>
+          <a:chOff x="0" y="0"/>
+          <a:chExt cx="0" cy="0"/>
+        </a:xfrm>
+      </p:grpSpPr>
+      <p:sp>
+        <p:nvSpPr>
+          <p:cNvPr id="2" name="Slide Image Placeholder 1"/>
+          <p:cNvSpPr>
+            <a:spLocks noGrp="1" noRot="1" noChangeAspect="1"/>
+          </p:cNvSpPr>
+          <p:nvPr>
+            <p:ph type="sldImg"/>
+          </p:nvPr>
+        </p:nvSpPr>
+        <p:spPr/>
+      </p:sp>
+      <p:sp>
+        <p:nvSpPr>
+          <p:cNvPr id="3" name="Notes Placeholder 2"/>
+          <p:cNvSpPr>
+            <a:spLocks noGrp="1"/>
+          </p:cNvSpPr>
+          <p:nvPr>
+            <p:ph type="body" idx="1"/>
+          </p:nvPr>
+        </p:nvSpPr>
+        <p:spPr/>
+        <p:txBody>
+          <a:bodyPr/>
+          <a:lstStyle/>
+          <a:p>
+            <a:r>
+              <a:rPr lang="nl-NL" dirty="0"/>
+              <a:t>Demo: AD: </a:t>
+            </a:r>
+            <a:r>
+              <a:rPr lang="nl-NL" dirty="0" err="1"/>
+              <a:t>create</a:t>
+            </a:r>
+            <a:r>
+              <a:rPr lang="nl-NL" dirty="0"/>
+              <a:t> project + </a:t>
+            </a:r>
+            <a:r>
+              <a:rPr lang="nl-NL" dirty="0" err="1"/>
+              <a:t>repo</a:t>
+            </a:r>
+            <a:endParaRPr lang="nl-NL" dirty="0"/>
+          </a:p>
+        </p:txBody>
+      </p:sp>
+      <p:sp>
+        <p:nvSpPr>
+          <p:cNvPr id="4" name="Slide Number Placeholder 3"/>
+          <p:cNvSpPr>
+            <a:spLocks noGrp="1"/>
+          </p:cNvSpPr>
+          <p:nvPr>
+            <p:ph type="sldNum" sz="quarter" idx="5"/>
+          </p:nvPr>
+        </p:nvSpPr>
+        <p:spPr/>
+        <p:txBody>
+          <a:bodyPr/>
+          <a:lstStyle/>
+          <a:p>
+            <a:fld id="{4BAF0DEA-1372-46C0-8FC9-2869E9CCF7DA}" type="slidenum">
+              <a:rPr lang="en-NL" smtClean="0"/>
+              <a:t>48</a:t>
             </a:fld>
             <a:endParaRPr lang="en-NL"/>
           </a:p>
@@ -2677,7 +3016,7 @@
 </p:notes>
 </file>
 
-<file path=ppt/notesSlides/notesSlide26.xml><?xml version="1.0" encoding="utf-8"?>
+<file path=ppt/notesSlides/notesSlide29.xml><?xml version="1.0" encoding="utf-8"?>
 <p:notes xmlns:a="http://schemas.openxmlformats.org/drawingml/2006/main" xmlns:r="http://schemas.openxmlformats.org/officeDocument/2006/relationships" xmlns:p="http://schemas.openxmlformats.org/presentationml/2006/main">
   <p:cSld>
     <p:spTree>
@@ -2783,7 +3122,7 @@
           <a:p>
             <a:fld id="{4BAF0DEA-1372-46C0-8FC9-2869E9CCF7DA}" type="slidenum">
               <a:rPr lang="en-NL" smtClean="0"/>
-              <a:t>49</a:t>
+              <a:t>50</a:t>
             </a:fld>
             <a:endParaRPr lang="en-NL"/>
           </a:p>
@@ -2793,389 +3132,6 @@
     <p:extLst>
       <p:ext uri="{BB962C8B-B14F-4D97-AF65-F5344CB8AC3E}">
         <p14:creationId xmlns:p14="http://schemas.microsoft.com/office/powerpoint/2010/main" val="615132190"/>
-      </p:ext>
-    </p:extLst>
-  </p:cSld>
-  <p:clrMapOvr>
-    <a:masterClrMapping/>
-  </p:clrMapOvr>
-</p:notes>
-</file>
-
-<file path=ppt/notesSlides/notesSlide27.xml><?xml version="1.0" encoding="utf-8"?>
-<p:notes xmlns:a="http://schemas.openxmlformats.org/drawingml/2006/main" xmlns:r="http://schemas.openxmlformats.org/officeDocument/2006/relationships" xmlns:p="http://schemas.openxmlformats.org/presentationml/2006/main">
-  <p:cSld>
-    <p:spTree>
-      <p:nvGrpSpPr>
-        <p:cNvPr id="1" name="">
-          <a:extLst>
-            <a:ext uri="{FF2B5EF4-FFF2-40B4-BE49-F238E27FC236}">
-              <a16:creationId xmlns:a16="http://schemas.microsoft.com/office/drawing/2014/main" id="{2A8D52B0-C337-23CB-24D7-68A1DB4A140E}"/>
-            </a:ext>
-          </a:extLst>
-        </p:cNvPr>
-        <p:cNvGrpSpPr/>
-        <p:nvPr/>
-      </p:nvGrpSpPr>
-      <p:grpSpPr>
-        <a:xfrm>
-          <a:off x="0" y="0"/>
-          <a:ext cx="0" cy="0"/>
-          <a:chOff x="0" y="0"/>
-          <a:chExt cx="0" cy="0"/>
-        </a:xfrm>
-      </p:grpSpPr>
-      <p:sp>
-        <p:nvSpPr>
-          <p:cNvPr id="2" name="Slide Image Placeholder 1">
-            <a:extLst>
-              <a:ext uri="{FF2B5EF4-FFF2-40B4-BE49-F238E27FC236}">
-                <a16:creationId xmlns:a16="http://schemas.microsoft.com/office/drawing/2014/main" id="{3EE8301A-167B-EAC0-BC23-52ECD5D604B1}"/>
-              </a:ext>
-            </a:extLst>
-          </p:cNvPr>
-          <p:cNvSpPr>
-            <a:spLocks noGrp="1" noRot="1" noChangeAspect="1"/>
-          </p:cNvSpPr>
-          <p:nvPr>
-            <p:ph type="sldImg"/>
-          </p:nvPr>
-        </p:nvSpPr>
-        <p:spPr/>
-      </p:sp>
-      <p:sp>
-        <p:nvSpPr>
-          <p:cNvPr id="3" name="Notes Placeholder 2">
-            <a:extLst>
-              <a:ext uri="{FF2B5EF4-FFF2-40B4-BE49-F238E27FC236}">
-                <a16:creationId xmlns:a16="http://schemas.microsoft.com/office/drawing/2014/main" id="{D55B6090-6C67-B0A0-B647-562E2D83B77E}"/>
-              </a:ext>
-            </a:extLst>
-          </p:cNvPr>
-          <p:cNvSpPr>
-            <a:spLocks noGrp="1"/>
-          </p:cNvSpPr>
-          <p:nvPr>
-            <p:ph type="body" idx="1"/>
-          </p:nvPr>
-        </p:nvSpPr>
-        <p:spPr/>
-        <p:txBody>
-          <a:bodyPr/>
-          <a:lstStyle/>
-          <a:p>
-            <a:pPr marL="0" marR="0" lvl="0" indent="0" algn="l" defTabSz="914400" rtl="0" eaLnBrk="1" fontAlgn="auto" latinLnBrk="0" hangingPunct="1">
-              <a:lnSpc>
-                <a:spcPct val="100000"/>
-              </a:lnSpc>
-              <a:spcBef>
-                <a:spcPts val="0"/>
-              </a:spcBef>
-              <a:spcAft>
-                <a:spcPts val="0"/>
-              </a:spcAft>
-              <a:buClrTx/>
-              <a:buSzTx/>
-              <a:buFontTx/>
-              <a:buNone/>
-              <a:tabLst/>
-              <a:defRPr/>
-            </a:pPr>
-            <a:endParaRPr lang="nl-NL" dirty="0"/>
-          </a:p>
-        </p:txBody>
-      </p:sp>
-      <p:sp>
-        <p:nvSpPr>
-          <p:cNvPr id="4" name="Slide Number Placeholder 3">
-            <a:extLst>
-              <a:ext uri="{FF2B5EF4-FFF2-40B4-BE49-F238E27FC236}">
-                <a16:creationId xmlns:a16="http://schemas.microsoft.com/office/drawing/2014/main" id="{3DE533A0-519F-60FD-357C-614C0B8FCA93}"/>
-              </a:ext>
-            </a:extLst>
-          </p:cNvPr>
-          <p:cNvSpPr>
-            <a:spLocks noGrp="1"/>
-          </p:cNvSpPr>
-          <p:nvPr>
-            <p:ph type="sldNum" sz="quarter" idx="5"/>
-          </p:nvPr>
-        </p:nvSpPr>
-        <p:spPr/>
-        <p:txBody>
-          <a:bodyPr/>
-          <a:lstStyle/>
-          <a:p>
-            <a:fld id="{4BAF0DEA-1372-46C0-8FC9-2869E9CCF7DA}" type="slidenum">
-              <a:rPr lang="en-NL" smtClean="0"/>
-              <a:t>50</a:t>
-            </a:fld>
-            <a:endParaRPr lang="en-NL"/>
-          </a:p>
-        </p:txBody>
-      </p:sp>
-    </p:spTree>
-    <p:extLst>
-      <p:ext uri="{BB962C8B-B14F-4D97-AF65-F5344CB8AC3E}">
-        <p14:creationId xmlns:p14="http://schemas.microsoft.com/office/powerpoint/2010/main" val="520542955"/>
-      </p:ext>
-    </p:extLst>
-  </p:cSld>
-  <p:clrMapOvr>
-    <a:masterClrMapping/>
-  </p:clrMapOvr>
-</p:notes>
-</file>
-
-<file path=ppt/notesSlides/notesSlide28.xml><?xml version="1.0" encoding="utf-8"?>
-<p:notes xmlns:a="http://schemas.openxmlformats.org/drawingml/2006/main" xmlns:r="http://schemas.openxmlformats.org/officeDocument/2006/relationships" xmlns:p="http://schemas.openxmlformats.org/presentationml/2006/main">
-  <p:cSld>
-    <p:spTree>
-      <p:nvGrpSpPr>
-        <p:cNvPr id="1" name="">
-          <a:extLst>
-            <a:ext uri="{FF2B5EF4-FFF2-40B4-BE49-F238E27FC236}">
-              <a16:creationId xmlns:a16="http://schemas.microsoft.com/office/drawing/2014/main" id="{2201FC99-DEE0-7997-93CA-1EFF3E2C00AE}"/>
-            </a:ext>
-          </a:extLst>
-        </p:cNvPr>
-        <p:cNvGrpSpPr/>
-        <p:nvPr/>
-      </p:nvGrpSpPr>
-      <p:grpSpPr>
-        <a:xfrm>
-          <a:off x="0" y="0"/>
-          <a:ext cx="0" cy="0"/>
-          <a:chOff x="0" y="0"/>
-          <a:chExt cx="0" cy="0"/>
-        </a:xfrm>
-      </p:grpSpPr>
-      <p:sp>
-        <p:nvSpPr>
-          <p:cNvPr id="2" name="Slide Image Placeholder 1">
-            <a:extLst>
-              <a:ext uri="{FF2B5EF4-FFF2-40B4-BE49-F238E27FC236}">
-                <a16:creationId xmlns:a16="http://schemas.microsoft.com/office/drawing/2014/main" id="{7566C330-A06C-DA46-506A-E4B737FE8FAC}"/>
-              </a:ext>
-            </a:extLst>
-          </p:cNvPr>
-          <p:cNvSpPr>
-            <a:spLocks noGrp="1" noRot="1" noChangeAspect="1"/>
-          </p:cNvSpPr>
-          <p:nvPr>
-            <p:ph type="sldImg"/>
-          </p:nvPr>
-        </p:nvSpPr>
-        <p:spPr/>
-      </p:sp>
-      <p:sp>
-        <p:nvSpPr>
-          <p:cNvPr id="3" name="Notes Placeholder 2">
-            <a:extLst>
-              <a:ext uri="{FF2B5EF4-FFF2-40B4-BE49-F238E27FC236}">
-                <a16:creationId xmlns:a16="http://schemas.microsoft.com/office/drawing/2014/main" id="{BB776D8D-7417-4EAC-40A7-7DBEF5AD5A5B}"/>
-              </a:ext>
-            </a:extLst>
-          </p:cNvPr>
-          <p:cNvSpPr>
-            <a:spLocks noGrp="1"/>
-          </p:cNvSpPr>
-          <p:nvPr>
-            <p:ph type="body" idx="1"/>
-          </p:nvPr>
-        </p:nvSpPr>
-        <p:spPr/>
-        <p:txBody>
-          <a:bodyPr/>
-          <a:lstStyle/>
-          <a:p>
-            <a:pPr marL="0" marR="0" lvl="0" indent="0" algn="l" defTabSz="914400" rtl="0" eaLnBrk="1" fontAlgn="auto" latinLnBrk="0" hangingPunct="1">
-              <a:lnSpc>
-                <a:spcPct val="100000"/>
-              </a:lnSpc>
-              <a:spcBef>
-                <a:spcPts val="0"/>
-              </a:spcBef>
-              <a:spcAft>
-                <a:spcPts val="0"/>
-              </a:spcAft>
-              <a:buClrTx/>
-              <a:buSzTx/>
-              <a:buFontTx/>
-              <a:buNone/>
-              <a:tabLst/>
-              <a:defRPr/>
-            </a:pPr>
-            <a:endParaRPr lang="nl-NL" dirty="0"/>
-          </a:p>
-        </p:txBody>
-      </p:sp>
-      <p:sp>
-        <p:nvSpPr>
-          <p:cNvPr id="4" name="Slide Number Placeholder 3">
-            <a:extLst>
-              <a:ext uri="{FF2B5EF4-FFF2-40B4-BE49-F238E27FC236}">
-                <a16:creationId xmlns:a16="http://schemas.microsoft.com/office/drawing/2014/main" id="{364D6F92-8CD4-FF1D-074C-F1A227480882}"/>
-              </a:ext>
-            </a:extLst>
-          </p:cNvPr>
-          <p:cNvSpPr>
-            <a:spLocks noGrp="1"/>
-          </p:cNvSpPr>
-          <p:nvPr>
-            <p:ph type="sldNum" sz="quarter" idx="5"/>
-          </p:nvPr>
-        </p:nvSpPr>
-        <p:spPr/>
-        <p:txBody>
-          <a:bodyPr/>
-          <a:lstStyle/>
-          <a:p>
-            <a:fld id="{4BAF0DEA-1372-46C0-8FC9-2869E9CCF7DA}" type="slidenum">
-              <a:rPr lang="en-NL" smtClean="0"/>
-              <a:t>51</a:t>
-            </a:fld>
-            <a:endParaRPr lang="en-NL"/>
-          </a:p>
-        </p:txBody>
-      </p:sp>
-    </p:spTree>
-    <p:extLst>
-      <p:ext uri="{BB962C8B-B14F-4D97-AF65-F5344CB8AC3E}">
-        <p14:creationId xmlns:p14="http://schemas.microsoft.com/office/powerpoint/2010/main" val="4166445045"/>
-      </p:ext>
-    </p:extLst>
-  </p:cSld>
-  <p:clrMapOvr>
-    <a:masterClrMapping/>
-  </p:clrMapOvr>
-</p:notes>
-</file>
-
-<file path=ppt/notesSlides/notesSlide29.xml><?xml version="1.0" encoding="utf-8"?>
-<p:notes xmlns:a="http://schemas.openxmlformats.org/drawingml/2006/main" xmlns:r="http://schemas.openxmlformats.org/officeDocument/2006/relationships" xmlns:p="http://schemas.openxmlformats.org/presentationml/2006/main">
-  <p:cSld>
-    <p:spTree>
-      <p:nvGrpSpPr>
-        <p:cNvPr id="1" name="">
-          <a:extLst>
-            <a:ext uri="{FF2B5EF4-FFF2-40B4-BE49-F238E27FC236}">
-              <a16:creationId xmlns:a16="http://schemas.microsoft.com/office/drawing/2014/main" id="{0EE98C18-6516-DC5E-9623-78DD88129245}"/>
-            </a:ext>
-          </a:extLst>
-        </p:cNvPr>
-        <p:cNvGrpSpPr/>
-        <p:nvPr/>
-      </p:nvGrpSpPr>
-      <p:grpSpPr>
-        <a:xfrm>
-          <a:off x="0" y="0"/>
-          <a:ext cx="0" cy="0"/>
-          <a:chOff x="0" y="0"/>
-          <a:chExt cx="0" cy="0"/>
-        </a:xfrm>
-      </p:grpSpPr>
-      <p:sp>
-        <p:nvSpPr>
-          <p:cNvPr id="2" name="Slide Image Placeholder 1">
-            <a:extLst>
-              <a:ext uri="{FF2B5EF4-FFF2-40B4-BE49-F238E27FC236}">
-                <a16:creationId xmlns:a16="http://schemas.microsoft.com/office/drawing/2014/main" id="{377B15E4-6392-C6B8-CA6B-1E31CAF4E95C}"/>
-              </a:ext>
-            </a:extLst>
-          </p:cNvPr>
-          <p:cNvSpPr>
-            <a:spLocks noGrp="1" noRot="1" noChangeAspect="1"/>
-          </p:cNvSpPr>
-          <p:nvPr>
-            <p:ph type="sldImg"/>
-          </p:nvPr>
-        </p:nvSpPr>
-        <p:spPr/>
-      </p:sp>
-      <p:sp>
-        <p:nvSpPr>
-          <p:cNvPr id="3" name="Notes Placeholder 2">
-            <a:extLst>
-              <a:ext uri="{FF2B5EF4-FFF2-40B4-BE49-F238E27FC236}">
-                <a16:creationId xmlns:a16="http://schemas.microsoft.com/office/drawing/2014/main" id="{A1E5310B-0B09-525B-46B6-030E5F8E0B06}"/>
-              </a:ext>
-            </a:extLst>
-          </p:cNvPr>
-          <p:cNvSpPr>
-            <a:spLocks noGrp="1"/>
-          </p:cNvSpPr>
-          <p:nvPr>
-            <p:ph type="body" idx="1"/>
-          </p:nvPr>
-        </p:nvSpPr>
-        <p:spPr/>
-        <p:txBody>
-          <a:bodyPr/>
-          <a:lstStyle/>
-          <a:p>
-            <a:pPr marL="0" marR="0" lvl="0" indent="0" algn="l" defTabSz="914400" rtl="0" eaLnBrk="1" fontAlgn="auto" latinLnBrk="0" hangingPunct="1">
-              <a:lnSpc>
-                <a:spcPct val="100000"/>
-              </a:lnSpc>
-              <a:spcBef>
-                <a:spcPts val="0"/>
-              </a:spcBef>
-              <a:spcAft>
-                <a:spcPts val="0"/>
-              </a:spcAft>
-              <a:buClrTx/>
-              <a:buSzTx/>
-              <a:buFontTx/>
-              <a:buNone/>
-              <a:tabLst/>
-              <a:defRPr/>
-            </a:pPr>
-            <a:r>
-              <a:rPr lang="nl-NL" dirty="0"/>
-              <a:t>Demo: AD: pull </a:t>
-            </a:r>
-            <a:r>
-              <a:rPr lang="nl-NL" dirty="0" err="1"/>
-              <a:t>requests</a:t>
-            </a:r>
-            <a:endParaRPr lang="nl-NL" dirty="0"/>
-          </a:p>
-        </p:txBody>
-      </p:sp>
-      <p:sp>
-        <p:nvSpPr>
-          <p:cNvPr id="4" name="Slide Number Placeholder 3">
-            <a:extLst>
-              <a:ext uri="{FF2B5EF4-FFF2-40B4-BE49-F238E27FC236}">
-                <a16:creationId xmlns:a16="http://schemas.microsoft.com/office/drawing/2014/main" id="{EDC3F707-C37C-3BDD-A4DA-38AA2FF04D75}"/>
-              </a:ext>
-            </a:extLst>
-          </p:cNvPr>
-          <p:cNvSpPr>
-            <a:spLocks noGrp="1"/>
-          </p:cNvSpPr>
-          <p:nvPr>
-            <p:ph type="sldNum" sz="quarter" idx="5"/>
-          </p:nvPr>
-        </p:nvSpPr>
-        <p:spPr/>
-        <p:txBody>
-          <a:bodyPr/>
-          <a:lstStyle/>
-          <a:p>
-            <a:fld id="{4BAF0DEA-1372-46C0-8FC9-2869E9CCF7DA}" type="slidenum">
-              <a:rPr lang="en-NL" smtClean="0"/>
-              <a:t>52</a:t>
-            </a:fld>
-            <a:endParaRPr lang="en-NL"/>
-          </a:p>
-        </p:txBody>
-      </p:sp>
-    </p:spTree>
-    <p:extLst>
-      <p:ext uri="{BB962C8B-B14F-4D97-AF65-F5344CB8AC3E}">
-        <p14:creationId xmlns:p14="http://schemas.microsoft.com/office/powerpoint/2010/main" val="3244731069"/>
       </p:ext>
     </p:extLst>
   </p:cSld>
@@ -3293,6 +3249,389 @@
         <p:cNvPr id="1" name="">
           <a:extLst>
             <a:ext uri="{FF2B5EF4-FFF2-40B4-BE49-F238E27FC236}">
+              <a16:creationId xmlns:a16="http://schemas.microsoft.com/office/drawing/2014/main" id="{2A8D52B0-C337-23CB-24D7-68A1DB4A140E}"/>
+            </a:ext>
+          </a:extLst>
+        </p:cNvPr>
+        <p:cNvGrpSpPr/>
+        <p:nvPr/>
+      </p:nvGrpSpPr>
+      <p:grpSpPr>
+        <a:xfrm>
+          <a:off x="0" y="0"/>
+          <a:ext cx="0" cy="0"/>
+          <a:chOff x="0" y="0"/>
+          <a:chExt cx="0" cy="0"/>
+        </a:xfrm>
+      </p:grpSpPr>
+      <p:sp>
+        <p:nvSpPr>
+          <p:cNvPr id="2" name="Slide Image Placeholder 1">
+            <a:extLst>
+              <a:ext uri="{FF2B5EF4-FFF2-40B4-BE49-F238E27FC236}">
+                <a16:creationId xmlns:a16="http://schemas.microsoft.com/office/drawing/2014/main" id="{3EE8301A-167B-EAC0-BC23-52ECD5D604B1}"/>
+              </a:ext>
+            </a:extLst>
+          </p:cNvPr>
+          <p:cNvSpPr>
+            <a:spLocks noGrp="1" noRot="1" noChangeAspect="1"/>
+          </p:cNvSpPr>
+          <p:nvPr>
+            <p:ph type="sldImg"/>
+          </p:nvPr>
+        </p:nvSpPr>
+        <p:spPr/>
+      </p:sp>
+      <p:sp>
+        <p:nvSpPr>
+          <p:cNvPr id="3" name="Notes Placeholder 2">
+            <a:extLst>
+              <a:ext uri="{FF2B5EF4-FFF2-40B4-BE49-F238E27FC236}">
+                <a16:creationId xmlns:a16="http://schemas.microsoft.com/office/drawing/2014/main" id="{D55B6090-6C67-B0A0-B647-562E2D83B77E}"/>
+              </a:ext>
+            </a:extLst>
+          </p:cNvPr>
+          <p:cNvSpPr>
+            <a:spLocks noGrp="1"/>
+          </p:cNvSpPr>
+          <p:nvPr>
+            <p:ph type="body" idx="1"/>
+          </p:nvPr>
+        </p:nvSpPr>
+        <p:spPr/>
+        <p:txBody>
+          <a:bodyPr/>
+          <a:lstStyle/>
+          <a:p>
+            <a:pPr marL="0" marR="0" lvl="0" indent="0" algn="l" defTabSz="914400" rtl="0" eaLnBrk="1" fontAlgn="auto" latinLnBrk="0" hangingPunct="1">
+              <a:lnSpc>
+                <a:spcPct val="100000"/>
+              </a:lnSpc>
+              <a:spcBef>
+                <a:spcPts val="0"/>
+              </a:spcBef>
+              <a:spcAft>
+                <a:spcPts val="0"/>
+              </a:spcAft>
+              <a:buClrTx/>
+              <a:buSzTx/>
+              <a:buFontTx/>
+              <a:buNone/>
+              <a:tabLst/>
+              <a:defRPr/>
+            </a:pPr>
+            <a:endParaRPr lang="nl-NL" dirty="0"/>
+          </a:p>
+        </p:txBody>
+      </p:sp>
+      <p:sp>
+        <p:nvSpPr>
+          <p:cNvPr id="4" name="Slide Number Placeholder 3">
+            <a:extLst>
+              <a:ext uri="{FF2B5EF4-FFF2-40B4-BE49-F238E27FC236}">
+                <a16:creationId xmlns:a16="http://schemas.microsoft.com/office/drawing/2014/main" id="{3DE533A0-519F-60FD-357C-614C0B8FCA93}"/>
+              </a:ext>
+            </a:extLst>
+          </p:cNvPr>
+          <p:cNvSpPr>
+            <a:spLocks noGrp="1"/>
+          </p:cNvSpPr>
+          <p:nvPr>
+            <p:ph type="sldNum" sz="quarter" idx="5"/>
+          </p:nvPr>
+        </p:nvSpPr>
+        <p:spPr/>
+        <p:txBody>
+          <a:bodyPr/>
+          <a:lstStyle/>
+          <a:p>
+            <a:fld id="{4BAF0DEA-1372-46C0-8FC9-2869E9CCF7DA}" type="slidenum">
+              <a:rPr lang="en-NL" smtClean="0"/>
+              <a:t>51</a:t>
+            </a:fld>
+            <a:endParaRPr lang="en-NL"/>
+          </a:p>
+        </p:txBody>
+      </p:sp>
+    </p:spTree>
+    <p:extLst>
+      <p:ext uri="{BB962C8B-B14F-4D97-AF65-F5344CB8AC3E}">
+        <p14:creationId xmlns:p14="http://schemas.microsoft.com/office/powerpoint/2010/main" val="520542955"/>
+      </p:ext>
+    </p:extLst>
+  </p:cSld>
+  <p:clrMapOvr>
+    <a:masterClrMapping/>
+  </p:clrMapOvr>
+</p:notes>
+</file>
+
+<file path=ppt/notesSlides/notesSlide31.xml><?xml version="1.0" encoding="utf-8"?>
+<p:notes xmlns:a="http://schemas.openxmlformats.org/drawingml/2006/main" xmlns:r="http://schemas.openxmlformats.org/officeDocument/2006/relationships" xmlns:p="http://schemas.openxmlformats.org/presentationml/2006/main">
+  <p:cSld>
+    <p:spTree>
+      <p:nvGrpSpPr>
+        <p:cNvPr id="1" name="">
+          <a:extLst>
+            <a:ext uri="{FF2B5EF4-FFF2-40B4-BE49-F238E27FC236}">
+              <a16:creationId xmlns:a16="http://schemas.microsoft.com/office/drawing/2014/main" id="{2201FC99-DEE0-7997-93CA-1EFF3E2C00AE}"/>
+            </a:ext>
+          </a:extLst>
+        </p:cNvPr>
+        <p:cNvGrpSpPr/>
+        <p:nvPr/>
+      </p:nvGrpSpPr>
+      <p:grpSpPr>
+        <a:xfrm>
+          <a:off x="0" y="0"/>
+          <a:ext cx="0" cy="0"/>
+          <a:chOff x="0" y="0"/>
+          <a:chExt cx="0" cy="0"/>
+        </a:xfrm>
+      </p:grpSpPr>
+      <p:sp>
+        <p:nvSpPr>
+          <p:cNvPr id="2" name="Slide Image Placeholder 1">
+            <a:extLst>
+              <a:ext uri="{FF2B5EF4-FFF2-40B4-BE49-F238E27FC236}">
+                <a16:creationId xmlns:a16="http://schemas.microsoft.com/office/drawing/2014/main" id="{7566C330-A06C-DA46-506A-E4B737FE8FAC}"/>
+              </a:ext>
+            </a:extLst>
+          </p:cNvPr>
+          <p:cNvSpPr>
+            <a:spLocks noGrp="1" noRot="1" noChangeAspect="1"/>
+          </p:cNvSpPr>
+          <p:nvPr>
+            <p:ph type="sldImg"/>
+          </p:nvPr>
+        </p:nvSpPr>
+        <p:spPr/>
+      </p:sp>
+      <p:sp>
+        <p:nvSpPr>
+          <p:cNvPr id="3" name="Notes Placeholder 2">
+            <a:extLst>
+              <a:ext uri="{FF2B5EF4-FFF2-40B4-BE49-F238E27FC236}">
+                <a16:creationId xmlns:a16="http://schemas.microsoft.com/office/drawing/2014/main" id="{BB776D8D-7417-4EAC-40A7-7DBEF5AD5A5B}"/>
+              </a:ext>
+            </a:extLst>
+          </p:cNvPr>
+          <p:cNvSpPr>
+            <a:spLocks noGrp="1"/>
+          </p:cNvSpPr>
+          <p:nvPr>
+            <p:ph type="body" idx="1"/>
+          </p:nvPr>
+        </p:nvSpPr>
+        <p:spPr/>
+        <p:txBody>
+          <a:bodyPr/>
+          <a:lstStyle/>
+          <a:p>
+            <a:pPr marL="0" marR="0" lvl="0" indent="0" algn="l" defTabSz="914400" rtl="0" eaLnBrk="1" fontAlgn="auto" latinLnBrk="0" hangingPunct="1">
+              <a:lnSpc>
+                <a:spcPct val="100000"/>
+              </a:lnSpc>
+              <a:spcBef>
+                <a:spcPts val="0"/>
+              </a:spcBef>
+              <a:spcAft>
+                <a:spcPts val="0"/>
+              </a:spcAft>
+              <a:buClrTx/>
+              <a:buSzTx/>
+              <a:buFontTx/>
+              <a:buNone/>
+              <a:tabLst/>
+              <a:defRPr/>
+            </a:pPr>
+            <a:endParaRPr lang="nl-NL" dirty="0"/>
+          </a:p>
+        </p:txBody>
+      </p:sp>
+      <p:sp>
+        <p:nvSpPr>
+          <p:cNvPr id="4" name="Slide Number Placeholder 3">
+            <a:extLst>
+              <a:ext uri="{FF2B5EF4-FFF2-40B4-BE49-F238E27FC236}">
+                <a16:creationId xmlns:a16="http://schemas.microsoft.com/office/drawing/2014/main" id="{364D6F92-8CD4-FF1D-074C-F1A227480882}"/>
+              </a:ext>
+            </a:extLst>
+          </p:cNvPr>
+          <p:cNvSpPr>
+            <a:spLocks noGrp="1"/>
+          </p:cNvSpPr>
+          <p:nvPr>
+            <p:ph type="sldNum" sz="quarter" idx="5"/>
+          </p:nvPr>
+        </p:nvSpPr>
+        <p:spPr/>
+        <p:txBody>
+          <a:bodyPr/>
+          <a:lstStyle/>
+          <a:p>
+            <a:fld id="{4BAF0DEA-1372-46C0-8FC9-2869E9CCF7DA}" type="slidenum">
+              <a:rPr lang="en-NL" smtClean="0"/>
+              <a:t>52</a:t>
+            </a:fld>
+            <a:endParaRPr lang="en-NL"/>
+          </a:p>
+        </p:txBody>
+      </p:sp>
+    </p:spTree>
+    <p:extLst>
+      <p:ext uri="{BB962C8B-B14F-4D97-AF65-F5344CB8AC3E}">
+        <p14:creationId xmlns:p14="http://schemas.microsoft.com/office/powerpoint/2010/main" val="4166445045"/>
+      </p:ext>
+    </p:extLst>
+  </p:cSld>
+  <p:clrMapOvr>
+    <a:masterClrMapping/>
+  </p:clrMapOvr>
+</p:notes>
+</file>
+
+<file path=ppt/notesSlides/notesSlide32.xml><?xml version="1.0" encoding="utf-8"?>
+<p:notes xmlns:a="http://schemas.openxmlformats.org/drawingml/2006/main" xmlns:r="http://schemas.openxmlformats.org/officeDocument/2006/relationships" xmlns:p="http://schemas.openxmlformats.org/presentationml/2006/main">
+  <p:cSld>
+    <p:spTree>
+      <p:nvGrpSpPr>
+        <p:cNvPr id="1" name="">
+          <a:extLst>
+            <a:ext uri="{FF2B5EF4-FFF2-40B4-BE49-F238E27FC236}">
+              <a16:creationId xmlns:a16="http://schemas.microsoft.com/office/drawing/2014/main" id="{0EE98C18-6516-DC5E-9623-78DD88129245}"/>
+            </a:ext>
+          </a:extLst>
+        </p:cNvPr>
+        <p:cNvGrpSpPr/>
+        <p:nvPr/>
+      </p:nvGrpSpPr>
+      <p:grpSpPr>
+        <a:xfrm>
+          <a:off x="0" y="0"/>
+          <a:ext cx="0" cy="0"/>
+          <a:chOff x="0" y="0"/>
+          <a:chExt cx="0" cy="0"/>
+        </a:xfrm>
+      </p:grpSpPr>
+      <p:sp>
+        <p:nvSpPr>
+          <p:cNvPr id="2" name="Slide Image Placeholder 1">
+            <a:extLst>
+              <a:ext uri="{FF2B5EF4-FFF2-40B4-BE49-F238E27FC236}">
+                <a16:creationId xmlns:a16="http://schemas.microsoft.com/office/drawing/2014/main" id="{377B15E4-6392-C6B8-CA6B-1E31CAF4E95C}"/>
+              </a:ext>
+            </a:extLst>
+          </p:cNvPr>
+          <p:cNvSpPr>
+            <a:spLocks noGrp="1" noRot="1" noChangeAspect="1"/>
+          </p:cNvSpPr>
+          <p:nvPr>
+            <p:ph type="sldImg"/>
+          </p:nvPr>
+        </p:nvSpPr>
+        <p:spPr/>
+      </p:sp>
+      <p:sp>
+        <p:nvSpPr>
+          <p:cNvPr id="3" name="Notes Placeholder 2">
+            <a:extLst>
+              <a:ext uri="{FF2B5EF4-FFF2-40B4-BE49-F238E27FC236}">
+                <a16:creationId xmlns:a16="http://schemas.microsoft.com/office/drawing/2014/main" id="{A1E5310B-0B09-525B-46B6-030E5F8E0B06}"/>
+              </a:ext>
+            </a:extLst>
+          </p:cNvPr>
+          <p:cNvSpPr>
+            <a:spLocks noGrp="1"/>
+          </p:cNvSpPr>
+          <p:nvPr>
+            <p:ph type="body" idx="1"/>
+          </p:nvPr>
+        </p:nvSpPr>
+        <p:spPr/>
+        <p:txBody>
+          <a:bodyPr/>
+          <a:lstStyle/>
+          <a:p>
+            <a:pPr marL="0" marR="0" lvl="0" indent="0" algn="l" defTabSz="914400" rtl="0" eaLnBrk="1" fontAlgn="auto" latinLnBrk="0" hangingPunct="1">
+              <a:lnSpc>
+                <a:spcPct val="100000"/>
+              </a:lnSpc>
+              <a:spcBef>
+                <a:spcPts val="0"/>
+              </a:spcBef>
+              <a:spcAft>
+                <a:spcPts val="0"/>
+              </a:spcAft>
+              <a:buClrTx/>
+              <a:buSzTx/>
+              <a:buFontTx/>
+              <a:buNone/>
+              <a:tabLst/>
+              <a:defRPr/>
+            </a:pPr>
+            <a:r>
+              <a:rPr lang="nl-NL" dirty="0"/>
+              <a:t>Demo: AD: pull </a:t>
+            </a:r>
+            <a:r>
+              <a:rPr lang="nl-NL" dirty="0" err="1"/>
+              <a:t>requests</a:t>
+            </a:r>
+            <a:endParaRPr lang="nl-NL" dirty="0"/>
+          </a:p>
+        </p:txBody>
+      </p:sp>
+      <p:sp>
+        <p:nvSpPr>
+          <p:cNvPr id="4" name="Slide Number Placeholder 3">
+            <a:extLst>
+              <a:ext uri="{FF2B5EF4-FFF2-40B4-BE49-F238E27FC236}">
+                <a16:creationId xmlns:a16="http://schemas.microsoft.com/office/drawing/2014/main" id="{EDC3F707-C37C-3BDD-A4DA-38AA2FF04D75}"/>
+              </a:ext>
+            </a:extLst>
+          </p:cNvPr>
+          <p:cNvSpPr>
+            <a:spLocks noGrp="1"/>
+          </p:cNvSpPr>
+          <p:nvPr>
+            <p:ph type="sldNum" sz="quarter" idx="5"/>
+          </p:nvPr>
+        </p:nvSpPr>
+        <p:spPr/>
+        <p:txBody>
+          <a:bodyPr/>
+          <a:lstStyle/>
+          <a:p>
+            <a:fld id="{4BAF0DEA-1372-46C0-8FC9-2869E9CCF7DA}" type="slidenum">
+              <a:rPr lang="en-NL" smtClean="0"/>
+              <a:t>53</a:t>
+            </a:fld>
+            <a:endParaRPr lang="en-NL"/>
+          </a:p>
+        </p:txBody>
+      </p:sp>
+    </p:spTree>
+    <p:extLst>
+      <p:ext uri="{BB962C8B-B14F-4D97-AF65-F5344CB8AC3E}">
+        <p14:creationId xmlns:p14="http://schemas.microsoft.com/office/powerpoint/2010/main" val="3244731069"/>
+      </p:ext>
+    </p:extLst>
+  </p:cSld>
+  <p:clrMapOvr>
+    <a:masterClrMapping/>
+  </p:clrMapOvr>
+</p:notes>
+</file>
+
+<file path=ppt/notesSlides/notesSlide33.xml><?xml version="1.0" encoding="utf-8"?>
+<p:notes xmlns:a="http://schemas.openxmlformats.org/drawingml/2006/main" xmlns:r="http://schemas.openxmlformats.org/officeDocument/2006/relationships" xmlns:p="http://schemas.openxmlformats.org/presentationml/2006/main">
+  <p:cSld>
+    <p:spTree>
+      <p:nvGrpSpPr>
+        <p:cNvPr id="1" name="">
+          <a:extLst>
+            <a:ext uri="{FF2B5EF4-FFF2-40B4-BE49-F238E27FC236}">
               <a16:creationId xmlns:a16="http://schemas.microsoft.com/office/drawing/2014/main" id="{5DE23230-1028-A0C8-9059-E5E579540E5B}"/>
             </a:ext>
           </a:extLst>
@@ -3391,7 +3730,7 @@
           <a:p>
             <a:fld id="{4BAF0DEA-1372-46C0-8FC9-2869E9CCF7DA}" type="slidenum">
               <a:rPr lang="en-NL" smtClean="0"/>
-              <a:t>54</a:t>
+              <a:t>55</a:t>
             </a:fld>
             <a:endParaRPr lang="en-NL"/>
           </a:p>
@@ -3410,7 +3749,7 @@
 </p:notes>
 </file>
 
-<file path=ppt/notesSlides/notesSlide31.xml><?xml version="1.0" encoding="utf-8"?>
+<file path=ppt/notesSlides/notesSlide34.xml><?xml version="1.0" encoding="utf-8"?>
 <p:notes xmlns:a="http://schemas.openxmlformats.org/drawingml/2006/main" xmlns:r="http://schemas.openxmlformats.org/officeDocument/2006/relationships" xmlns:p="http://schemas.openxmlformats.org/presentationml/2006/main">
   <p:cSld>
     <p:spTree>
@@ -3524,7 +3863,7 @@
           <a:p>
             <a:fld id="{4BAF0DEA-1372-46C0-8FC9-2869E9CCF7DA}" type="slidenum">
               <a:rPr lang="en-NL" smtClean="0"/>
-              <a:t>55</a:t>
+              <a:t>56</a:t>
             </a:fld>
             <a:endParaRPr lang="en-NL"/>
           </a:p>
@@ -3543,7 +3882,7 @@
 </p:notes>
 </file>
 
-<file path=ppt/notesSlides/notesSlide32.xml><?xml version="1.0" encoding="utf-8"?>
+<file path=ppt/notesSlides/notesSlide35.xml><?xml version="1.0" encoding="utf-8"?>
 <p:notes xmlns:a="http://schemas.openxmlformats.org/drawingml/2006/main" xmlns:r="http://schemas.openxmlformats.org/officeDocument/2006/relationships" xmlns:p="http://schemas.openxmlformats.org/presentationml/2006/main">
   <p:cSld>
     <p:spTree>
@@ -3649,7 +3988,7 @@
           <a:p>
             <a:fld id="{4BAF0DEA-1372-46C0-8FC9-2869E9CCF7DA}" type="slidenum">
               <a:rPr lang="en-NL" smtClean="0"/>
-              <a:t>56</a:t>
+              <a:t>57</a:t>
             </a:fld>
             <a:endParaRPr lang="en-NL"/>
           </a:p>
@@ -3668,7 +4007,7 @@
 </p:notes>
 </file>
 
-<file path=ppt/notesSlides/notesSlide33.xml><?xml version="1.0" encoding="utf-8"?>
+<file path=ppt/notesSlides/notesSlide36.xml><?xml version="1.0" encoding="utf-8"?>
 <p:notes xmlns:a="http://schemas.openxmlformats.org/drawingml/2006/main" xmlns:r="http://schemas.openxmlformats.org/officeDocument/2006/relationships" xmlns:p="http://schemas.openxmlformats.org/presentationml/2006/main">
   <p:cSld>
     <p:spTree>
@@ -3774,7 +4113,7 @@
           <a:p>
             <a:fld id="{4BAF0DEA-1372-46C0-8FC9-2869E9CCF7DA}" type="slidenum">
               <a:rPr lang="en-NL" smtClean="0"/>
-              <a:t>57</a:t>
+              <a:t>58</a:t>
             </a:fld>
             <a:endParaRPr lang="en-NL"/>
           </a:p>
@@ -3793,7 +4132,7 @@
 </p:notes>
 </file>
 
-<file path=ppt/notesSlides/notesSlide34.xml><?xml version="1.0" encoding="utf-8"?>
+<file path=ppt/notesSlides/notesSlide37.xml><?xml version="1.0" encoding="utf-8"?>
 <p:notes xmlns:a="http://schemas.openxmlformats.org/drawingml/2006/main" xmlns:r="http://schemas.openxmlformats.org/officeDocument/2006/relationships" xmlns:p="http://schemas.openxmlformats.org/presentationml/2006/main">
   <p:cSld>
     <p:spTree>
@@ -3899,7 +4238,7 @@
           <a:p>
             <a:fld id="{4BAF0DEA-1372-46C0-8FC9-2869E9CCF7DA}" type="slidenum">
               <a:rPr lang="en-NL" smtClean="0"/>
-              <a:t>59</a:t>
+              <a:t>60</a:t>
             </a:fld>
             <a:endParaRPr lang="en-NL"/>
           </a:p>
@@ -3918,7 +4257,7 @@
 </p:notes>
 </file>
 
-<file path=ppt/notesSlides/notesSlide35.xml><?xml version="1.0" encoding="utf-8"?>
+<file path=ppt/notesSlides/notesSlide38.xml><?xml version="1.0" encoding="utf-8"?>
 <p:notes xmlns:a="http://schemas.openxmlformats.org/drawingml/2006/main" xmlns:r="http://schemas.openxmlformats.org/officeDocument/2006/relationships" xmlns:p="http://schemas.openxmlformats.org/presentationml/2006/main">
   <p:cSld>
     <p:spTree>
@@ -4040,7 +4379,7 @@
           <a:p>
             <a:fld id="{4BAF0DEA-1372-46C0-8FC9-2869E9CCF7DA}" type="slidenum">
               <a:rPr lang="en-NL" smtClean="0"/>
-              <a:t>60</a:t>
+              <a:t>61</a:t>
             </a:fld>
             <a:endParaRPr lang="en-NL"/>
           </a:p>
@@ -4059,7 +4398,7 @@
 </p:notes>
 </file>
 
-<file path=ppt/notesSlides/notesSlide36.xml><?xml version="1.0" encoding="utf-8"?>
+<file path=ppt/notesSlides/notesSlide39.xml><?xml version="1.0" encoding="utf-8"?>
 <p:notes xmlns:a="http://schemas.openxmlformats.org/drawingml/2006/main" xmlns:r="http://schemas.openxmlformats.org/officeDocument/2006/relationships" xmlns:p="http://schemas.openxmlformats.org/presentationml/2006/main">
   <p:cSld>
     <p:spTree>
@@ -4135,7 +4474,7 @@
           <a:p>
             <a:fld id="{4BAF0DEA-1372-46C0-8FC9-2869E9CCF7DA}" type="slidenum">
               <a:rPr lang="en-NL" smtClean="0"/>
-              <a:t>64</a:t>
+              <a:t>65</a:t>
             </a:fld>
             <a:endParaRPr lang="en-NL"/>
           </a:p>
@@ -4991,7 +5330,7 @@
           <a:p>
             <a:fld id="{0EBB069A-003F-4FC0-8534-236B0C5C7B5F}" type="datetimeFigureOut">
               <a:rPr lang="en-NL" smtClean="0"/>
-              <a:t>04/10/2026</a:t>
+              <a:t>05/10/2026</a:t>
             </a:fld>
             <a:endParaRPr lang="en-NL"/>
           </a:p>
@@ -5191,7 +5530,7 @@
           <a:p>
             <a:fld id="{0EBB069A-003F-4FC0-8534-236B0C5C7B5F}" type="datetimeFigureOut">
               <a:rPr lang="en-NL" smtClean="0"/>
-              <a:t>04/10/2026</a:t>
+              <a:t>05/10/2026</a:t>
             </a:fld>
             <a:endParaRPr lang="en-NL"/>
           </a:p>
@@ -5401,7 +5740,7 @@
           <a:p>
             <a:fld id="{0EBB069A-003F-4FC0-8534-236B0C5C7B5F}" type="datetimeFigureOut">
               <a:rPr lang="en-NL" smtClean="0"/>
-              <a:t>04/10/2026</a:t>
+              <a:t>05/10/2026</a:t>
             </a:fld>
             <a:endParaRPr lang="en-NL"/>
           </a:p>
@@ -5601,7 +5940,7 @@
           <a:p>
             <a:fld id="{0EBB069A-003F-4FC0-8534-236B0C5C7B5F}" type="datetimeFigureOut">
               <a:rPr lang="en-NL" smtClean="0"/>
-              <a:t>04/10/2026</a:t>
+              <a:t>05/10/2026</a:t>
             </a:fld>
             <a:endParaRPr lang="en-NL"/>
           </a:p>
@@ -5877,7 +6216,7 @@
           <a:p>
             <a:fld id="{0EBB069A-003F-4FC0-8534-236B0C5C7B5F}" type="datetimeFigureOut">
               <a:rPr lang="en-NL" smtClean="0"/>
-              <a:t>04/10/2026</a:t>
+              <a:t>05/10/2026</a:t>
             </a:fld>
             <a:endParaRPr lang="en-NL"/>
           </a:p>
@@ -6145,7 +6484,7 @@
           <a:p>
             <a:fld id="{0EBB069A-003F-4FC0-8534-236B0C5C7B5F}" type="datetimeFigureOut">
               <a:rPr lang="en-NL" smtClean="0"/>
-              <a:t>04/10/2026</a:t>
+              <a:t>05/10/2026</a:t>
             </a:fld>
             <a:endParaRPr lang="en-NL"/>
           </a:p>
@@ -6560,7 +6899,7 @@
           <a:p>
             <a:fld id="{0EBB069A-003F-4FC0-8534-236B0C5C7B5F}" type="datetimeFigureOut">
               <a:rPr lang="en-NL" smtClean="0"/>
-              <a:t>04/10/2026</a:t>
+              <a:t>05/10/2026</a:t>
             </a:fld>
             <a:endParaRPr lang="en-NL"/>
           </a:p>
@@ -6702,7 +7041,7 @@
           <a:p>
             <a:fld id="{0EBB069A-003F-4FC0-8534-236B0C5C7B5F}" type="datetimeFigureOut">
               <a:rPr lang="en-NL" smtClean="0"/>
-              <a:t>04/10/2026</a:t>
+              <a:t>05/10/2026</a:t>
             </a:fld>
             <a:endParaRPr lang="en-NL"/>
           </a:p>
@@ -6815,7 +7154,7 @@
           <a:p>
             <a:fld id="{0EBB069A-003F-4FC0-8534-236B0C5C7B5F}" type="datetimeFigureOut">
               <a:rPr lang="en-NL" smtClean="0"/>
-              <a:t>04/10/2026</a:t>
+              <a:t>05/10/2026</a:t>
             </a:fld>
             <a:endParaRPr lang="en-NL"/>
           </a:p>
@@ -7128,7 +7467,7 @@
           <a:p>
             <a:fld id="{0EBB069A-003F-4FC0-8534-236B0C5C7B5F}" type="datetimeFigureOut">
               <a:rPr lang="en-NL" smtClean="0"/>
-              <a:t>04/10/2026</a:t>
+              <a:t>05/10/2026</a:t>
             </a:fld>
             <a:endParaRPr lang="en-NL"/>
           </a:p>
@@ -7417,7 +7756,7 @@
           <a:p>
             <a:fld id="{0EBB069A-003F-4FC0-8534-236B0C5C7B5F}" type="datetimeFigureOut">
               <a:rPr lang="en-NL" smtClean="0"/>
-              <a:t>04/10/2026</a:t>
+              <a:t>05/10/2026</a:t>
             </a:fld>
             <a:endParaRPr lang="en-NL"/>
           </a:p>
@@ -7660,7 +7999,7 @@
           <a:p>
             <a:fld id="{0EBB069A-003F-4FC0-8534-236B0C5C7B5F}" type="datetimeFigureOut">
               <a:rPr lang="en-NL" smtClean="0"/>
-              <a:t>04/10/2026</a:t>
+              <a:t>05/10/2026</a:t>
             </a:fld>
             <a:endParaRPr lang="en-NL"/>
           </a:p>
@@ -18712,6 +19051,959 @@
         <p:cNvPr id="1" name="">
           <a:extLst>
             <a:ext uri="{FF2B5EF4-FFF2-40B4-BE49-F238E27FC236}">
+              <a16:creationId xmlns:a16="http://schemas.microsoft.com/office/drawing/2014/main" id="{410501D5-2674-9AC3-1809-2E45DF44ACA8}"/>
+            </a:ext>
+          </a:extLst>
+        </p:cNvPr>
+        <p:cNvGrpSpPr/>
+        <p:nvPr/>
+      </p:nvGrpSpPr>
+      <p:grpSpPr>
+        <a:xfrm>
+          <a:off x="0" y="0"/>
+          <a:ext cx="0" cy="0"/>
+          <a:chOff x="0" y="0"/>
+          <a:chExt cx="0" cy="0"/>
+        </a:xfrm>
+      </p:grpSpPr>
+      <p:sp>
+        <p:nvSpPr>
+          <p:cNvPr id="2" name="Title 1">
+            <a:extLst>
+              <a:ext uri="{FF2B5EF4-FFF2-40B4-BE49-F238E27FC236}">
+                <a16:creationId xmlns:a16="http://schemas.microsoft.com/office/drawing/2014/main" id="{5A5827FE-346C-6DDD-EDD2-124AEE5FB67C}"/>
+              </a:ext>
+            </a:extLst>
+          </p:cNvPr>
+          <p:cNvSpPr>
+            <a:spLocks noGrp="1"/>
+          </p:cNvSpPr>
+          <p:nvPr>
+            <p:ph type="title"/>
+          </p:nvPr>
+        </p:nvSpPr>
+        <p:spPr>
+          <a:xfrm>
+            <a:off x="838200" y="365126"/>
+            <a:ext cx="10515600" cy="718608"/>
+          </a:xfrm>
+        </p:spPr>
+        <p:txBody>
+          <a:bodyPr>
+            <a:normAutofit/>
+          </a:bodyPr>
+          <a:lstStyle/>
+          <a:p>
+            <a:r>
+              <a:rPr lang="nl-NL" sz="3600" noProof="0" dirty="0"/>
+              <a:t>Tips: PR maken</a:t>
+            </a:r>
+          </a:p>
+        </p:txBody>
+      </p:sp>
+      <p:sp>
+        <p:nvSpPr>
+          <p:cNvPr id="15" name="Content Placeholder 2">
+            <a:extLst>
+              <a:ext uri="{FF2B5EF4-FFF2-40B4-BE49-F238E27FC236}">
+                <a16:creationId xmlns:a16="http://schemas.microsoft.com/office/drawing/2014/main" id="{93C7A197-BC38-1C5F-D5E1-0D74823E8CA5}"/>
+              </a:ext>
+            </a:extLst>
+          </p:cNvPr>
+          <p:cNvSpPr txBox="1">
+            <a:spLocks/>
+          </p:cNvSpPr>
+          <p:nvPr/>
+        </p:nvSpPr>
+        <p:spPr>
+          <a:xfrm>
+            <a:off x="838199" y="1456267"/>
+            <a:ext cx="10515600" cy="4720696"/>
+          </a:xfrm>
+          <a:prstGeom prst="rect">
+            <a:avLst/>
+          </a:prstGeom>
+        </p:spPr>
+        <p:txBody>
+          <a:bodyPr vert="horz" lIns="91440" tIns="45720" rIns="91440" bIns="45720" rtlCol="0">
+            <a:noAutofit/>
+          </a:bodyPr>
+          <a:lstStyle>
+            <a:lvl1pPr marL="228600" indent="-228600" algn="l" defTabSz="914400" rtl="0" eaLnBrk="1" latinLnBrk="0" hangingPunct="1">
+              <a:lnSpc>
+                <a:spcPct val="90000"/>
+              </a:lnSpc>
+              <a:spcBef>
+                <a:spcPts val="1000"/>
+              </a:spcBef>
+              <a:buFont typeface="Arial" panose="020B0604020202020204" pitchFamily="34" charset="0"/>
+              <a:buChar char="•"/>
+              <a:defRPr sz="2800" kern="1200">
+                <a:solidFill>
+                  <a:schemeClr val="tx1"/>
+                </a:solidFill>
+                <a:latin typeface="+mn-lt"/>
+                <a:ea typeface="+mn-ea"/>
+                <a:cs typeface="+mn-cs"/>
+              </a:defRPr>
+            </a:lvl1pPr>
+            <a:lvl2pPr marL="685800" indent="-228600" algn="l" defTabSz="914400" rtl="0" eaLnBrk="1" latinLnBrk="0" hangingPunct="1">
+              <a:lnSpc>
+                <a:spcPct val="90000"/>
+              </a:lnSpc>
+              <a:spcBef>
+                <a:spcPts val="500"/>
+              </a:spcBef>
+              <a:buFont typeface="Arial" panose="020B0604020202020204" pitchFamily="34" charset="0"/>
+              <a:buChar char="•"/>
+              <a:defRPr sz="2400" kern="1200">
+                <a:solidFill>
+                  <a:schemeClr val="tx1"/>
+                </a:solidFill>
+                <a:latin typeface="+mn-lt"/>
+                <a:ea typeface="+mn-ea"/>
+                <a:cs typeface="+mn-cs"/>
+              </a:defRPr>
+            </a:lvl2pPr>
+            <a:lvl3pPr marL="1143000" indent="-228600" algn="l" defTabSz="914400" rtl="0" eaLnBrk="1" latinLnBrk="0" hangingPunct="1">
+              <a:lnSpc>
+                <a:spcPct val="90000"/>
+              </a:lnSpc>
+              <a:spcBef>
+                <a:spcPts val="500"/>
+              </a:spcBef>
+              <a:buFont typeface="Arial" panose="020B0604020202020204" pitchFamily="34" charset="0"/>
+              <a:buChar char="•"/>
+              <a:defRPr sz="2000" kern="1200">
+                <a:solidFill>
+                  <a:schemeClr val="tx1"/>
+                </a:solidFill>
+                <a:latin typeface="+mn-lt"/>
+                <a:ea typeface="+mn-ea"/>
+                <a:cs typeface="+mn-cs"/>
+              </a:defRPr>
+            </a:lvl3pPr>
+            <a:lvl4pPr marL="1600200" indent="-228600" algn="l" defTabSz="914400" rtl="0" eaLnBrk="1" latinLnBrk="0" hangingPunct="1">
+              <a:lnSpc>
+                <a:spcPct val="90000"/>
+              </a:lnSpc>
+              <a:spcBef>
+                <a:spcPts val="500"/>
+              </a:spcBef>
+              <a:buFont typeface="Arial" panose="020B0604020202020204" pitchFamily="34" charset="0"/>
+              <a:buChar char="•"/>
+              <a:defRPr sz="1800" kern="1200">
+                <a:solidFill>
+                  <a:schemeClr val="tx1"/>
+                </a:solidFill>
+                <a:latin typeface="+mn-lt"/>
+                <a:ea typeface="+mn-ea"/>
+                <a:cs typeface="+mn-cs"/>
+              </a:defRPr>
+            </a:lvl4pPr>
+            <a:lvl5pPr marL="2057400" indent="-228600" algn="l" defTabSz="914400" rtl="0" eaLnBrk="1" latinLnBrk="0" hangingPunct="1">
+              <a:lnSpc>
+                <a:spcPct val="90000"/>
+              </a:lnSpc>
+              <a:spcBef>
+                <a:spcPts val="500"/>
+              </a:spcBef>
+              <a:buFont typeface="Arial" panose="020B0604020202020204" pitchFamily="34" charset="0"/>
+              <a:buChar char="•"/>
+              <a:defRPr sz="1800" kern="1200">
+                <a:solidFill>
+                  <a:schemeClr val="tx1"/>
+                </a:solidFill>
+                <a:latin typeface="+mn-lt"/>
+                <a:ea typeface="+mn-ea"/>
+                <a:cs typeface="+mn-cs"/>
+              </a:defRPr>
+            </a:lvl5pPr>
+            <a:lvl6pPr marL="2514600" indent="-228600" algn="l" defTabSz="914400" rtl="0" eaLnBrk="1" latinLnBrk="0" hangingPunct="1">
+              <a:lnSpc>
+                <a:spcPct val="90000"/>
+              </a:lnSpc>
+              <a:spcBef>
+                <a:spcPts val="500"/>
+              </a:spcBef>
+              <a:buFont typeface="Arial" panose="020B0604020202020204" pitchFamily="34" charset="0"/>
+              <a:buChar char="•"/>
+              <a:defRPr sz="1800" kern="1200">
+                <a:solidFill>
+                  <a:schemeClr val="tx1"/>
+                </a:solidFill>
+                <a:latin typeface="+mn-lt"/>
+                <a:ea typeface="+mn-ea"/>
+                <a:cs typeface="+mn-cs"/>
+              </a:defRPr>
+            </a:lvl6pPr>
+            <a:lvl7pPr marL="2971800" indent="-228600" algn="l" defTabSz="914400" rtl="0" eaLnBrk="1" latinLnBrk="0" hangingPunct="1">
+              <a:lnSpc>
+                <a:spcPct val="90000"/>
+              </a:lnSpc>
+              <a:spcBef>
+                <a:spcPts val="500"/>
+              </a:spcBef>
+              <a:buFont typeface="Arial" panose="020B0604020202020204" pitchFamily="34" charset="0"/>
+              <a:buChar char="•"/>
+              <a:defRPr sz="1800" kern="1200">
+                <a:solidFill>
+                  <a:schemeClr val="tx1"/>
+                </a:solidFill>
+                <a:latin typeface="+mn-lt"/>
+                <a:ea typeface="+mn-ea"/>
+                <a:cs typeface="+mn-cs"/>
+              </a:defRPr>
+            </a:lvl7pPr>
+            <a:lvl8pPr marL="3429000" indent="-228600" algn="l" defTabSz="914400" rtl="0" eaLnBrk="1" latinLnBrk="0" hangingPunct="1">
+              <a:lnSpc>
+                <a:spcPct val="90000"/>
+              </a:lnSpc>
+              <a:spcBef>
+                <a:spcPts val="500"/>
+              </a:spcBef>
+              <a:buFont typeface="Arial" panose="020B0604020202020204" pitchFamily="34" charset="0"/>
+              <a:buChar char="•"/>
+              <a:defRPr sz="1800" kern="1200">
+                <a:solidFill>
+                  <a:schemeClr val="tx1"/>
+                </a:solidFill>
+                <a:latin typeface="+mn-lt"/>
+                <a:ea typeface="+mn-ea"/>
+                <a:cs typeface="+mn-cs"/>
+              </a:defRPr>
+            </a:lvl8pPr>
+            <a:lvl9pPr marL="3886200" indent="-228600" algn="l" defTabSz="914400" rtl="0" eaLnBrk="1" latinLnBrk="0" hangingPunct="1">
+              <a:lnSpc>
+                <a:spcPct val="90000"/>
+              </a:lnSpc>
+              <a:spcBef>
+                <a:spcPts val="500"/>
+              </a:spcBef>
+              <a:buFont typeface="Arial" panose="020B0604020202020204" pitchFamily="34" charset="0"/>
+              <a:buChar char="•"/>
+              <a:defRPr sz="1800" kern="1200">
+                <a:solidFill>
+                  <a:schemeClr val="tx1"/>
+                </a:solidFill>
+                <a:latin typeface="+mn-lt"/>
+                <a:ea typeface="+mn-ea"/>
+                <a:cs typeface="+mn-cs"/>
+              </a:defRPr>
+            </a:lvl9pPr>
+          </a:lstStyle>
+          <a:p>
+            <a:pPr marL="0" indent="0">
+              <a:lnSpc>
+                <a:spcPct val="150000"/>
+              </a:lnSpc>
+              <a:spcBef>
+                <a:spcPts val="600"/>
+              </a:spcBef>
+              <a:buNone/>
+            </a:pPr>
+            <a:r>
+              <a:rPr lang="nl-NL" sz="1800" dirty="0"/>
+              <a:t>Doel: Maak het de </a:t>
+            </a:r>
+            <a:r>
+              <a:rPr lang="nl-NL" sz="1800" dirty="0" err="1"/>
+              <a:t>reviewer</a:t>
+            </a:r>
+            <a:r>
+              <a:rPr lang="nl-NL" sz="1800" dirty="0"/>
+              <a:t> zo makkelijk mogelijk!</a:t>
+            </a:r>
+          </a:p>
+          <a:p>
+            <a:pPr marL="0" indent="0">
+              <a:lnSpc>
+                <a:spcPct val="150000"/>
+              </a:lnSpc>
+              <a:spcBef>
+                <a:spcPts val="600"/>
+              </a:spcBef>
+              <a:buNone/>
+            </a:pPr>
+            <a:endParaRPr lang="nl-NL" sz="1800" dirty="0"/>
+          </a:p>
+          <a:p>
+            <a:pPr marL="0" indent="0">
+              <a:lnSpc>
+                <a:spcPct val="150000"/>
+              </a:lnSpc>
+              <a:spcBef>
+                <a:spcPts val="600"/>
+              </a:spcBef>
+              <a:buNone/>
+            </a:pPr>
+            <a:r>
+              <a:rPr lang="nl-NL" sz="1800" dirty="0"/>
+              <a:t>Tips:</a:t>
+            </a:r>
+          </a:p>
+          <a:p>
+            <a:pPr>
+              <a:lnSpc>
+                <a:spcPct val="150000"/>
+              </a:lnSpc>
+              <a:spcBef>
+                <a:spcPts val="600"/>
+              </a:spcBef>
+              <a:buFontTx/>
+              <a:buChar char="-"/>
+            </a:pPr>
+            <a:r>
+              <a:rPr lang="nl-NL" sz="1800" dirty="0"/>
+              <a:t>Maak </a:t>
+            </a:r>
+            <a:r>
+              <a:rPr lang="nl-NL" sz="1800" dirty="0" err="1"/>
+              <a:t>PR's</a:t>
+            </a:r>
+            <a:r>
+              <a:rPr lang="nl-NL" sz="1800" dirty="0"/>
+              <a:t> van beperkte omvang!</a:t>
+            </a:r>
+          </a:p>
+          <a:p>
+            <a:pPr>
+              <a:lnSpc>
+                <a:spcPct val="150000"/>
+              </a:lnSpc>
+              <a:spcBef>
+                <a:spcPts val="600"/>
+              </a:spcBef>
+              <a:buFontTx/>
+              <a:buChar char="-"/>
+            </a:pPr>
+            <a:r>
+              <a:rPr lang="nl-NL" sz="1800" dirty="0"/>
+              <a:t>Geef context en uitleg.</a:t>
+            </a:r>
+          </a:p>
+          <a:p>
+            <a:pPr>
+              <a:lnSpc>
+                <a:spcPct val="150000"/>
+              </a:lnSpc>
+              <a:spcBef>
+                <a:spcPts val="600"/>
+              </a:spcBef>
+              <a:buFontTx/>
+              <a:buChar char="-"/>
+            </a:pPr>
+            <a:r>
+              <a:rPr lang="nl-NL" sz="1800" dirty="0"/>
+              <a:t>Ga zorgvuldig om met de gegeven feedback.</a:t>
+            </a:r>
+          </a:p>
+          <a:p>
+            <a:pPr>
+              <a:lnSpc>
+                <a:spcPct val="150000"/>
+              </a:lnSpc>
+              <a:spcBef>
+                <a:spcPts val="600"/>
+              </a:spcBef>
+              <a:buFontTx/>
+              <a:buChar char="-"/>
+            </a:pPr>
+            <a:r>
+              <a:rPr lang="nl-NL" sz="1800" dirty="0"/>
+              <a:t>Vermijd ideologische discussies…</a:t>
+            </a:r>
+          </a:p>
+          <a:p>
+            <a:pPr>
+              <a:lnSpc>
+                <a:spcPct val="150000"/>
+              </a:lnSpc>
+              <a:spcBef>
+                <a:spcPts val="600"/>
+              </a:spcBef>
+              <a:buFontTx/>
+              <a:buChar char="-"/>
+            </a:pPr>
+            <a:r>
+              <a:rPr lang="nl-NL" sz="1800" dirty="0"/>
+              <a:t>Bellen is sneller.</a:t>
+            </a:r>
+          </a:p>
+          <a:p>
+            <a:pPr marL="0" indent="0">
+              <a:lnSpc>
+                <a:spcPct val="150000"/>
+              </a:lnSpc>
+              <a:spcBef>
+                <a:spcPts val="600"/>
+              </a:spcBef>
+              <a:buFont typeface="Arial" panose="020B0604020202020204" pitchFamily="34" charset="0"/>
+              <a:buNone/>
+            </a:pPr>
+            <a:endParaRPr lang="nl-NL" sz="1800" dirty="0">
+              <a:latin typeface="Courier New" panose="02070309020205020404" pitchFamily="49" charset="0"/>
+              <a:cs typeface="Courier New" panose="02070309020205020404" pitchFamily="49" charset="0"/>
+            </a:endParaRPr>
+          </a:p>
+          <a:p>
+            <a:pPr marL="0" indent="0">
+              <a:lnSpc>
+                <a:spcPct val="150000"/>
+              </a:lnSpc>
+              <a:spcBef>
+                <a:spcPts val="600"/>
+              </a:spcBef>
+              <a:buFont typeface="Arial" panose="020B0604020202020204" pitchFamily="34" charset="0"/>
+              <a:buNone/>
+            </a:pPr>
+            <a:endParaRPr lang="nl-NL" sz="1800" dirty="0">
+              <a:latin typeface="Courier New" panose="02070309020205020404" pitchFamily="49" charset="0"/>
+              <a:cs typeface="Courier New" panose="02070309020205020404" pitchFamily="49" charset="0"/>
+            </a:endParaRPr>
+          </a:p>
+        </p:txBody>
+      </p:sp>
+    </p:spTree>
+    <p:extLst>
+      <p:ext uri="{BB962C8B-B14F-4D97-AF65-F5344CB8AC3E}">
+        <p14:creationId xmlns:p14="http://schemas.microsoft.com/office/powerpoint/2010/main" val="208984682"/>
+      </p:ext>
+    </p:extLst>
+  </p:cSld>
+  <p:clrMapOvr>
+    <a:masterClrMapping/>
+  </p:clrMapOvr>
+</p:sld>
+</file>
+
+<file path=ppt/slides/slide29.xml><?xml version="1.0" encoding="utf-8"?>
+<p:sld xmlns:a="http://schemas.openxmlformats.org/drawingml/2006/main" xmlns:r="http://schemas.openxmlformats.org/officeDocument/2006/relationships" xmlns:p="http://schemas.openxmlformats.org/presentationml/2006/main">
+  <p:cSld>
+    <p:spTree>
+      <p:nvGrpSpPr>
+        <p:cNvPr id="1" name="">
+          <a:extLst>
+            <a:ext uri="{FF2B5EF4-FFF2-40B4-BE49-F238E27FC236}">
+              <a16:creationId xmlns:a16="http://schemas.microsoft.com/office/drawing/2014/main" id="{C33B3A6A-0428-D6B3-DA27-5E51FF3E51E1}"/>
+            </a:ext>
+          </a:extLst>
+        </p:cNvPr>
+        <p:cNvGrpSpPr/>
+        <p:nvPr/>
+      </p:nvGrpSpPr>
+      <p:grpSpPr>
+        <a:xfrm>
+          <a:off x="0" y="0"/>
+          <a:ext cx="0" cy="0"/>
+          <a:chOff x="0" y="0"/>
+          <a:chExt cx="0" cy="0"/>
+        </a:xfrm>
+      </p:grpSpPr>
+      <p:sp>
+        <p:nvSpPr>
+          <p:cNvPr id="2" name="Title 1">
+            <a:extLst>
+              <a:ext uri="{FF2B5EF4-FFF2-40B4-BE49-F238E27FC236}">
+                <a16:creationId xmlns:a16="http://schemas.microsoft.com/office/drawing/2014/main" id="{D21FD3FA-9F51-C740-C172-873214669EFE}"/>
+              </a:ext>
+            </a:extLst>
+          </p:cNvPr>
+          <p:cNvSpPr>
+            <a:spLocks noGrp="1"/>
+          </p:cNvSpPr>
+          <p:nvPr>
+            <p:ph type="title"/>
+          </p:nvPr>
+        </p:nvSpPr>
+        <p:spPr>
+          <a:xfrm>
+            <a:off x="838200" y="365126"/>
+            <a:ext cx="10515600" cy="718608"/>
+          </a:xfrm>
+        </p:spPr>
+        <p:txBody>
+          <a:bodyPr>
+            <a:normAutofit/>
+          </a:bodyPr>
+          <a:lstStyle/>
+          <a:p>
+            <a:r>
+              <a:rPr lang="nl-NL" sz="3600" noProof="0" dirty="0"/>
+              <a:t>Tips: PR reviewen</a:t>
+            </a:r>
+          </a:p>
+        </p:txBody>
+      </p:sp>
+      <p:sp>
+        <p:nvSpPr>
+          <p:cNvPr id="15" name="Content Placeholder 2">
+            <a:extLst>
+              <a:ext uri="{FF2B5EF4-FFF2-40B4-BE49-F238E27FC236}">
+                <a16:creationId xmlns:a16="http://schemas.microsoft.com/office/drawing/2014/main" id="{EA6CC6FC-B0E7-0EA9-5D6D-43B0A161EC54}"/>
+              </a:ext>
+            </a:extLst>
+          </p:cNvPr>
+          <p:cNvSpPr txBox="1">
+            <a:spLocks/>
+          </p:cNvSpPr>
+          <p:nvPr/>
+        </p:nvSpPr>
+        <p:spPr>
+          <a:xfrm>
+            <a:off x="838199" y="1456267"/>
+            <a:ext cx="10515600" cy="4720696"/>
+          </a:xfrm>
+          <a:prstGeom prst="rect">
+            <a:avLst/>
+          </a:prstGeom>
+        </p:spPr>
+        <p:txBody>
+          <a:bodyPr vert="horz" lIns="91440" tIns="45720" rIns="91440" bIns="45720" rtlCol="0">
+            <a:noAutofit/>
+          </a:bodyPr>
+          <a:lstStyle>
+            <a:lvl1pPr marL="228600" indent="-228600" algn="l" defTabSz="914400" rtl="0" eaLnBrk="1" latinLnBrk="0" hangingPunct="1">
+              <a:lnSpc>
+                <a:spcPct val="90000"/>
+              </a:lnSpc>
+              <a:spcBef>
+                <a:spcPts val="1000"/>
+              </a:spcBef>
+              <a:buFont typeface="Arial" panose="020B0604020202020204" pitchFamily="34" charset="0"/>
+              <a:buChar char="•"/>
+              <a:defRPr sz="2800" kern="1200">
+                <a:solidFill>
+                  <a:schemeClr val="tx1"/>
+                </a:solidFill>
+                <a:latin typeface="+mn-lt"/>
+                <a:ea typeface="+mn-ea"/>
+                <a:cs typeface="+mn-cs"/>
+              </a:defRPr>
+            </a:lvl1pPr>
+            <a:lvl2pPr marL="685800" indent="-228600" algn="l" defTabSz="914400" rtl="0" eaLnBrk="1" latinLnBrk="0" hangingPunct="1">
+              <a:lnSpc>
+                <a:spcPct val="90000"/>
+              </a:lnSpc>
+              <a:spcBef>
+                <a:spcPts val="500"/>
+              </a:spcBef>
+              <a:buFont typeface="Arial" panose="020B0604020202020204" pitchFamily="34" charset="0"/>
+              <a:buChar char="•"/>
+              <a:defRPr sz="2400" kern="1200">
+                <a:solidFill>
+                  <a:schemeClr val="tx1"/>
+                </a:solidFill>
+                <a:latin typeface="+mn-lt"/>
+                <a:ea typeface="+mn-ea"/>
+                <a:cs typeface="+mn-cs"/>
+              </a:defRPr>
+            </a:lvl2pPr>
+            <a:lvl3pPr marL="1143000" indent="-228600" algn="l" defTabSz="914400" rtl="0" eaLnBrk="1" latinLnBrk="0" hangingPunct="1">
+              <a:lnSpc>
+                <a:spcPct val="90000"/>
+              </a:lnSpc>
+              <a:spcBef>
+                <a:spcPts val="500"/>
+              </a:spcBef>
+              <a:buFont typeface="Arial" panose="020B0604020202020204" pitchFamily="34" charset="0"/>
+              <a:buChar char="•"/>
+              <a:defRPr sz="2000" kern="1200">
+                <a:solidFill>
+                  <a:schemeClr val="tx1"/>
+                </a:solidFill>
+                <a:latin typeface="+mn-lt"/>
+                <a:ea typeface="+mn-ea"/>
+                <a:cs typeface="+mn-cs"/>
+              </a:defRPr>
+            </a:lvl3pPr>
+            <a:lvl4pPr marL="1600200" indent="-228600" algn="l" defTabSz="914400" rtl="0" eaLnBrk="1" latinLnBrk="0" hangingPunct="1">
+              <a:lnSpc>
+                <a:spcPct val="90000"/>
+              </a:lnSpc>
+              <a:spcBef>
+                <a:spcPts val="500"/>
+              </a:spcBef>
+              <a:buFont typeface="Arial" panose="020B0604020202020204" pitchFamily="34" charset="0"/>
+              <a:buChar char="•"/>
+              <a:defRPr sz="1800" kern="1200">
+                <a:solidFill>
+                  <a:schemeClr val="tx1"/>
+                </a:solidFill>
+                <a:latin typeface="+mn-lt"/>
+                <a:ea typeface="+mn-ea"/>
+                <a:cs typeface="+mn-cs"/>
+              </a:defRPr>
+            </a:lvl4pPr>
+            <a:lvl5pPr marL="2057400" indent="-228600" algn="l" defTabSz="914400" rtl="0" eaLnBrk="1" latinLnBrk="0" hangingPunct="1">
+              <a:lnSpc>
+                <a:spcPct val="90000"/>
+              </a:lnSpc>
+              <a:spcBef>
+                <a:spcPts val="500"/>
+              </a:spcBef>
+              <a:buFont typeface="Arial" panose="020B0604020202020204" pitchFamily="34" charset="0"/>
+              <a:buChar char="•"/>
+              <a:defRPr sz="1800" kern="1200">
+                <a:solidFill>
+                  <a:schemeClr val="tx1"/>
+                </a:solidFill>
+                <a:latin typeface="+mn-lt"/>
+                <a:ea typeface="+mn-ea"/>
+                <a:cs typeface="+mn-cs"/>
+              </a:defRPr>
+            </a:lvl5pPr>
+            <a:lvl6pPr marL="2514600" indent="-228600" algn="l" defTabSz="914400" rtl="0" eaLnBrk="1" latinLnBrk="0" hangingPunct="1">
+              <a:lnSpc>
+                <a:spcPct val="90000"/>
+              </a:lnSpc>
+              <a:spcBef>
+                <a:spcPts val="500"/>
+              </a:spcBef>
+              <a:buFont typeface="Arial" panose="020B0604020202020204" pitchFamily="34" charset="0"/>
+              <a:buChar char="•"/>
+              <a:defRPr sz="1800" kern="1200">
+                <a:solidFill>
+                  <a:schemeClr val="tx1"/>
+                </a:solidFill>
+                <a:latin typeface="+mn-lt"/>
+                <a:ea typeface="+mn-ea"/>
+                <a:cs typeface="+mn-cs"/>
+              </a:defRPr>
+            </a:lvl6pPr>
+            <a:lvl7pPr marL="2971800" indent="-228600" algn="l" defTabSz="914400" rtl="0" eaLnBrk="1" latinLnBrk="0" hangingPunct="1">
+              <a:lnSpc>
+                <a:spcPct val="90000"/>
+              </a:lnSpc>
+              <a:spcBef>
+                <a:spcPts val="500"/>
+              </a:spcBef>
+              <a:buFont typeface="Arial" panose="020B0604020202020204" pitchFamily="34" charset="0"/>
+              <a:buChar char="•"/>
+              <a:defRPr sz="1800" kern="1200">
+                <a:solidFill>
+                  <a:schemeClr val="tx1"/>
+                </a:solidFill>
+                <a:latin typeface="+mn-lt"/>
+                <a:ea typeface="+mn-ea"/>
+                <a:cs typeface="+mn-cs"/>
+              </a:defRPr>
+            </a:lvl7pPr>
+            <a:lvl8pPr marL="3429000" indent="-228600" algn="l" defTabSz="914400" rtl="0" eaLnBrk="1" latinLnBrk="0" hangingPunct="1">
+              <a:lnSpc>
+                <a:spcPct val="90000"/>
+              </a:lnSpc>
+              <a:spcBef>
+                <a:spcPts val="500"/>
+              </a:spcBef>
+              <a:buFont typeface="Arial" panose="020B0604020202020204" pitchFamily="34" charset="0"/>
+              <a:buChar char="•"/>
+              <a:defRPr sz="1800" kern="1200">
+                <a:solidFill>
+                  <a:schemeClr val="tx1"/>
+                </a:solidFill>
+                <a:latin typeface="+mn-lt"/>
+                <a:ea typeface="+mn-ea"/>
+                <a:cs typeface="+mn-cs"/>
+              </a:defRPr>
+            </a:lvl8pPr>
+            <a:lvl9pPr marL="3886200" indent="-228600" algn="l" defTabSz="914400" rtl="0" eaLnBrk="1" latinLnBrk="0" hangingPunct="1">
+              <a:lnSpc>
+                <a:spcPct val="90000"/>
+              </a:lnSpc>
+              <a:spcBef>
+                <a:spcPts val="500"/>
+              </a:spcBef>
+              <a:buFont typeface="Arial" panose="020B0604020202020204" pitchFamily="34" charset="0"/>
+              <a:buChar char="•"/>
+              <a:defRPr sz="1800" kern="1200">
+                <a:solidFill>
+                  <a:schemeClr val="tx1"/>
+                </a:solidFill>
+                <a:latin typeface="+mn-lt"/>
+                <a:ea typeface="+mn-ea"/>
+                <a:cs typeface="+mn-cs"/>
+              </a:defRPr>
+            </a:lvl9pPr>
+          </a:lstStyle>
+          <a:p>
+            <a:pPr marL="0" indent="0">
+              <a:lnSpc>
+                <a:spcPct val="150000"/>
+              </a:lnSpc>
+              <a:spcBef>
+                <a:spcPts val="600"/>
+              </a:spcBef>
+              <a:buNone/>
+            </a:pPr>
+            <a:r>
+              <a:rPr lang="nl-NL" sz="1800" dirty="0"/>
+              <a:t>Doel: Help de auteur betere code op te leveren.</a:t>
+            </a:r>
+          </a:p>
+          <a:p>
+            <a:pPr marL="0" indent="0">
+              <a:lnSpc>
+                <a:spcPct val="150000"/>
+              </a:lnSpc>
+              <a:spcBef>
+                <a:spcPts val="600"/>
+              </a:spcBef>
+              <a:buNone/>
+            </a:pPr>
+            <a:endParaRPr lang="nl-NL" sz="1800" dirty="0"/>
+          </a:p>
+          <a:p>
+            <a:pPr marL="0" indent="0">
+              <a:lnSpc>
+                <a:spcPct val="150000"/>
+              </a:lnSpc>
+              <a:spcBef>
+                <a:spcPts val="600"/>
+              </a:spcBef>
+              <a:buNone/>
+            </a:pPr>
+            <a:r>
+              <a:rPr lang="nl-NL" sz="1800" dirty="0"/>
+              <a:t>Tips:</a:t>
+            </a:r>
+          </a:p>
+          <a:p>
+            <a:pPr>
+              <a:lnSpc>
+                <a:spcPct val="150000"/>
+              </a:lnSpc>
+              <a:spcBef>
+                <a:spcPts val="600"/>
+              </a:spcBef>
+              <a:buFontTx/>
+              <a:buChar char="-"/>
+            </a:pPr>
+            <a:r>
+              <a:rPr lang="nl-NL" sz="1800" dirty="0"/>
+              <a:t>Reageer tijdig!</a:t>
+            </a:r>
+          </a:p>
+          <a:p>
+            <a:pPr>
+              <a:lnSpc>
+                <a:spcPct val="150000"/>
+              </a:lnSpc>
+              <a:spcBef>
+                <a:spcPts val="600"/>
+              </a:spcBef>
+              <a:buFontTx/>
+              <a:buChar char="-"/>
+            </a:pPr>
+            <a:r>
+              <a:rPr lang="nl-NL" sz="1800" dirty="0"/>
+              <a:t>Geef opbouwende feedback.</a:t>
+            </a:r>
+          </a:p>
+          <a:p>
+            <a:pPr>
+              <a:lnSpc>
+                <a:spcPct val="150000"/>
+              </a:lnSpc>
+              <a:spcBef>
+                <a:spcPts val="600"/>
+              </a:spcBef>
+              <a:buFontTx/>
+              <a:buChar char="-"/>
+            </a:pPr>
+            <a:r>
+              <a:rPr lang="nl-NL" sz="1800" dirty="0"/>
+              <a:t>Geef concrete suggesties.</a:t>
+            </a:r>
+          </a:p>
+          <a:p>
+            <a:pPr>
+              <a:lnSpc>
+                <a:spcPct val="150000"/>
+              </a:lnSpc>
+              <a:spcBef>
+                <a:spcPts val="600"/>
+              </a:spcBef>
+              <a:buFontTx/>
+              <a:buChar char="-"/>
+            </a:pPr>
+            <a:r>
+              <a:rPr lang="nl-NL" sz="1800" dirty="0"/>
+              <a:t>Vele wegen naar Rome; anders is niet fout.</a:t>
+            </a:r>
+          </a:p>
+          <a:p>
+            <a:pPr>
+              <a:lnSpc>
+                <a:spcPct val="150000"/>
+              </a:lnSpc>
+              <a:spcBef>
+                <a:spcPts val="600"/>
+              </a:spcBef>
+              <a:buFontTx/>
+              <a:buChar char="-"/>
+            </a:pPr>
+            <a:r>
+              <a:rPr lang="nl-NL" sz="1800" dirty="0"/>
+              <a:t>Vermijd ideologische discussies…</a:t>
+            </a:r>
+          </a:p>
+          <a:p>
+            <a:pPr>
+              <a:lnSpc>
+                <a:spcPct val="150000"/>
+              </a:lnSpc>
+              <a:spcBef>
+                <a:spcPts val="600"/>
+              </a:spcBef>
+              <a:buFontTx/>
+              <a:buChar char="-"/>
+            </a:pPr>
+            <a:r>
+              <a:rPr lang="nl-NL" sz="1800" dirty="0"/>
+              <a:t>Bellen is sneller.</a:t>
+            </a:r>
+          </a:p>
+          <a:p>
+            <a:pPr marL="0" indent="0">
+              <a:lnSpc>
+                <a:spcPct val="150000"/>
+              </a:lnSpc>
+              <a:spcBef>
+                <a:spcPts val="600"/>
+              </a:spcBef>
+              <a:buNone/>
+            </a:pPr>
+            <a:endParaRPr lang="nl-NL" sz="1800" dirty="0"/>
+          </a:p>
+          <a:p>
+            <a:pPr>
+              <a:lnSpc>
+                <a:spcPct val="150000"/>
+              </a:lnSpc>
+              <a:spcBef>
+                <a:spcPts val="600"/>
+              </a:spcBef>
+              <a:buFontTx/>
+              <a:buChar char="-"/>
+            </a:pPr>
+            <a:endParaRPr lang="nl-NL" sz="1800" dirty="0">
+              <a:latin typeface="Courier New" panose="02070309020205020404" pitchFamily="49" charset="0"/>
+              <a:cs typeface="Courier New" panose="02070309020205020404" pitchFamily="49" charset="0"/>
+            </a:endParaRPr>
+          </a:p>
+        </p:txBody>
+      </p:sp>
+    </p:spTree>
+    <p:extLst>
+      <p:ext uri="{BB962C8B-B14F-4D97-AF65-F5344CB8AC3E}">
+        <p14:creationId xmlns:p14="http://schemas.microsoft.com/office/powerpoint/2010/main" val="964547208"/>
+      </p:ext>
+    </p:extLst>
+  </p:cSld>
+  <p:clrMapOvr>
+    <a:masterClrMapping/>
+  </p:clrMapOvr>
+</p:sld>
+</file>
+
+<file path=ppt/slides/slide3.xml><?xml version="1.0" encoding="utf-8"?>
+<p:sld xmlns:a="http://schemas.openxmlformats.org/drawingml/2006/main" xmlns:r="http://schemas.openxmlformats.org/officeDocument/2006/relationships" xmlns:p="http://schemas.openxmlformats.org/presentationml/2006/main">
+  <p:cSld>
+    <p:spTree>
+      <p:nvGrpSpPr>
+        <p:cNvPr id="1" name="">
+          <a:extLst>
+            <a:ext uri="{FF2B5EF4-FFF2-40B4-BE49-F238E27FC236}">
+              <a16:creationId xmlns:a16="http://schemas.microsoft.com/office/drawing/2014/main" id="{53350AC3-44D2-125F-C901-74E8A6F61E54}"/>
+            </a:ext>
+          </a:extLst>
+        </p:cNvPr>
+        <p:cNvGrpSpPr/>
+        <p:nvPr/>
+      </p:nvGrpSpPr>
+      <p:grpSpPr>
+        <a:xfrm>
+          <a:off x="0" y="0"/>
+          <a:ext cx="0" cy="0"/>
+          <a:chOff x="0" y="0"/>
+          <a:chExt cx="0" cy="0"/>
+        </a:xfrm>
+      </p:grpSpPr>
+      <p:sp>
+        <p:nvSpPr>
+          <p:cNvPr id="4" name="Title 3">
+            <a:extLst>
+              <a:ext uri="{FF2B5EF4-FFF2-40B4-BE49-F238E27FC236}">
+                <a16:creationId xmlns:a16="http://schemas.microsoft.com/office/drawing/2014/main" id="{09C9436C-DC36-00A0-18E7-6B9DD57D93A7}"/>
+              </a:ext>
+            </a:extLst>
+          </p:cNvPr>
+          <p:cNvSpPr>
+            <a:spLocks noGrp="1"/>
+          </p:cNvSpPr>
+          <p:nvPr>
+            <p:ph type="title"/>
+          </p:nvPr>
+        </p:nvSpPr>
+        <p:spPr/>
+        <p:txBody>
+          <a:bodyPr/>
+          <a:lstStyle/>
+          <a:p>
+            <a:r>
+              <a:rPr lang="nl-NL" noProof="0" dirty="0"/>
+              <a:t>Code delen</a:t>
+            </a:r>
+          </a:p>
+        </p:txBody>
+      </p:sp>
+      <p:sp>
+        <p:nvSpPr>
+          <p:cNvPr id="5" name="Text Placeholder 4">
+            <a:extLst>
+              <a:ext uri="{FF2B5EF4-FFF2-40B4-BE49-F238E27FC236}">
+                <a16:creationId xmlns:a16="http://schemas.microsoft.com/office/drawing/2014/main" id="{DEB61E79-1961-C560-A7F0-B064C69A128C}"/>
+              </a:ext>
+            </a:extLst>
+          </p:cNvPr>
+          <p:cNvSpPr>
+            <a:spLocks noGrp="1"/>
+          </p:cNvSpPr>
+          <p:nvPr>
+            <p:ph type="body" idx="1"/>
+          </p:nvPr>
+        </p:nvSpPr>
+        <p:spPr/>
+        <p:txBody>
+          <a:bodyPr/>
+          <a:lstStyle/>
+          <a:p>
+            <a:endParaRPr lang="en-NL"/>
+          </a:p>
+        </p:txBody>
+      </p:sp>
+    </p:spTree>
+    <p:extLst>
+      <p:ext uri="{BB962C8B-B14F-4D97-AF65-F5344CB8AC3E}">
+        <p14:creationId xmlns:p14="http://schemas.microsoft.com/office/powerpoint/2010/main" val="3051769913"/>
+      </p:ext>
+    </p:extLst>
+  </p:cSld>
+  <p:clrMapOvr>
+    <a:masterClrMapping/>
+  </p:clrMapOvr>
+</p:sld>
+</file>
+
+<file path=ppt/slides/slide30.xml><?xml version="1.0" encoding="utf-8"?>
+<p:sld xmlns:a="http://schemas.openxmlformats.org/drawingml/2006/main" xmlns:r="http://schemas.openxmlformats.org/officeDocument/2006/relationships" xmlns:p="http://schemas.openxmlformats.org/presentationml/2006/main">
+  <p:cSld>
+    <p:spTree>
+      <p:nvGrpSpPr>
+        <p:cNvPr id="1" name="">
+          <a:extLst>
+            <a:ext uri="{FF2B5EF4-FFF2-40B4-BE49-F238E27FC236}">
               <a16:creationId xmlns:a16="http://schemas.microsoft.com/office/drawing/2014/main" id="{B7E6D042-0994-4885-880A-203BF606D71F}"/>
             </a:ext>
           </a:extLst>
@@ -18797,7 +20089,7 @@
 </p:sld>
 </file>
 
-<file path=ppt/slides/slide29.xml><?xml version="1.0" encoding="utf-8"?>
+<file path=ppt/slides/slide31.xml><?xml version="1.0" encoding="utf-8"?>
 <p:sld xmlns:a="http://schemas.openxmlformats.org/drawingml/2006/main" xmlns:r="http://schemas.openxmlformats.org/officeDocument/2006/relationships" xmlns:p="http://schemas.openxmlformats.org/presentationml/2006/main">
   <p:cSld>
     <p:spTree>
@@ -19961,96 +21253,7 @@
 </p:sld>
 </file>
 
-<file path=ppt/slides/slide3.xml><?xml version="1.0" encoding="utf-8"?>
-<p:sld xmlns:a="http://schemas.openxmlformats.org/drawingml/2006/main" xmlns:r="http://schemas.openxmlformats.org/officeDocument/2006/relationships" xmlns:p="http://schemas.openxmlformats.org/presentationml/2006/main">
-  <p:cSld>
-    <p:spTree>
-      <p:nvGrpSpPr>
-        <p:cNvPr id="1" name="">
-          <a:extLst>
-            <a:ext uri="{FF2B5EF4-FFF2-40B4-BE49-F238E27FC236}">
-              <a16:creationId xmlns:a16="http://schemas.microsoft.com/office/drawing/2014/main" id="{53350AC3-44D2-125F-C901-74E8A6F61E54}"/>
-            </a:ext>
-          </a:extLst>
-        </p:cNvPr>
-        <p:cNvGrpSpPr/>
-        <p:nvPr/>
-      </p:nvGrpSpPr>
-      <p:grpSpPr>
-        <a:xfrm>
-          <a:off x="0" y="0"/>
-          <a:ext cx="0" cy="0"/>
-          <a:chOff x="0" y="0"/>
-          <a:chExt cx="0" cy="0"/>
-        </a:xfrm>
-      </p:grpSpPr>
-      <p:sp>
-        <p:nvSpPr>
-          <p:cNvPr id="4" name="Title 3">
-            <a:extLst>
-              <a:ext uri="{FF2B5EF4-FFF2-40B4-BE49-F238E27FC236}">
-                <a16:creationId xmlns:a16="http://schemas.microsoft.com/office/drawing/2014/main" id="{09C9436C-DC36-00A0-18E7-6B9DD57D93A7}"/>
-              </a:ext>
-            </a:extLst>
-          </p:cNvPr>
-          <p:cNvSpPr>
-            <a:spLocks noGrp="1"/>
-          </p:cNvSpPr>
-          <p:nvPr>
-            <p:ph type="title"/>
-          </p:nvPr>
-        </p:nvSpPr>
-        <p:spPr/>
-        <p:txBody>
-          <a:bodyPr/>
-          <a:lstStyle/>
-          <a:p>
-            <a:r>
-              <a:rPr lang="nl-NL" noProof="0" dirty="0"/>
-              <a:t>Code delen</a:t>
-            </a:r>
-          </a:p>
-        </p:txBody>
-      </p:sp>
-      <p:sp>
-        <p:nvSpPr>
-          <p:cNvPr id="5" name="Text Placeholder 4">
-            <a:extLst>
-              <a:ext uri="{FF2B5EF4-FFF2-40B4-BE49-F238E27FC236}">
-                <a16:creationId xmlns:a16="http://schemas.microsoft.com/office/drawing/2014/main" id="{DEB61E79-1961-C560-A7F0-B064C69A128C}"/>
-              </a:ext>
-            </a:extLst>
-          </p:cNvPr>
-          <p:cNvSpPr>
-            <a:spLocks noGrp="1"/>
-          </p:cNvSpPr>
-          <p:nvPr>
-            <p:ph type="body" idx="1"/>
-          </p:nvPr>
-        </p:nvSpPr>
-        <p:spPr/>
-        <p:txBody>
-          <a:bodyPr/>
-          <a:lstStyle/>
-          <a:p>
-            <a:endParaRPr lang="en-NL"/>
-          </a:p>
-        </p:txBody>
-      </p:sp>
-    </p:spTree>
-    <p:extLst>
-      <p:ext uri="{BB962C8B-B14F-4D97-AF65-F5344CB8AC3E}">
-        <p14:creationId xmlns:p14="http://schemas.microsoft.com/office/powerpoint/2010/main" val="3051769913"/>
-      </p:ext>
-    </p:extLst>
-  </p:cSld>
-  <p:clrMapOvr>
-    <a:masterClrMapping/>
-  </p:clrMapOvr>
-</p:sld>
-</file>
-
-<file path=ppt/slides/slide30.xml><?xml version="1.0" encoding="utf-8"?>
+<file path=ppt/slides/slide32.xml><?xml version="1.0" encoding="utf-8"?>
 <p:sld xmlns:a="http://schemas.openxmlformats.org/drawingml/2006/main" xmlns:r="http://schemas.openxmlformats.org/officeDocument/2006/relationships" xmlns:p="http://schemas.openxmlformats.org/presentationml/2006/main">
   <p:cSld>
     <p:spTree>
@@ -20578,7 +21781,7 @@
 </p:sld>
 </file>
 
-<file path=ppt/slides/slide31.xml><?xml version="1.0" encoding="utf-8"?>
+<file path=ppt/slides/slide33.xml><?xml version="1.0" encoding="utf-8"?>
 <p:sld xmlns:a="http://schemas.openxmlformats.org/drawingml/2006/main" xmlns:r="http://schemas.openxmlformats.org/officeDocument/2006/relationships" xmlns:p="http://schemas.openxmlformats.org/presentationml/2006/main">
   <p:cSld>
     <p:spTree>
@@ -21051,7 +22254,7 @@
 </p:sld>
 </file>
 
-<file path=ppt/slides/slide32.xml><?xml version="1.0" encoding="utf-8"?>
+<file path=ppt/slides/slide34.xml><?xml version="1.0" encoding="utf-8"?>
 <p:sld xmlns:a="http://schemas.openxmlformats.org/drawingml/2006/main" xmlns:r="http://schemas.openxmlformats.org/officeDocument/2006/relationships" xmlns:p="http://schemas.openxmlformats.org/presentationml/2006/main">
   <p:cSld>
     <p:spTree>
@@ -21423,7 +22626,7 @@
 </p:sld>
 </file>
 
-<file path=ppt/slides/slide33.xml><?xml version="1.0" encoding="utf-8"?>
+<file path=ppt/slides/slide35.xml><?xml version="1.0" encoding="utf-8"?>
 <p:sld xmlns:a="http://schemas.openxmlformats.org/drawingml/2006/main" xmlns:r="http://schemas.openxmlformats.org/officeDocument/2006/relationships" xmlns:p="http://schemas.openxmlformats.org/presentationml/2006/main">
   <p:cSld>
     <p:spTree>
@@ -21747,7 +22950,7 @@
 </p:sld>
 </file>
 
-<file path=ppt/slides/slide34.xml><?xml version="1.0" encoding="utf-8"?>
+<file path=ppt/slides/slide36.xml><?xml version="1.0" encoding="utf-8"?>
 <p:sld xmlns:a="http://schemas.openxmlformats.org/drawingml/2006/main" xmlns:r="http://schemas.openxmlformats.org/officeDocument/2006/relationships" xmlns:p="http://schemas.openxmlformats.org/presentationml/2006/main">
   <p:cSld>
     <p:spTree>
@@ -21836,7 +23039,7 @@
 </p:sld>
 </file>
 
-<file path=ppt/slides/slide35.xml><?xml version="1.0" encoding="utf-8"?>
+<file path=ppt/slides/slide37.xml><?xml version="1.0" encoding="utf-8"?>
 <p:sld xmlns:a="http://schemas.openxmlformats.org/drawingml/2006/main" xmlns:r="http://schemas.openxmlformats.org/officeDocument/2006/relationships" xmlns:p="http://schemas.openxmlformats.org/presentationml/2006/main">
   <p:cSld>
     <p:spTree>
@@ -22234,7 +23437,7 @@
               <a:rPr lang="nl-NL" sz="1800" dirty="0" err="1">
                 <a:cs typeface="Courier New" panose="02070309020205020404" pitchFamily="49" charset="0"/>
               </a:rPr>
-              <a:t>Requests</a:t>
+              <a:t>Request</a:t>
             </a:r>
             <a:r>
               <a:rPr lang="nl-NL" sz="1800" dirty="0">
@@ -22279,7 +23482,7 @@
               <a:rPr lang="nl-NL" sz="1800" dirty="0" err="1">
                 <a:cs typeface="Courier New" panose="02070309020205020404" pitchFamily="49" charset="0"/>
               </a:rPr>
-              <a:t>Requests</a:t>
+              <a:t>Request</a:t>
             </a:r>
             <a:r>
               <a:rPr lang="nl-NL" sz="1800" dirty="0">
@@ -22344,7 +23547,7 @@
 </p:sld>
 </file>
 
-<file path=ppt/slides/slide36.xml><?xml version="1.0" encoding="utf-8"?>
+<file path=ppt/slides/slide38.xml><?xml version="1.0" encoding="utf-8"?>
 <p:sld xmlns:a="http://schemas.openxmlformats.org/drawingml/2006/main" xmlns:r="http://schemas.openxmlformats.org/officeDocument/2006/relationships" xmlns:p="http://schemas.openxmlformats.org/presentationml/2006/main">
   <p:cSld>
     <p:spTree>
@@ -22952,7 +24155,7 @@
 </p:sld>
 </file>
 
-<file path=ppt/slides/slide37.xml><?xml version="1.0" encoding="utf-8"?>
+<file path=ppt/slides/slide39.xml><?xml version="1.0" encoding="utf-8"?>
 <p:sld xmlns:a="http://schemas.openxmlformats.org/drawingml/2006/main" xmlns:r="http://schemas.openxmlformats.org/officeDocument/2006/relationships" xmlns:p="http://schemas.openxmlformats.org/presentationml/2006/main">
   <p:cSld>
     <p:spTree>
@@ -23289,619 +24492,46 @@
           </a:p>
         </p:txBody>
       </p:sp>
-    </p:spTree>
-    <p:extLst>
-      <p:ext uri="{BB962C8B-B14F-4D97-AF65-F5344CB8AC3E}">
-        <p14:creationId xmlns:p14="http://schemas.microsoft.com/office/powerpoint/2010/main" val="2721885745"/>
-      </p:ext>
-    </p:extLst>
-  </p:cSld>
-  <p:clrMapOvr>
-    <a:masterClrMapping/>
-  </p:clrMapOvr>
-</p:sld>
-</file>
-
-<file path=ppt/slides/slide38.xml><?xml version="1.0" encoding="utf-8"?>
-<p:sld xmlns:a="http://schemas.openxmlformats.org/drawingml/2006/main" xmlns:r="http://schemas.openxmlformats.org/officeDocument/2006/relationships" xmlns:p="http://schemas.openxmlformats.org/presentationml/2006/main">
-  <p:cSld>
-    <p:spTree>
-      <p:nvGrpSpPr>
-        <p:cNvPr id="1" name="">
-          <a:extLst>
-            <a:ext uri="{FF2B5EF4-FFF2-40B4-BE49-F238E27FC236}">
-              <a16:creationId xmlns:a16="http://schemas.microsoft.com/office/drawing/2014/main" id="{4BB40A45-57D6-4B57-6CF6-DFE11F1E9D3D}"/>
-            </a:ext>
-          </a:extLst>
-        </p:cNvPr>
-        <p:cNvGrpSpPr/>
-        <p:nvPr/>
-      </p:nvGrpSpPr>
-      <p:grpSpPr>
-        <a:xfrm>
-          <a:off x="0" y="0"/>
-          <a:ext cx="0" cy="0"/>
-          <a:chOff x="0" y="0"/>
-          <a:chExt cx="0" cy="0"/>
-        </a:xfrm>
-      </p:grpSpPr>
       <p:sp>
         <p:nvSpPr>
-          <p:cNvPr id="4" name="Title 3">
-            <a:extLst>
-              <a:ext uri="{FF2B5EF4-FFF2-40B4-BE49-F238E27FC236}">
-                <a16:creationId xmlns:a16="http://schemas.microsoft.com/office/drawing/2014/main" id="{6B579399-68A7-C464-3780-544D50771FAD}"/>
-              </a:ext>
-            </a:extLst>
-          </p:cNvPr>
-          <p:cNvSpPr>
-            <a:spLocks noGrp="1"/>
-          </p:cNvSpPr>
-          <p:nvPr>
-            <p:ph type="title"/>
-          </p:nvPr>
+          <p:cNvPr id="3" name="TextBox 2">
+            <a:extLst>
+              <a:ext uri="{FF2B5EF4-FFF2-40B4-BE49-F238E27FC236}">
+                <a16:creationId xmlns:a16="http://schemas.microsoft.com/office/drawing/2014/main" id="{B471F34A-2C3B-06E4-B0B7-78326E0E8876}"/>
+              </a:ext>
+            </a:extLst>
+          </p:cNvPr>
+          <p:cNvSpPr txBox="1"/>
+          <p:nvPr/>
         </p:nvSpPr>
-        <p:spPr/>
+        <p:spPr>
+          <a:xfrm>
+            <a:off x="9619967" y="6471982"/>
+            <a:ext cx="2499246" cy="307777"/>
+          </a:xfrm>
+          <a:prstGeom prst="rect">
+            <a:avLst/>
+          </a:prstGeom>
+          <a:noFill/>
+        </p:spPr>
         <p:txBody>
-          <a:bodyPr/>
+          <a:bodyPr wrap="square">
+            <a:spAutoFit/>
+          </a:bodyPr>
           <a:lstStyle/>
           <a:p>
-            <a:r>
-              <a:rPr lang="nl-NL" noProof="0" dirty="0"/>
-              <a:t>Taken beheren</a:t>
-            </a:r>
-          </a:p>
-        </p:txBody>
-      </p:sp>
-      <p:sp>
-        <p:nvSpPr>
-          <p:cNvPr id="5" name="Text Placeholder 4">
-            <a:extLst>
-              <a:ext uri="{FF2B5EF4-FFF2-40B4-BE49-F238E27FC236}">
-                <a16:creationId xmlns:a16="http://schemas.microsoft.com/office/drawing/2014/main" id="{1AA7F936-2C11-9266-C225-9E47933CBFE1}"/>
-              </a:ext>
-            </a:extLst>
-          </p:cNvPr>
-          <p:cNvSpPr>
-            <a:spLocks noGrp="1"/>
-          </p:cNvSpPr>
-          <p:nvPr>
-            <p:ph type="body" idx="1"/>
-          </p:nvPr>
-        </p:nvSpPr>
-        <p:spPr/>
-        <p:txBody>
-          <a:bodyPr/>
-          <a:lstStyle/>
-          <a:p>
-            <a:endParaRPr lang="en-NL"/>
+            <a:pPr algn="r"/>
+            <a:r>
+              <a:rPr lang="en-US" sz="1400" dirty="0"/>
+              <a:t>D: create ruleset.</a:t>
+            </a:r>
           </a:p>
         </p:txBody>
       </p:sp>
     </p:spTree>
     <p:extLst>
       <p:ext uri="{BB962C8B-B14F-4D97-AF65-F5344CB8AC3E}">
-        <p14:creationId xmlns:p14="http://schemas.microsoft.com/office/powerpoint/2010/main" val="1306930845"/>
-      </p:ext>
-    </p:extLst>
-  </p:cSld>
-  <p:clrMapOvr>
-    <a:masterClrMapping/>
-  </p:clrMapOvr>
-</p:sld>
-</file>
-
-<file path=ppt/slides/slide39.xml><?xml version="1.0" encoding="utf-8"?>
-<p:sld xmlns:a="http://schemas.openxmlformats.org/drawingml/2006/main" xmlns:r="http://schemas.openxmlformats.org/officeDocument/2006/relationships" xmlns:p="http://schemas.openxmlformats.org/presentationml/2006/main">
-  <p:cSld>
-    <p:spTree>
-      <p:nvGrpSpPr>
-        <p:cNvPr id="1" name="">
-          <a:extLst>
-            <a:ext uri="{FF2B5EF4-FFF2-40B4-BE49-F238E27FC236}">
-              <a16:creationId xmlns:a16="http://schemas.microsoft.com/office/drawing/2014/main" id="{BDFEA8A2-09C3-6C8E-58C3-68AE93B47193}"/>
-            </a:ext>
-          </a:extLst>
-        </p:cNvPr>
-        <p:cNvGrpSpPr/>
-        <p:nvPr/>
-      </p:nvGrpSpPr>
-      <p:grpSpPr>
-        <a:xfrm>
-          <a:off x="0" y="0"/>
-          <a:ext cx="0" cy="0"/>
-          <a:chOff x="0" y="0"/>
-          <a:chExt cx="0" cy="0"/>
-        </a:xfrm>
-      </p:grpSpPr>
-      <p:sp>
-        <p:nvSpPr>
-          <p:cNvPr id="2" name="Title 1">
-            <a:extLst>
-              <a:ext uri="{FF2B5EF4-FFF2-40B4-BE49-F238E27FC236}">
-                <a16:creationId xmlns:a16="http://schemas.microsoft.com/office/drawing/2014/main" id="{93B18F6F-5175-8AA3-408E-E13768652827}"/>
-              </a:ext>
-            </a:extLst>
-          </p:cNvPr>
-          <p:cNvSpPr>
-            <a:spLocks noGrp="1"/>
-          </p:cNvSpPr>
-          <p:nvPr>
-            <p:ph type="title"/>
-          </p:nvPr>
-        </p:nvSpPr>
-        <p:spPr>
-          <a:xfrm>
-            <a:off x="838200" y="365126"/>
-            <a:ext cx="10515600" cy="718608"/>
-          </a:xfrm>
-        </p:spPr>
-        <p:txBody>
-          <a:bodyPr>
-            <a:normAutofit/>
-          </a:bodyPr>
-          <a:lstStyle/>
-          <a:p>
-            <a:r>
-              <a:rPr lang="nl-NL" sz="3600" noProof="0" dirty="0"/>
-              <a:t>Taken aanmaken</a:t>
-            </a:r>
-          </a:p>
-        </p:txBody>
-      </p:sp>
-      <p:sp>
-        <p:nvSpPr>
-          <p:cNvPr id="15" name="Content Placeholder 2">
-            <a:extLst>
-              <a:ext uri="{FF2B5EF4-FFF2-40B4-BE49-F238E27FC236}">
-                <a16:creationId xmlns:a16="http://schemas.microsoft.com/office/drawing/2014/main" id="{4DCBF055-7428-2021-44E2-CCD550754DA2}"/>
-              </a:ext>
-            </a:extLst>
-          </p:cNvPr>
-          <p:cNvSpPr txBox="1">
-            <a:spLocks/>
-          </p:cNvSpPr>
-          <p:nvPr/>
-        </p:nvSpPr>
-        <p:spPr>
-          <a:xfrm>
-            <a:off x="838199" y="1456267"/>
-            <a:ext cx="3312319" cy="4720696"/>
-          </a:xfrm>
-          <a:prstGeom prst="rect">
-            <a:avLst/>
-          </a:prstGeom>
-        </p:spPr>
-        <p:txBody>
-          <a:bodyPr vert="horz" lIns="91440" tIns="45720" rIns="91440" bIns="45720" rtlCol="0">
-            <a:noAutofit/>
-          </a:bodyPr>
-          <a:lstStyle>
-            <a:lvl1pPr marL="228600" indent="-228600" algn="l" defTabSz="914400" rtl="0" eaLnBrk="1" latinLnBrk="0" hangingPunct="1">
-              <a:lnSpc>
-                <a:spcPct val="90000"/>
-              </a:lnSpc>
-              <a:spcBef>
-                <a:spcPts val="1000"/>
-              </a:spcBef>
-              <a:buFont typeface="Arial" panose="020B0604020202020204" pitchFamily="34" charset="0"/>
-              <a:buChar char="•"/>
-              <a:defRPr sz="2800" kern="1200">
-                <a:solidFill>
-                  <a:schemeClr val="tx1"/>
-                </a:solidFill>
-                <a:latin typeface="+mn-lt"/>
-                <a:ea typeface="+mn-ea"/>
-                <a:cs typeface="+mn-cs"/>
-              </a:defRPr>
-            </a:lvl1pPr>
-            <a:lvl2pPr marL="685800" indent="-228600" algn="l" defTabSz="914400" rtl="0" eaLnBrk="1" latinLnBrk="0" hangingPunct="1">
-              <a:lnSpc>
-                <a:spcPct val="90000"/>
-              </a:lnSpc>
-              <a:spcBef>
-                <a:spcPts val="500"/>
-              </a:spcBef>
-              <a:buFont typeface="Arial" panose="020B0604020202020204" pitchFamily="34" charset="0"/>
-              <a:buChar char="•"/>
-              <a:defRPr sz="2400" kern="1200">
-                <a:solidFill>
-                  <a:schemeClr val="tx1"/>
-                </a:solidFill>
-                <a:latin typeface="+mn-lt"/>
-                <a:ea typeface="+mn-ea"/>
-                <a:cs typeface="+mn-cs"/>
-              </a:defRPr>
-            </a:lvl2pPr>
-            <a:lvl3pPr marL="1143000" indent="-228600" algn="l" defTabSz="914400" rtl="0" eaLnBrk="1" latinLnBrk="0" hangingPunct="1">
-              <a:lnSpc>
-                <a:spcPct val="90000"/>
-              </a:lnSpc>
-              <a:spcBef>
-                <a:spcPts val="500"/>
-              </a:spcBef>
-              <a:buFont typeface="Arial" panose="020B0604020202020204" pitchFamily="34" charset="0"/>
-              <a:buChar char="•"/>
-              <a:defRPr sz="2000" kern="1200">
-                <a:solidFill>
-                  <a:schemeClr val="tx1"/>
-                </a:solidFill>
-                <a:latin typeface="+mn-lt"/>
-                <a:ea typeface="+mn-ea"/>
-                <a:cs typeface="+mn-cs"/>
-              </a:defRPr>
-            </a:lvl3pPr>
-            <a:lvl4pPr marL="1600200" indent="-228600" algn="l" defTabSz="914400" rtl="0" eaLnBrk="1" latinLnBrk="0" hangingPunct="1">
-              <a:lnSpc>
-                <a:spcPct val="90000"/>
-              </a:lnSpc>
-              <a:spcBef>
-                <a:spcPts val="500"/>
-              </a:spcBef>
-              <a:buFont typeface="Arial" panose="020B0604020202020204" pitchFamily="34" charset="0"/>
-              <a:buChar char="•"/>
-              <a:defRPr sz="1800" kern="1200">
-                <a:solidFill>
-                  <a:schemeClr val="tx1"/>
-                </a:solidFill>
-                <a:latin typeface="+mn-lt"/>
-                <a:ea typeface="+mn-ea"/>
-                <a:cs typeface="+mn-cs"/>
-              </a:defRPr>
-            </a:lvl4pPr>
-            <a:lvl5pPr marL="2057400" indent="-228600" algn="l" defTabSz="914400" rtl="0" eaLnBrk="1" latinLnBrk="0" hangingPunct="1">
-              <a:lnSpc>
-                <a:spcPct val="90000"/>
-              </a:lnSpc>
-              <a:spcBef>
-                <a:spcPts val="500"/>
-              </a:spcBef>
-              <a:buFont typeface="Arial" panose="020B0604020202020204" pitchFamily="34" charset="0"/>
-              <a:buChar char="•"/>
-              <a:defRPr sz="1800" kern="1200">
-                <a:solidFill>
-                  <a:schemeClr val="tx1"/>
-                </a:solidFill>
-                <a:latin typeface="+mn-lt"/>
-                <a:ea typeface="+mn-ea"/>
-                <a:cs typeface="+mn-cs"/>
-              </a:defRPr>
-            </a:lvl5pPr>
-            <a:lvl6pPr marL="2514600" indent="-228600" algn="l" defTabSz="914400" rtl="0" eaLnBrk="1" latinLnBrk="0" hangingPunct="1">
-              <a:lnSpc>
-                <a:spcPct val="90000"/>
-              </a:lnSpc>
-              <a:spcBef>
-                <a:spcPts val="500"/>
-              </a:spcBef>
-              <a:buFont typeface="Arial" panose="020B0604020202020204" pitchFamily="34" charset="0"/>
-              <a:buChar char="•"/>
-              <a:defRPr sz="1800" kern="1200">
-                <a:solidFill>
-                  <a:schemeClr val="tx1"/>
-                </a:solidFill>
-                <a:latin typeface="+mn-lt"/>
-                <a:ea typeface="+mn-ea"/>
-                <a:cs typeface="+mn-cs"/>
-              </a:defRPr>
-            </a:lvl6pPr>
-            <a:lvl7pPr marL="2971800" indent="-228600" algn="l" defTabSz="914400" rtl="0" eaLnBrk="1" latinLnBrk="0" hangingPunct="1">
-              <a:lnSpc>
-                <a:spcPct val="90000"/>
-              </a:lnSpc>
-              <a:spcBef>
-                <a:spcPts val="500"/>
-              </a:spcBef>
-              <a:buFont typeface="Arial" panose="020B0604020202020204" pitchFamily="34" charset="0"/>
-              <a:buChar char="•"/>
-              <a:defRPr sz="1800" kern="1200">
-                <a:solidFill>
-                  <a:schemeClr val="tx1"/>
-                </a:solidFill>
-                <a:latin typeface="+mn-lt"/>
-                <a:ea typeface="+mn-ea"/>
-                <a:cs typeface="+mn-cs"/>
-              </a:defRPr>
-            </a:lvl7pPr>
-            <a:lvl8pPr marL="3429000" indent="-228600" algn="l" defTabSz="914400" rtl="0" eaLnBrk="1" latinLnBrk="0" hangingPunct="1">
-              <a:lnSpc>
-                <a:spcPct val="90000"/>
-              </a:lnSpc>
-              <a:spcBef>
-                <a:spcPts val="500"/>
-              </a:spcBef>
-              <a:buFont typeface="Arial" panose="020B0604020202020204" pitchFamily="34" charset="0"/>
-              <a:buChar char="•"/>
-              <a:defRPr sz="1800" kern="1200">
-                <a:solidFill>
-                  <a:schemeClr val="tx1"/>
-                </a:solidFill>
-                <a:latin typeface="+mn-lt"/>
-                <a:ea typeface="+mn-ea"/>
-                <a:cs typeface="+mn-cs"/>
-              </a:defRPr>
-            </a:lvl8pPr>
-            <a:lvl9pPr marL="3886200" indent="-228600" algn="l" defTabSz="914400" rtl="0" eaLnBrk="1" latinLnBrk="0" hangingPunct="1">
-              <a:lnSpc>
-                <a:spcPct val="90000"/>
-              </a:lnSpc>
-              <a:spcBef>
-                <a:spcPts val="500"/>
-              </a:spcBef>
-              <a:buFont typeface="Arial" panose="020B0604020202020204" pitchFamily="34" charset="0"/>
-              <a:buChar char="•"/>
-              <a:defRPr sz="1800" kern="1200">
-                <a:solidFill>
-                  <a:schemeClr val="tx1"/>
-                </a:solidFill>
-                <a:latin typeface="+mn-lt"/>
-                <a:ea typeface="+mn-ea"/>
-                <a:cs typeface="+mn-cs"/>
-              </a:defRPr>
-            </a:lvl9pPr>
-          </a:lstStyle>
-          <a:p>
-            <a:pPr marL="0" indent="0">
-              <a:lnSpc>
-                <a:spcPct val="100000"/>
-              </a:lnSpc>
-              <a:spcBef>
-                <a:spcPts val="600"/>
-              </a:spcBef>
-              <a:buFont typeface="Arial" panose="020B0604020202020204" pitchFamily="34" charset="0"/>
-              <a:buNone/>
-            </a:pPr>
-            <a:r>
-              <a:rPr lang="nl-NL" sz="1400" b="1" dirty="0"/>
-              <a:t>Wat is een issue?</a:t>
-            </a:r>
-          </a:p>
-          <a:p>
-            <a:pPr marL="0" indent="0">
-              <a:lnSpc>
-                <a:spcPct val="100000"/>
-              </a:lnSpc>
-              <a:spcBef>
-                <a:spcPts val="600"/>
-              </a:spcBef>
-              <a:buFont typeface="Arial" panose="020B0604020202020204" pitchFamily="34" charset="0"/>
-              <a:buNone/>
-            </a:pPr>
-            <a:r>
-              <a:rPr lang="nl-NL" sz="1400" dirty="0"/>
-              <a:t>Een taak / concreet stukje werk:</a:t>
-            </a:r>
-          </a:p>
-          <a:p>
-            <a:pPr>
-              <a:lnSpc>
-                <a:spcPct val="100000"/>
-              </a:lnSpc>
-              <a:spcBef>
-                <a:spcPts val="600"/>
-              </a:spcBef>
-              <a:buFontTx/>
-              <a:buChar char="-"/>
-            </a:pPr>
-            <a:r>
-              <a:rPr lang="nl-NL" sz="1400" dirty="0"/>
-              <a:t>nieuwe feature.</a:t>
-            </a:r>
-          </a:p>
-          <a:p>
-            <a:pPr>
-              <a:lnSpc>
-                <a:spcPct val="100000"/>
-              </a:lnSpc>
-              <a:spcBef>
-                <a:spcPts val="600"/>
-              </a:spcBef>
-              <a:buFontTx/>
-              <a:buChar char="-"/>
-            </a:pPr>
-            <a:r>
-              <a:rPr lang="nl-NL" sz="1400" dirty="0" err="1"/>
-              <a:t>bugfix</a:t>
-            </a:r>
-            <a:r>
-              <a:rPr lang="nl-NL" sz="1400" dirty="0"/>
-              <a:t>.</a:t>
-            </a:r>
-          </a:p>
-          <a:p>
-            <a:pPr>
-              <a:lnSpc>
-                <a:spcPct val="100000"/>
-              </a:lnSpc>
-              <a:spcBef>
-                <a:spcPts val="600"/>
-              </a:spcBef>
-              <a:buFontTx/>
-              <a:buChar char="-"/>
-            </a:pPr>
-            <a:r>
-              <a:rPr lang="nl-NL" sz="1400" dirty="0"/>
-              <a:t>documentatie.</a:t>
-            </a:r>
-          </a:p>
-          <a:p>
-            <a:pPr marL="0" indent="0">
-              <a:lnSpc>
-                <a:spcPct val="100000"/>
-              </a:lnSpc>
-              <a:spcBef>
-                <a:spcPts val="600"/>
-              </a:spcBef>
-              <a:buFont typeface="Arial" panose="020B0604020202020204" pitchFamily="34" charset="0"/>
-              <a:buNone/>
-            </a:pPr>
-            <a:endParaRPr lang="nl-NL" sz="1400" b="1" dirty="0"/>
-          </a:p>
-          <a:p>
-            <a:pPr marL="0" indent="0">
-              <a:lnSpc>
-                <a:spcPct val="100000"/>
-              </a:lnSpc>
-              <a:spcBef>
-                <a:spcPts val="600"/>
-              </a:spcBef>
-              <a:buFont typeface="Arial" panose="020B0604020202020204" pitchFamily="34" charset="0"/>
-              <a:buNone/>
-            </a:pPr>
-            <a:r>
-              <a:rPr lang="nl-NL" sz="1400" b="1" dirty="0"/>
-              <a:t>Belangrijke elementen:</a:t>
-            </a:r>
-          </a:p>
-          <a:p>
-            <a:pPr>
-              <a:lnSpc>
-                <a:spcPct val="100000"/>
-              </a:lnSpc>
-              <a:spcBef>
-                <a:spcPts val="600"/>
-              </a:spcBef>
-              <a:buFontTx/>
-              <a:buChar char="-"/>
-            </a:pPr>
-            <a:r>
-              <a:rPr lang="nl-NL" sz="1400" dirty="0"/>
-              <a:t>Duidelijke titel en omschrijving.</a:t>
-            </a:r>
-          </a:p>
-          <a:p>
-            <a:pPr>
-              <a:lnSpc>
-                <a:spcPct val="100000"/>
-              </a:lnSpc>
-              <a:spcBef>
-                <a:spcPts val="600"/>
-              </a:spcBef>
-              <a:buFontTx/>
-              <a:buChar char="-"/>
-            </a:pPr>
-            <a:r>
-              <a:rPr lang="nl-NL" sz="1400" dirty="0"/>
-              <a:t>Wie gaat het oppakken.</a:t>
-            </a:r>
-          </a:p>
-          <a:p>
-            <a:pPr>
-              <a:lnSpc>
-                <a:spcPct val="100000"/>
-              </a:lnSpc>
-              <a:spcBef>
-                <a:spcPts val="600"/>
-              </a:spcBef>
-              <a:buFontTx/>
-              <a:buChar char="-"/>
-            </a:pPr>
-            <a:r>
-              <a:rPr lang="nl-NL" sz="1400" dirty="0"/>
-              <a:t>Labels voor type werk.</a:t>
-            </a:r>
-          </a:p>
-          <a:p>
-            <a:pPr>
-              <a:lnSpc>
-                <a:spcPct val="100000"/>
-              </a:lnSpc>
-              <a:spcBef>
-                <a:spcPts val="600"/>
-              </a:spcBef>
-              <a:buFontTx/>
-              <a:buChar char="-"/>
-            </a:pPr>
-            <a:r>
-              <a:rPr lang="nl-NL" sz="1400" dirty="0"/>
-              <a:t>Wanneer is het af?</a:t>
-            </a:r>
-          </a:p>
-          <a:p>
-            <a:pPr marL="0" indent="0">
-              <a:lnSpc>
-                <a:spcPct val="100000"/>
-              </a:lnSpc>
-              <a:spcBef>
-                <a:spcPts val="600"/>
-              </a:spcBef>
-              <a:buFont typeface="Arial" panose="020B0604020202020204" pitchFamily="34" charset="0"/>
-              <a:buNone/>
-            </a:pPr>
-            <a:endParaRPr lang="nl-NL" sz="1400" b="1" dirty="0"/>
-          </a:p>
-          <a:p>
-            <a:pPr marL="0" indent="0">
-              <a:lnSpc>
-                <a:spcPct val="100000"/>
-              </a:lnSpc>
-              <a:spcBef>
-                <a:spcPts val="600"/>
-              </a:spcBef>
-              <a:buNone/>
-            </a:pPr>
-            <a:endParaRPr lang="nl-NL" sz="1400" dirty="0"/>
-          </a:p>
-          <a:p>
-            <a:pPr marL="0" indent="0">
-              <a:lnSpc>
-                <a:spcPct val="100000"/>
-              </a:lnSpc>
-              <a:spcBef>
-                <a:spcPts val="600"/>
-              </a:spcBef>
-              <a:buFont typeface="Arial" panose="020B0604020202020204" pitchFamily="34" charset="0"/>
-              <a:buNone/>
-            </a:pPr>
-            <a:endParaRPr lang="nl-NL" sz="1400" dirty="0"/>
-          </a:p>
-        </p:txBody>
-      </p:sp>
-      <p:pic>
-        <p:nvPicPr>
-          <p:cNvPr id="4" name="Picture 3" descr="A screenshot of a computer&#10;&#10;Description automatically generated">
-            <a:extLst>
-              <a:ext uri="{FF2B5EF4-FFF2-40B4-BE49-F238E27FC236}">
-                <a16:creationId xmlns:a16="http://schemas.microsoft.com/office/drawing/2014/main" id="{336BBA03-D9DD-D985-58E3-1D280C65BF79}"/>
-              </a:ext>
-            </a:extLst>
-          </p:cNvPr>
-          <p:cNvPicPr>
-            <a:picLocks noChangeAspect="1"/>
-          </p:cNvPicPr>
-          <p:nvPr/>
-        </p:nvPicPr>
-        <p:blipFill>
-          <a:blip r:embed="rId3">
-            <a:extLst>
-              <a:ext uri="{28A0092B-C50C-407E-A947-70E740481C1C}">
-                <a14:useLocalDpi xmlns:a14="http://schemas.microsoft.com/office/drawing/2010/main" val="0"/>
-              </a:ext>
-            </a:extLst>
-          </a:blip>
-          <a:stretch>
-            <a:fillRect/>
-          </a:stretch>
-        </p:blipFill>
-        <p:spPr>
-          <a:xfrm>
-            <a:off x="4488300" y="1456267"/>
-            <a:ext cx="6865500" cy="3003656"/>
-          </a:xfrm>
-          <a:prstGeom prst="rect">
-            <a:avLst/>
-          </a:prstGeom>
-          <a:ln>
-            <a:solidFill>
-              <a:schemeClr val="tx1"/>
-            </a:solidFill>
-          </a:ln>
-        </p:spPr>
-      </p:pic>
-    </p:spTree>
-    <p:extLst>
-      <p:ext uri="{BB962C8B-B14F-4D97-AF65-F5344CB8AC3E}">
-        <p14:creationId xmlns:p14="http://schemas.microsoft.com/office/powerpoint/2010/main" val="1181346886"/>
+        <p14:creationId xmlns:p14="http://schemas.microsoft.com/office/powerpoint/2010/main" val="2721885745"/>
       </p:ext>
     </p:extLst>
   </p:cSld>
@@ -24488,14 +25118,103 @@
 </file>
 
 <file path=ppt/slides/slide40.xml><?xml version="1.0" encoding="utf-8"?>
-<p:sld xmlns:a="http://schemas.openxmlformats.org/drawingml/2006/main" xmlns:r="http://schemas.openxmlformats.org/officeDocument/2006/relationships" xmlns:p="http://schemas.openxmlformats.org/presentationml/2006/main" show="0">
+<p:sld xmlns:a="http://schemas.openxmlformats.org/drawingml/2006/main" xmlns:r="http://schemas.openxmlformats.org/officeDocument/2006/relationships" xmlns:p="http://schemas.openxmlformats.org/presentationml/2006/main">
   <p:cSld>
     <p:spTree>
       <p:nvGrpSpPr>
         <p:cNvPr id="1" name="">
           <a:extLst>
             <a:ext uri="{FF2B5EF4-FFF2-40B4-BE49-F238E27FC236}">
-              <a16:creationId xmlns:a16="http://schemas.microsoft.com/office/drawing/2014/main" id="{81E6E7BF-D0E7-8CC9-A652-5EFD5B67776B}"/>
+              <a16:creationId xmlns:a16="http://schemas.microsoft.com/office/drawing/2014/main" id="{4BB40A45-57D6-4B57-6CF6-DFE11F1E9D3D}"/>
+            </a:ext>
+          </a:extLst>
+        </p:cNvPr>
+        <p:cNvGrpSpPr/>
+        <p:nvPr/>
+      </p:nvGrpSpPr>
+      <p:grpSpPr>
+        <a:xfrm>
+          <a:off x="0" y="0"/>
+          <a:ext cx="0" cy="0"/>
+          <a:chOff x="0" y="0"/>
+          <a:chExt cx="0" cy="0"/>
+        </a:xfrm>
+      </p:grpSpPr>
+      <p:sp>
+        <p:nvSpPr>
+          <p:cNvPr id="4" name="Title 3">
+            <a:extLst>
+              <a:ext uri="{FF2B5EF4-FFF2-40B4-BE49-F238E27FC236}">
+                <a16:creationId xmlns:a16="http://schemas.microsoft.com/office/drawing/2014/main" id="{6B579399-68A7-C464-3780-544D50771FAD}"/>
+              </a:ext>
+            </a:extLst>
+          </p:cNvPr>
+          <p:cNvSpPr>
+            <a:spLocks noGrp="1"/>
+          </p:cNvSpPr>
+          <p:nvPr>
+            <p:ph type="title"/>
+          </p:nvPr>
+        </p:nvSpPr>
+        <p:spPr/>
+        <p:txBody>
+          <a:bodyPr/>
+          <a:lstStyle/>
+          <a:p>
+            <a:r>
+              <a:rPr lang="nl-NL" noProof="0" dirty="0"/>
+              <a:t>Taken beheren</a:t>
+            </a:r>
+          </a:p>
+        </p:txBody>
+      </p:sp>
+      <p:sp>
+        <p:nvSpPr>
+          <p:cNvPr id="5" name="Text Placeholder 4">
+            <a:extLst>
+              <a:ext uri="{FF2B5EF4-FFF2-40B4-BE49-F238E27FC236}">
+                <a16:creationId xmlns:a16="http://schemas.microsoft.com/office/drawing/2014/main" id="{1AA7F936-2C11-9266-C225-9E47933CBFE1}"/>
+              </a:ext>
+            </a:extLst>
+          </p:cNvPr>
+          <p:cNvSpPr>
+            <a:spLocks noGrp="1"/>
+          </p:cNvSpPr>
+          <p:nvPr>
+            <p:ph type="body" idx="1"/>
+          </p:nvPr>
+        </p:nvSpPr>
+        <p:spPr/>
+        <p:txBody>
+          <a:bodyPr/>
+          <a:lstStyle/>
+          <a:p>
+            <a:endParaRPr lang="en-NL"/>
+          </a:p>
+        </p:txBody>
+      </p:sp>
+    </p:spTree>
+    <p:extLst>
+      <p:ext uri="{BB962C8B-B14F-4D97-AF65-F5344CB8AC3E}">
+        <p14:creationId xmlns:p14="http://schemas.microsoft.com/office/powerpoint/2010/main" val="1306930845"/>
+      </p:ext>
+    </p:extLst>
+  </p:cSld>
+  <p:clrMapOvr>
+    <a:masterClrMapping/>
+  </p:clrMapOvr>
+</p:sld>
+</file>
+
+<file path=ppt/slides/slide41.xml><?xml version="1.0" encoding="utf-8"?>
+<p:sld xmlns:a="http://schemas.openxmlformats.org/drawingml/2006/main" xmlns:r="http://schemas.openxmlformats.org/officeDocument/2006/relationships" xmlns:p="http://schemas.openxmlformats.org/presentationml/2006/main">
+  <p:cSld>
+    <p:spTree>
+      <p:nvGrpSpPr>
+        <p:cNvPr id="1" name="">
+          <a:extLst>
+            <a:ext uri="{FF2B5EF4-FFF2-40B4-BE49-F238E27FC236}">
+              <a16:creationId xmlns:a16="http://schemas.microsoft.com/office/drawing/2014/main" id="{BDFEA8A2-09C3-6C8E-58C3-68AE93B47193}"/>
             </a:ext>
           </a:extLst>
         </p:cNvPr>
@@ -24515,7 +25234,7 @@
           <p:cNvPr id="2" name="Title 1">
             <a:extLst>
               <a:ext uri="{FF2B5EF4-FFF2-40B4-BE49-F238E27FC236}">
-                <a16:creationId xmlns:a16="http://schemas.microsoft.com/office/drawing/2014/main" id="{120501EB-C797-DCA7-052E-57256E1238D9}"/>
+                <a16:creationId xmlns:a16="http://schemas.microsoft.com/office/drawing/2014/main" id="{93B18F6F-5175-8AA3-408E-E13768652827}"/>
               </a:ext>
             </a:extLst>
           </p:cNvPr>
@@ -24540,7 +25259,7 @@
           <a:p>
             <a:r>
               <a:rPr lang="nl-NL" sz="3600" noProof="0" dirty="0"/>
-              <a:t>Issue aanmaken</a:t>
+              <a:t>Taken aanmaken</a:t>
             </a:r>
           </a:p>
         </p:txBody>
@@ -24550,7 +25269,7 @@
           <p:cNvPr id="15" name="Content Placeholder 2">
             <a:extLst>
               <a:ext uri="{FF2B5EF4-FFF2-40B4-BE49-F238E27FC236}">
-                <a16:creationId xmlns:a16="http://schemas.microsoft.com/office/drawing/2014/main" id="{861D6860-F466-E416-744A-C4E0E758D132}"/>
+                <a16:creationId xmlns:a16="http://schemas.microsoft.com/office/drawing/2014/main" id="{4DCBF055-7428-2021-44E2-CCD550754DA2}"/>
               </a:ext>
             </a:extLst>
           </p:cNvPr>
@@ -24561,8 +25280,8 @@
         </p:nvSpPr>
         <p:spPr>
           <a:xfrm>
-            <a:off x="838200" y="1456267"/>
-            <a:ext cx="2921758" cy="4720696"/>
+            <a:off x="838199" y="1456267"/>
+            <a:ext cx="3312319" cy="4720696"/>
           </a:xfrm>
           <a:prstGeom prst="rect">
             <a:avLst/>
@@ -24748,37 +25467,24 @@
               <a:buNone/>
             </a:pPr>
             <a:r>
+              <a:rPr lang="nl-NL" sz="1400" b="1" dirty="0"/>
+              <a:t>Wat is een issue?</a:t>
+            </a:r>
+          </a:p>
+          <a:p>
+            <a:pPr marL="0" indent="0">
+              <a:lnSpc>
+                <a:spcPct val="100000"/>
+              </a:lnSpc>
+              <a:spcBef>
+                <a:spcPts val="600"/>
+              </a:spcBef>
+              <a:buFont typeface="Arial" panose="020B0604020202020204" pitchFamily="34" charset="0"/>
+              <a:buNone/>
+            </a:pPr>
+            <a:r>
               <a:rPr lang="nl-NL" sz="1400" dirty="0"/>
-              <a:t>Issues gekoppeld aan een repository en optioneel aan een project.</a:t>
-            </a:r>
-          </a:p>
-          <a:p>
-            <a:pPr marL="0" indent="0">
-              <a:lnSpc>
-                <a:spcPct val="100000"/>
-              </a:lnSpc>
-              <a:spcBef>
-                <a:spcPts val="600"/>
-              </a:spcBef>
-              <a:buFont typeface="Arial" panose="020B0604020202020204" pitchFamily="34" charset="0"/>
-              <a:buNone/>
-            </a:pPr>
-            <a:endParaRPr lang="nl-NL" sz="1400" b="1" dirty="0"/>
-          </a:p>
-          <a:p>
-            <a:pPr marL="0" indent="0">
-              <a:lnSpc>
-                <a:spcPct val="100000"/>
-              </a:lnSpc>
-              <a:spcBef>
-                <a:spcPts val="600"/>
-              </a:spcBef>
-              <a:buFont typeface="Arial" panose="020B0604020202020204" pitchFamily="34" charset="0"/>
-              <a:buNone/>
-            </a:pPr>
-            <a:r>
-              <a:rPr lang="nl-NL" sz="1400" b="1" dirty="0"/>
-              <a:t>Via een project</a:t>
+              <a:t>Een taak / concreet stukje werk:</a:t>
             </a:r>
           </a:p>
           <a:p>
@@ -24794,7 +25500,7 @@
             </a:pPr>
             <a:r>
               <a:rPr lang="nl-NL" sz="1400" dirty="0"/>
-              <a:t>Ga naar het project.</a:t>
+              <a:t>nieuwe feature.</a:t>
             </a:r>
           </a:p>
           <a:p>
@@ -24809,12 +25515,8 @@
               <a:buChar char="-"/>
             </a:pPr>
             <a:r>
-              <a:rPr lang="nl-NL" sz="1400" dirty="0"/>
-              <a:t>Klik op </a:t>
-            </a:r>
-            <a:r>
               <a:rPr lang="nl-NL" sz="1400" dirty="0" err="1"/>
-              <a:t>Backlog</a:t>
+              <a:t>bugfix</a:t>
             </a:r>
             <a:r>
               <a:rPr lang="nl-NL" sz="1400" dirty="0"/>
@@ -24834,15 +25536,36 @@
             </a:pPr>
             <a:r>
               <a:rPr lang="nl-NL" sz="1400" dirty="0"/>
-              <a:t>Klik onderaan op + </a:t>
-            </a:r>
-            <a:r>
-              <a:rPr lang="nl-NL" sz="1400" dirty="0" err="1"/>
-              <a:t>Add</a:t>
-            </a:r>
-            <a:r>
-              <a:rPr lang="nl-NL" sz="1400" dirty="0"/>
-              <a:t> item.</a:t>
+              <a:t>documentatie.</a:t>
+            </a:r>
+          </a:p>
+          <a:p>
+            <a:pPr marL="0" indent="0">
+              <a:lnSpc>
+                <a:spcPct val="100000"/>
+              </a:lnSpc>
+              <a:spcBef>
+                <a:spcPts val="600"/>
+              </a:spcBef>
+              <a:buFont typeface="Arial" panose="020B0604020202020204" pitchFamily="34" charset="0"/>
+              <a:buNone/>
+            </a:pPr>
+            <a:endParaRPr lang="nl-NL" sz="1400" b="1" dirty="0"/>
+          </a:p>
+          <a:p>
+            <a:pPr marL="0" indent="0">
+              <a:lnSpc>
+                <a:spcPct val="100000"/>
+              </a:lnSpc>
+              <a:spcBef>
+                <a:spcPts val="600"/>
+              </a:spcBef>
+              <a:buFont typeface="Arial" panose="020B0604020202020204" pitchFamily="34" charset="0"/>
+              <a:buNone/>
+            </a:pPr>
+            <a:r>
+              <a:rPr lang="nl-NL" sz="1400" b="1" dirty="0"/>
+              <a:t>Belangrijke elementen:</a:t>
             </a:r>
           </a:p>
           <a:p>
@@ -24858,15 +25581,7 @@
             </a:pPr>
             <a:r>
               <a:rPr lang="nl-NL" sz="1400" dirty="0"/>
-              <a:t>Kies </a:t>
-            </a:r>
-            <a:r>
-              <a:rPr lang="nl-NL" sz="1400" dirty="0" err="1"/>
-              <a:t>Create</a:t>
-            </a:r>
-            <a:r>
-              <a:rPr lang="nl-NL" sz="1400" dirty="0"/>
-              <a:t> new item.</a:t>
+              <a:t>Duidelijke titel en omschrijving.</a:t>
             </a:r>
           </a:p>
           <a:p>
@@ -24882,7 +25597,7 @@
             </a:pPr>
             <a:r>
               <a:rPr lang="nl-NL" sz="1400" dirty="0"/>
-              <a:t>Kies het repository.</a:t>
+              <a:t>Wie gaat het oppakken.</a:t>
             </a:r>
           </a:p>
           <a:p>
@@ -24898,7 +25613,23 @@
             </a:pPr>
             <a:r>
               <a:rPr lang="nl-NL" sz="1400" dirty="0"/>
-              <a:t>Vul de gegevens in.</a:t>
+              <a:t>Labels voor type werk.</a:t>
+            </a:r>
+          </a:p>
+          <a:p>
+            <a:pPr>
+              <a:lnSpc>
+                <a:spcPct val="100000"/>
+              </a:lnSpc>
+              <a:spcBef>
+                <a:spcPts val="600"/>
+              </a:spcBef>
+              <a:buFontTx/>
+              <a:buChar char="-"/>
+            </a:pPr>
+            <a:r>
+              <a:rPr lang="nl-NL" sz="1400" dirty="0"/>
+              <a:t>Wanneer is het af?</a:t>
             </a:r>
           </a:p>
           <a:p>
@@ -24912,19 +25643,7 @@
               <a:buFont typeface="Arial" panose="020B0604020202020204" pitchFamily="34" charset="0"/>
               <a:buNone/>
             </a:pPr>
-            <a:endParaRPr lang="nl-NL" sz="1400" dirty="0"/>
-          </a:p>
-          <a:p>
-            <a:pPr marL="0" indent="0">
-              <a:lnSpc>
-                <a:spcPct val="100000"/>
-              </a:lnSpc>
-              <a:spcBef>
-                <a:spcPts val="600"/>
-              </a:spcBef>
-              <a:buNone/>
-            </a:pPr>
-            <a:endParaRPr lang="nl-NL" sz="1400" dirty="0"/>
+            <a:endParaRPr lang="nl-NL" sz="1400" b="1" dirty="0"/>
           </a:p>
           <a:p>
             <a:pPr marL="0" indent="0">
@@ -24955,10 +25674,10 @@
       </p:sp>
       <p:pic>
         <p:nvPicPr>
-          <p:cNvPr id="5" name="Picture 4" descr="A screenshot of a computer&#10;&#10;Description automatically generated">
-            <a:extLst>
-              <a:ext uri="{FF2B5EF4-FFF2-40B4-BE49-F238E27FC236}">
-                <a16:creationId xmlns:a16="http://schemas.microsoft.com/office/drawing/2014/main" id="{9ECEBFEB-DC73-4239-9299-BA8512B3DAB1}"/>
+          <p:cNvPr id="4" name="Picture 3" descr="A screenshot of a computer&#10;&#10;Description automatically generated">
+            <a:extLst>
+              <a:ext uri="{FF2B5EF4-FFF2-40B4-BE49-F238E27FC236}">
+                <a16:creationId xmlns:a16="http://schemas.microsoft.com/office/drawing/2014/main" id="{336BBA03-D9DD-D985-58E3-1D280C65BF79}"/>
               </a:ext>
             </a:extLst>
           </p:cNvPr>
@@ -24968,7 +25687,7 @@
           <p:nvPr/>
         </p:nvPicPr>
         <p:blipFill>
-          <a:blip r:embed="rId2">
+          <a:blip r:embed="rId3">
             <a:extLst>
               <a:ext uri="{28A0092B-C50C-407E-A947-70E740481C1C}">
                 <a14:useLocalDpi xmlns:a14="http://schemas.microsoft.com/office/drawing/2010/main" val="0"/>
@@ -24981,8 +25700,8 @@
         </p:blipFill>
         <p:spPr>
           <a:xfrm>
-            <a:off x="6294194" y="1456267"/>
-            <a:ext cx="5059606" cy="4707072"/>
+            <a:off x="4488300" y="1456267"/>
+            <a:ext cx="6865500" cy="3003656"/>
           </a:xfrm>
           <a:prstGeom prst="rect">
             <a:avLst/>
@@ -24994,51 +25713,46 @@
           </a:ln>
         </p:spPr>
       </p:pic>
-      <p:cxnSp>
-        <p:nvCxnSpPr>
-          <p:cNvPr id="7" name="Straight Connector 6">
-            <a:extLst>
-              <a:ext uri="{FF2B5EF4-FFF2-40B4-BE49-F238E27FC236}">
-                <a16:creationId xmlns:a16="http://schemas.microsoft.com/office/drawing/2014/main" id="{4B764C4F-269F-6E95-F6DA-6AFA7D47A2B4}"/>
-              </a:ext>
-            </a:extLst>
-          </p:cNvPr>
-          <p:cNvCxnSpPr/>
+      <p:sp>
+        <p:nvSpPr>
+          <p:cNvPr id="3" name="TextBox 2">
+            <a:extLst>
+              <a:ext uri="{FF2B5EF4-FFF2-40B4-BE49-F238E27FC236}">
+                <a16:creationId xmlns:a16="http://schemas.microsoft.com/office/drawing/2014/main" id="{C0F34AA1-61CD-BB68-DC6E-4203E36B0424}"/>
+              </a:ext>
+            </a:extLst>
+          </p:cNvPr>
+          <p:cNvSpPr txBox="1"/>
           <p:nvPr/>
-        </p:nvCxnSpPr>
+        </p:nvSpPr>
         <p:spPr>
           <a:xfrm>
-            <a:off x="6453051" y="2142309"/>
-            <a:ext cx="1822269" cy="0"/>
+            <a:off x="9619967" y="6471982"/>
+            <a:ext cx="2499246" cy="307777"/>
           </a:xfrm>
-          <a:prstGeom prst="line">
+          <a:prstGeom prst="rect">
             <a:avLst/>
           </a:prstGeom>
-          <a:ln>
-            <a:solidFill>
-              <a:schemeClr val="accent2"/>
-            </a:solidFill>
-          </a:ln>
+          <a:noFill/>
         </p:spPr>
-        <p:style>
-          <a:lnRef idx="2">
-            <a:schemeClr val="accent2"/>
-          </a:lnRef>
-          <a:fillRef idx="0">
-            <a:schemeClr val="accent2"/>
-          </a:fillRef>
-          <a:effectRef idx="1">
-            <a:schemeClr val="accent2"/>
-          </a:effectRef>
-          <a:fontRef idx="minor">
-            <a:schemeClr val="tx1"/>
-          </a:fontRef>
-        </p:style>
-      </p:cxnSp>
+        <p:txBody>
+          <a:bodyPr wrap="square">
+            <a:spAutoFit/>
+          </a:bodyPr>
+          <a:lstStyle/>
+          <a:p>
+            <a:pPr algn="r"/>
+            <a:r>
+              <a:rPr lang="en-US" sz="1400" dirty="0"/>
+              <a:t>D: create issue.</a:t>
+            </a:r>
+          </a:p>
+        </p:txBody>
+      </p:sp>
     </p:spTree>
     <p:extLst>
       <p:ext uri="{BB962C8B-B14F-4D97-AF65-F5344CB8AC3E}">
-        <p14:creationId xmlns:p14="http://schemas.microsoft.com/office/powerpoint/2010/main" val="2473046667"/>
+        <p14:creationId xmlns:p14="http://schemas.microsoft.com/office/powerpoint/2010/main" val="1181346886"/>
       </p:ext>
     </p:extLst>
   </p:cSld>
@@ -25048,7 +25762,7 @@
 </p:sld>
 </file>
 
-<file path=ppt/slides/slide41.xml><?xml version="1.0" encoding="utf-8"?>
+<file path=ppt/slides/slide42.xml><?xml version="1.0" encoding="utf-8"?>
 <p:sld xmlns:a="http://schemas.openxmlformats.org/drawingml/2006/main" xmlns:r="http://schemas.openxmlformats.org/officeDocument/2006/relationships" xmlns:p="http://schemas.openxmlformats.org/presentationml/2006/main">
   <p:cSld>
     <p:spTree>
@@ -25498,7 +26212,7 @@
 </p:sld>
 </file>
 
-<file path=ppt/slides/slide42.xml><?xml version="1.0" encoding="utf-8"?>
+<file path=ppt/slides/slide43.xml><?xml version="1.0" encoding="utf-8"?>
 <p:sld xmlns:a="http://schemas.openxmlformats.org/drawingml/2006/main" xmlns:r="http://schemas.openxmlformats.org/officeDocument/2006/relationships" xmlns:p="http://schemas.openxmlformats.org/presentationml/2006/main">
   <p:cSld>
     <p:spTree>
@@ -26009,7 +26723,7 @@
 </p:sld>
 </file>
 
-<file path=ppt/slides/slide43.xml><?xml version="1.0" encoding="utf-8"?>
+<file path=ppt/slides/slide44.xml><?xml version="1.0" encoding="utf-8"?>
 <p:sld xmlns:a="http://schemas.openxmlformats.org/drawingml/2006/main" xmlns:r="http://schemas.openxmlformats.org/officeDocument/2006/relationships" xmlns:p="http://schemas.openxmlformats.org/presentationml/2006/main">
   <p:cSld>
     <p:spTree>
@@ -26482,7 +27196,7 @@
           <p:nvPr/>
         </p:nvPicPr>
         <p:blipFill>
-          <a:blip r:embed="rId2">
+          <a:blip r:embed="rId3">
             <a:extLst>
               <a:ext uri="{28A0092B-C50C-407E-A947-70E740481C1C}">
                 <a14:useLocalDpi xmlns:a14="http://schemas.microsoft.com/office/drawing/2010/main" val="0"/>
@@ -26508,6 +27222,42 @@
           </a:ln>
         </p:spPr>
       </p:pic>
+      <p:sp>
+        <p:nvSpPr>
+          <p:cNvPr id="3" name="TextBox 2">
+            <a:extLst>
+              <a:ext uri="{FF2B5EF4-FFF2-40B4-BE49-F238E27FC236}">
+                <a16:creationId xmlns:a16="http://schemas.microsoft.com/office/drawing/2014/main" id="{D868E47C-6D4E-459C-E033-E6D66184E5C7}"/>
+              </a:ext>
+            </a:extLst>
+          </p:cNvPr>
+          <p:cNvSpPr txBox="1"/>
+          <p:nvPr/>
+        </p:nvSpPr>
+        <p:spPr>
+          <a:xfrm>
+            <a:off x="9619967" y="6471982"/>
+            <a:ext cx="2499246" cy="307777"/>
+          </a:xfrm>
+          <a:prstGeom prst="rect">
+            <a:avLst/>
+          </a:prstGeom>
+          <a:noFill/>
+        </p:spPr>
+        <p:txBody>
+          <a:bodyPr wrap="square">
+            <a:spAutoFit/>
+          </a:bodyPr>
+          <a:lstStyle/>
+          <a:p>
+            <a:pPr algn="r"/>
+            <a:r>
+              <a:rPr lang="en-US" sz="1400" dirty="0"/>
+              <a:t>D: create project.</a:t>
+            </a:r>
+          </a:p>
+        </p:txBody>
+      </p:sp>
     </p:spTree>
     <p:extLst>
       <p:ext uri="{BB962C8B-B14F-4D97-AF65-F5344CB8AC3E}">
@@ -26521,7 +27271,7 @@
 </p:sld>
 </file>
 
-<file path=ppt/slides/slide44.xml><?xml version="1.0" encoding="utf-8"?>
+<file path=ppt/slides/slide45.xml><?xml version="1.0" encoding="utf-8"?>
 <p:sld xmlns:a="http://schemas.openxmlformats.org/drawingml/2006/main" xmlns:r="http://schemas.openxmlformats.org/officeDocument/2006/relationships" xmlns:p="http://schemas.openxmlformats.org/presentationml/2006/main">
   <p:cSld>
     <p:spTree>
@@ -26610,7 +27360,7 @@
 </p:sld>
 </file>
 
-<file path=ppt/slides/slide45.xml><?xml version="1.0" encoding="utf-8"?>
+<file path=ppt/slides/slide46.xml><?xml version="1.0" encoding="utf-8"?>
 <p:sld xmlns:a="http://schemas.openxmlformats.org/drawingml/2006/main" xmlns:r="http://schemas.openxmlformats.org/officeDocument/2006/relationships" xmlns:p="http://schemas.openxmlformats.org/presentationml/2006/main">
   <p:cSld>
     <p:spTree>
@@ -27115,7 +27865,7 @@
 </p:sld>
 </file>
 
-<file path=ppt/slides/slide46.xml><?xml version="1.0" encoding="utf-8"?>
+<file path=ppt/slides/slide47.xml><?xml version="1.0" encoding="utf-8"?>
 <p:sld xmlns:a="http://schemas.openxmlformats.org/drawingml/2006/main" xmlns:r="http://schemas.openxmlformats.org/officeDocument/2006/relationships" xmlns:p="http://schemas.openxmlformats.org/presentationml/2006/main">
   <p:cSld>
     <p:spTree>
@@ -27589,7 +28339,7 @@
 </p:sld>
 </file>
 
-<file path=ppt/slides/slide47.xml><?xml version="1.0" encoding="utf-8"?>
+<file path=ppt/slides/slide48.xml><?xml version="1.0" encoding="utf-8"?>
 <p:sld xmlns:a="http://schemas.openxmlformats.org/drawingml/2006/main" xmlns:r="http://schemas.openxmlformats.org/officeDocument/2006/relationships" xmlns:p="http://schemas.openxmlformats.org/presentationml/2006/main">
   <p:cSld>
     <p:spTree>
@@ -28144,7 +28894,7 @@
 </p:sld>
 </file>
 
-<file path=ppt/slides/slide48.xml><?xml version="1.0" encoding="utf-8"?>
+<file path=ppt/slides/slide49.xml><?xml version="1.0" encoding="utf-8"?>
 <p:sld xmlns:a="http://schemas.openxmlformats.org/drawingml/2006/main" xmlns:r="http://schemas.openxmlformats.org/officeDocument/2006/relationships" xmlns:p="http://schemas.openxmlformats.org/presentationml/2006/main">
   <p:cSld>
     <p:spTree>
@@ -28229,403 +28979,6 @@
     <p:extLst>
       <p:ext uri="{BB962C8B-B14F-4D97-AF65-F5344CB8AC3E}">
         <p14:creationId xmlns:p14="http://schemas.microsoft.com/office/powerpoint/2010/main" val="4112290030"/>
-      </p:ext>
-    </p:extLst>
-  </p:cSld>
-  <p:clrMapOvr>
-    <a:masterClrMapping/>
-  </p:clrMapOvr>
-</p:sld>
-</file>
-
-<file path=ppt/slides/slide49.xml><?xml version="1.0" encoding="utf-8"?>
-<p:sld xmlns:a="http://schemas.openxmlformats.org/drawingml/2006/main" xmlns:r="http://schemas.openxmlformats.org/officeDocument/2006/relationships" xmlns:p="http://schemas.openxmlformats.org/presentationml/2006/main">
-  <p:cSld>
-    <p:spTree>
-      <p:nvGrpSpPr>
-        <p:cNvPr id="1" name="">
-          <a:extLst>
-            <a:ext uri="{FF2B5EF4-FFF2-40B4-BE49-F238E27FC236}">
-              <a16:creationId xmlns:a16="http://schemas.microsoft.com/office/drawing/2014/main" id="{D240656D-C988-26AF-CD83-C4181D2E0586}"/>
-            </a:ext>
-          </a:extLst>
-        </p:cNvPr>
-        <p:cNvGrpSpPr/>
-        <p:nvPr/>
-      </p:nvGrpSpPr>
-      <p:grpSpPr>
-        <a:xfrm>
-          <a:off x="0" y="0"/>
-          <a:ext cx="0" cy="0"/>
-          <a:chOff x="0" y="0"/>
-          <a:chExt cx="0" cy="0"/>
-        </a:xfrm>
-      </p:grpSpPr>
-      <p:sp>
-        <p:nvSpPr>
-          <p:cNvPr id="2" name="Title 1">
-            <a:extLst>
-              <a:ext uri="{FF2B5EF4-FFF2-40B4-BE49-F238E27FC236}">
-                <a16:creationId xmlns:a16="http://schemas.microsoft.com/office/drawing/2014/main" id="{C1879BDA-8F1D-4172-D293-7A7CB8AD29BC}"/>
-              </a:ext>
-            </a:extLst>
-          </p:cNvPr>
-          <p:cNvSpPr>
-            <a:spLocks noGrp="1"/>
-          </p:cNvSpPr>
-          <p:nvPr>
-            <p:ph type="title"/>
-          </p:nvPr>
-        </p:nvSpPr>
-        <p:spPr>
-          <a:xfrm>
-            <a:off x="838200" y="365126"/>
-            <a:ext cx="10515600" cy="718608"/>
-          </a:xfrm>
-        </p:spPr>
-        <p:txBody>
-          <a:bodyPr>
-            <a:normAutofit/>
-          </a:bodyPr>
-          <a:lstStyle/>
-          <a:p>
-            <a:r>
-              <a:rPr lang="nl-NL" sz="3600" noProof="0" dirty="0"/>
-              <a:t>Een PR aanmaken</a:t>
-            </a:r>
-          </a:p>
-        </p:txBody>
-      </p:sp>
-      <p:sp>
-        <p:nvSpPr>
-          <p:cNvPr id="15" name="Content Placeholder 2">
-            <a:extLst>
-              <a:ext uri="{FF2B5EF4-FFF2-40B4-BE49-F238E27FC236}">
-                <a16:creationId xmlns:a16="http://schemas.microsoft.com/office/drawing/2014/main" id="{EE8E0398-0270-3009-2916-F6C2561BA9E8}"/>
-              </a:ext>
-            </a:extLst>
-          </p:cNvPr>
-          <p:cNvSpPr txBox="1">
-            <a:spLocks/>
-          </p:cNvSpPr>
-          <p:nvPr/>
-        </p:nvSpPr>
-        <p:spPr>
-          <a:xfrm>
-            <a:off x="838199" y="1456267"/>
-            <a:ext cx="4548189" cy="4720696"/>
-          </a:xfrm>
-          <a:prstGeom prst="rect">
-            <a:avLst/>
-          </a:prstGeom>
-        </p:spPr>
-        <p:txBody>
-          <a:bodyPr vert="horz" lIns="91440" tIns="45720" rIns="91440" bIns="45720" rtlCol="0">
-            <a:noAutofit/>
-          </a:bodyPr>
-          <a:lstStyle>
-            <a:lvl1pPr marL="228600" indent="-228600" algn="l" defTabSz="914400" rtl="0" eaLnBrk="1" latinLnBrk="0" hangingPunct="1">
-              <a:lnSpc>
-                <a:spcPct val="90000"/>
-              </a:lnSpc>
-              <a:spcBef>
-                <a:spcPts val="1000"/>
-              </a:spcBef>
-              <a:buFont typeface="Arial" panose="020B0604020202020204" pitchFamily="34" charset="0"/>
-              <a:buChar char="•"/>
-              <a:defRPr sz="2800" kern="1200">
-                <a:solidFill>
-                  <a:schemeClr val="tx1"/>
-                </a:solidFill>
-                <a:latin typeface="+mn-lt"/>
-                <a:ea typeface="+mn-ea"/>
-                <a:cs typeface="+mn-cs"/>
-              </a:defRPr>
-            </a:lvl1pPr>
-            <a:lvl2pPr marL="685800" indent="-228600" algn="l" defTabSz="914400" rtl="0" eaLnBrk="1" latinLnBrk="0" hangingPunct="1">
-              <a:lnSpc>
-                <a:spcPct val="90000"/>
-              </a:lnSpc>
-              <a:spcBef>
-                <a:spcPts val="500"/>
-              </a:spcBef>
-              <a:buFont typeface="Arial" panose="020B0604020202020204" pitchFamily="34" charset="0"/>
-              <a:buChar char="•"/>
-              <a:defRPr sz="2400" kern="1200">
-                <a:solidFill>
-                  <a:schemeClr val="tx1"/>
-                </a:solidFill>
-                <a:latin typeface="+mn-lt"/>
-                <a:ea typeface="+mn-ea"/>
-                <a:cs typeface="+mn-cs"/>
-              </a:defRPr>
-            </a:lvl2pPr>
-            <a:lvl3pPr marL="1143000" indent="-228600" algn="l" defTabSz="914400" rtl="0" eaLnBrk="1" latinLnBrk="0" hangingPunct="1">
-              <a:lnSpc>
-                <a:spcPct val="90000"/>
-              </a:lnSpc>
-              <a:spcBef>
-                <a:spcPts val="500"/>
-              </a:spcBef>
-              <a:buFont typeface="Arial" panose="020B0604020202020204" pitchFamily="34" charset="0"/>
-              <a:buChar char="•"/>
-              <a:defRPr sz="2000" kern="1200">
-                <a:solidFill>
-                  <a:schemeClr val="tx1"/>
-                </a:solidFill>
-                <a:latin typeface="+mn-lt"/>
-                <a:ea typeface="+mn-ea"/>
-                <a:cs typeface="+mn-cs"/>
-              </a:defRPr>
-            </a:lvl3pPr>
-            <a:lvl4pPr marL="1600200" indent="-228600" algn="l" defTabSz="914400" rtl="0" eaLnBrk="1" latinLnBrk="0" hangingPunct="1">
-              <a:lnSpc>
-                <a:spcPct val="90000"/>
-              </a:lnSpc>
-              <a:spcBef>
-                <a:spcPts val="500"/>
-              </a:spcBef>
-              <a:buFont typeface="Arial" panose="020B0604020202020204" pitchFamily="34" charset="0"/>
-              <a:buChar char="•"/>
-              <a:defRPr sz="1800" kern="1200">
-                <a:solidFill>
-                  <a:schemeClr val="tx1"/>
-                </a:solidFill>
-                <a:latin typeface="+mn-lt"/>
-                <a:ea typeface="+mn-ea"/>
-                <a:cs typeface="+mn-cs"/>
-              </a:defRPr>
-            </a:lvl4pPr>
-            <a:lvl5pPr marL="2057400" indent="-228600" algn="l" defTabSz="914400" rtl="0" eaLnBrk="1" latinLnBrk="0" hangingPunct="1">
-              <a:lnSpc>
-                <a:spcPct val="90000"/>
-              </a:lnSpc>
-              <a:spcBef>
-                <a:spcPts val="500"/>
-              </a:spcBef>
-              <a:buFont typeface="Arial" panose="020B0604020202020204" pitchFamily="34" charset="0"/>
-              <a:buChar char="•"/>
-              <a:defRPr sz="1800" kern="1200">
-                <a:solidFill>
-                  <a:schemeClr val="tx1"/>
-                </a:solidFill>
-                <a:latin typeface="+mn-lt"/>
-                <a:ea typeface="+mn-ea"/>
-                <a:cs typeface="+mn-cs"/>
-              </a:defRPr>
-            </a:lvl5pPr>
-            <a:lvl6pPr marL="2514600" indent="-228600" algn="l" defTabSz="914400" rtl="0" eaLnBrk="1" latinLnBrk="0" hangingPunct="1">
-              <a:lnSpc>
-                <a:spcPct val="90000"/>
-              </a:lnSpc>
-              <a:spcBef>
-                <a:spcPts val="500"/>
-              </a:spcBef>
-              <a:buFont typeface="Arial" panose="020B0604020202020204" pitchFamily="34" charset="0"/>
-              <a:buChar char="•"/>
-              <a:defRPr sz="1800" kern="1200">
-                <a:solidFill>
-                  <a:schemeClr val="tx1"/>
-                </a:solidFill>
-                <a:latin typeface="+mn-lt"/>
-                <a:ea typeface="+mn-ea"/>
-                <a:cs typeface="+mn-cs"/>
-              </a:defRPr>
-            </a:lvl6pPr>
-            <a:lvl7pPr marL="2971800" indent="-228600" algn="l" defTabSz="914400" rtl="0" eaLnBrk="1" latinLnBrk="0" hangingPunct="1">
-              <a:lnSpc>
-                <a:spcPct val="90000"/>
-              </a:lnSpc>
-              <a:spcBef>
-                <a:spcPts val="500"/>
-              </a:spcBef>
-              <a:buFont typeface="Arial" panose="020B0604020202020204" pitchFamily="34" charset="0"/>
-              <a:buChar char="•"/>
-              <a:defRPr sz="1800" kern="1200">
-                <a:solidFill>
-                  <a:schemeClr val="tx1"/>
-                </a:solidFill>
-                <a:latin typeface="+mn-lt"/>
-                <a:ea typeface="+mn-ea"/>
-                <a:cs typeface="+mn-cs"/>
-              </a:defRPr>
-            </a:lvl7pPr>
-            <a:lvl8pPr marL="3429000" indent="-228600" algn="l" defTabSz="914400" rtl="0" eaLnBrk="1" latinLnBrk="0" hangingPunct="1">
-              <a:lnSpc>
-                <a:spcPct val="90000"/>
-              </a:lnSpc>
-              <a:spcBef>
-                <a:spcPts val="500"/>
-              </a:spcBef>
-              <a:buFont typeface="Arial" panose="020B0604020202020204" pitchFamily="34" charset="0"/>
-              <a:buChar char="•"/>
-              <a:defRPr sz="1800" kern="1200">
-                <a:solidFill>
-                  <a:schemeClr val="tx1"/>
-                </a:solidFill>
-                <a:latin typeface="+mn-lt"/>
-                <a:ea typeface="+mn-ea"/>
-                <a:cs typeface="+mn-cs"/>
-              </a:defRPr>
-            </a:lvl8pPr>
-            <a:lvl9pPr marL="3886200" indent="-228600" algn="l" defTabSz="914400" rtl="0" eaLnBrk="1" latinLnBrk="0" hangingPunct="1">
-              <a:lnSpc>
-                <a:spcPct val="90000"/>
-              </a:lnSpc>
-              <a:spcBef>
-                <a:spcPts val="500"/>
-              </a:spcBef>
-              <a:buFont typeface="Arial" panose="020B0604020202020204" pitchFamily="34" charset="0"/>
-              <a:buChar char="•"/>
-              <a:defRPr sz="1800" kern="1200">
-                <a:solidFill>
-                  <a:schemeClr val="tx1"/>
-                </a:solidFill>
-                <a:latin typeface="+mn-lt"/>
-                <a:ea typeface="+mn-ea"/>
-                <a:cs typeface="+mn-cs"/>
-              </a:defRPr>
-            </a:lvl9pPr>
-          </a:lstStyle>
-          <a:p>
-            <a:pPr marL="342900" indent="-342900">
-              <a:lnSpc>
-                <a:spcPct val="150000"/>
-              </a:lnSpc>
-              <a:spcBef>
-                <a:spcPts val="600"/>
-              </a:spcBef>
-              <a:buFont typeface="Arial" panose="020B0604020202020204" pitchFamily="34" charset="0"/>
-              <a:buAutoNum type="arabicPeriod"/>
-            </a:pPr>
-            <a:r>
-              <a:rPr lang="nl-NL" sz="1800" dirty="0"/>
-              <a:t>Ga naar </a:t>
-            </a:r>
-            <a:r>
-              <a:rPr lang="nl-NL" sz="1800" dirty="0" err="1"/>
-              <a:t>Repos</a:t>
-            </a:r>
-            <a:r>
-              <a:rPr lang="nl-NL" sz="1800" dirty="0"/>
-              <a:t>.</a:t>
-            </a:r>
-          </a:p>
-          <a:p>
-            <a:pPr marL="342900" indent="-342900">
-              <a:lnSpc>
-                <a:spcPct val="150000"/>
-              </a:lnSpc>
-              <a:spcBef>
-                <a:spcPts val="600"/>
-              </a:spcBef>
-              <a:buFont typeface="Arial" panose="020B0604020202020204" pitchFamily="34" charset="0"/>
-              <a:buAutoNum type="arabicPeriod"/>
-            </a:pPr>
-            <a:r>
-              <a:rPr lang="nl-NL" sz="1800" dirty="0"/>
-              <a:t>Klik op [Pull </a:t>
-            </a:r>
-            <a:r>
-              <a:rPr lang="nl-NL" sz="1800" dirty="0" err="1"/>
-              <a:t>requests</a:t>
-            </a:r>
-            <a:r>
-              <a:rPr lang="nl-NL" sz="1800" dirty="0"/>
-              <a:t>] in het menu.</a:t>
-            </a:r>
-          </a:p>
-          <a:p>
-            <a:pPr marL="342900" indent="-342900">
-              <a:lnSpc>
-                <a:spcPct val="150000"/>
-              </a:lnSpc>
-              <a:spcBef>
-                <a:spcPts val="600"/>
-              </a:spcBef>
-              <a:buFont typeface="Arial" panose="020B0604020202020204" pitchFamily="34" charset="0"/>
-              <a:buAutoNum type="arabicPeriod"/>
-            </a:pPr>
-            <a:r>
-              <a:rPr lang="nl-NL" sz="1800" dirty="0"/>
-              <a:t>Klik op [New pull </a:t>
-            </a:r>
-            <a:r>
-              <a:rPr lang="nl-NL" sz="1800" dirty="0" err="1"/>
-              <a:t>request</a:t>
-            </a:r>
-            <a:r>
-              <a:rPr lang="nl-NL" sz="1800" dirty="0"/>
-              <a:t>].</a:t>
-            </a:r>
-            <a:endParaRPr lang="nl-NL" sz="1800" dirty="0">
-              <a:latin typeface="Courier New" panose="02070309020205020404" pitchFamily="49" charset="0"/>
-              <a:cs typeface="Courier New" panose="02070309020205020404" pitchFamily="49" charset="0"/>
-            </a:endParaRPr>
-          </a:p>
-          <a:p>
-            <a:pPr marL="0" indent="0">
-              <a:lnSpc>
-                <a:spcPct val="150000"/>
-              </a:lnSpc>
-              <a:spcBef>
-                <a:spcPts val="600"/>
-              </a:spcBef>
-              <a:buFont typeface="Arial" panose="020B0604020202020204" pitchFamily="34" charset="0"/>
-              <a:buNone/>
-            </a:pPr>
-            <a:endParaRPr lang="nl-NL" sz="1800" dirty="0">
-              <a:latin typeface="Courier New" panose="02070309020205020404" pitchFamily="49" charset="0"/>
-              <a:cs typeface="Courier New" panose="02070309020205020404" pitchFamily="49" charset="0"/>
-            </a:endParaRPr>
-          </a:p>
-        </p:txBody>
-      </p:sp>
-      <p:pic>
-        <p:nvPicPr>
-          <p:cNvPr id="9" name="Picture 8" descr="A screenshot of a computer&#10;&#10;Description automatically generated">
-            <a:extLst>
-              <a:ext uri="{FF2B5EF4-FFF2-40B4-BE49-F238E27FC236}">
-                <a16:creationId xmlns:a16="http://schemas.microsoft.com/office/drawing/2014/main" id="{87772F24-7AB5-8674-6947-98F99E31FBEB}"/>
-              </a:ext>
-            </a:extLst>
-          </p:cNvPr>
-          <p:cNvPicPr>
-            <a:picLocks noChangeAspect="1"/>
-          </p:cNvPicPr>
-          <p:nvPr/>
-        </p:nvPicPr>
-        <p:blipFill>
-          <a:blip r:embed="rId3">
-            <a:extLst>
-              <a:ext uri="{28A0092B-C50C-407E-A947-70E740481C1C}">
-                <a14:useLocalDpi xmlns:a14="http://schemas.microsoft.com/office/drawing/2010/main" val="0"/>
-              </a:ext>
-            </a:extLst>
-          </a:blip>
-          <a:stretch>
-            <a:fillRect/>
-          </a:stretch>
-        </p:blipFill>
-        <p:spPr>
-          <a:xfrm>
-            <a:off x="5578716" y="1540293"/>
-            <a:ext cx="5775084" cy="3777413"/>
-          </a:xfrm>
-          <a:prstGeom prst="rect">
-            <a:avLst/>
-          </a:prstGeom>
-          <a:ln>
-            <a:solidFill>
-              <a:schemeClr val="tx1"/>
-            </a:solidFill>
-          </a:ln>
-        </p:spPr>
-      </p:pic>
-    </p:spTree>
-    <p:extLst>
-      <p:ext uri="{BB962C8B-B14F-4D97-AF65-F5344CB8AC3E}">
-        <p14:creationId xmlns:p14="http://schemas.microsoft.com/office/powerpoint/2010/main" val="2034741184"/>
       </p:ext>
     </p:extLst>
   </p:cSld>
@@ -29461,6 +29814,403 @@
         <p:cNvPr id="1" name="">
           <a:extLst>
             <a:ext uri="{FF2B5EF4-FFF2-40B4-BE49-F238E27FC236}">
+              <a16:creationId xmlns:a16="http://schemas.microsoft.com/office/drawing/2014/main" id="{D240656D-C988-26AF-CD83-C4181D2E0586}"/>
+            </a:ext>
+          </a:extLst>
+        </p:cNvPr>
+        <p:cNvGrpSpPr/>
+        <p:nvPr/>
+      </p:nvGrpSpPr>
+      <p:grpSpPr>
+        <a:xfrm>
+          <a:off x="0" y="0"/>
+          <a:ext cx="0" cy="0"/>
+          <a:chOff x="0" y="0"/>
+          <a:chExt cx="0" cy="0"/>
+        </a:xfrm>
+      </p:grpSpPr>
+      <p:sp>
+        <p:nvSpPr>
+          <p:cNvPr id="2" name="Title 1">
+            <a:extLst>
+              <a:ext uri="{FF2B5EF4-FFF2-40B4-BE49-F238E27FC236}">
+                <a16:creationId xmlns:a16="http://schemas.microsoft.com/office/drawing/2014/main" id="{C1879BDA-8F1D-4172-D293-7A7CB8AD29BC}"/>
+              </a:ext>
+            </a:extLst>
+          </p:cNvPr>
+          <p:cNvSpPr>
+            <a:spLocks noGrp="1"/>
+          </p:cNvSpPr>
+          <p:nvPr>
+            <p:ph type="title"/>
+          </p:nvPr>
+        </p:nvSpPr>
+        <p:spPr>
+          <a:xfrm>
+            <a:off x="838200" y="365126"/>
+            <a:ext cx="10515600" cy="718608"/>
+          </a:xfrm>
+        </p:spPr>
+        <p:txBody>
+          <a:bodyPr>
+            <a:normAutofit/>
+          </a:bodyPr>
+          <a:lstStyle/>
+          <a:p>
+            <a:r>
+              <a:rPr lang="nl-NL" sz="3600" noProof="0" dirty="0"/>
+              <a:t>Een PR aanmaken</a:t>
+            </a:r>
+          </a:p>
+        </p:txBody>
+      </p:sp>
+      <p:sp>
+        <p:nvSpPr>
+          <p:cNvPr id="15" name="Content Placeholder 2">
+            <a:extLst>
+              <a:ext uri="{FF2B5EF4-FFF2-40B4-BE49-F238E27FC236}">
+                <a16:creationId xmlns:a16="http://schemas.microsoft.com/office/drawing/2014/main" id="{EE8E0398-0270-3009-2916-F6C2561BA9E8}"/>
+              </a:ext>
+            </a:extLst>
+          </p:cNvPr>
+          <p:cNvSpPr txBox="1">
+            <a:spLocks/>
+          </p:cNvSpPr>
+          <p:nvPr/>
+        </p:nvSpPr>
+        <p:spPr>
+          <a:xfrm>
+            <a:off x="838199" y="1456267"/>
+            <a:ext cx="4548189" cy="4720696"/>
+          </a:xfrm>
+          <a:prstGeom prst="rect">
+            <a:avLst/>
+          </a:prstGeom>
+        </p:spPr>
+        <p:txBody>
+          <a:bodyPr vert="horz" lIns="91440" tIns="45720" rIns="91440" bIns="45720" rtlCol="0">
+            <a:noAutofit/>
+          </a:bodyPr>
+          <a:lstStyle>
+            <a:lvl1pPr marL="228600" indent="-228600" algn="l" defTabSz="914400" rtl="0" eaLnBrk="1" latinLnBrk="0" hangingPunct="1">
+              <a:lnSpc>
+                <a:spcPct val="90000"/>
+              </a:lnSpc>
+              <a:spcBef>
+                <a:spcPts val="1000"/>
+              </a:spcBef>
+              <a:buFont typeface="Arial" panose="020B0604020202020204" pitchFamily="34" charset="0"/>
+              <a:buChar char="•"/>
+              <a:defRPr sz="2800" kern="1200">
+                <a:solidFill>
+                  <a:schemeClr val="tx1"/>
+                </a:solidFill>
+                <a:latin typeface="+mn-lt"/>
+                <a:ea typeface="+mn-ea"/>
+                <a:cs typeface="+mn-cs"/>
+              </a:defRPr>
+            </a:lvl1pPr>
+            <a:lvl2pPr marL="685800" indent="-228600" algn="l" defTabSz="914400" rtl="0" eaLnBrk="1" latinLnBrk="0" hangingPunct="1">
+              <a:lnSpc>
+                <a:spcPct val="90000"/>
+              </a:lnSpc>
+              <a:spcBef>
+                <a:spcPts val="500"/>
+              </a:spcBef>
+              <a:buFont typeface="Arial" panose="020B0604020202020204" pitchFamily="34" charset="0"/>
+              <a:buChar char="•"/>
+              <a:defRPr sz="2400" kern="1200">
+                <a:solidFill>
+                  <a:schemeClr val="tx1"/>
+                </a:solidFill>
+                <a:latin typeface="+mn-lt"/>
+                <a:ea typeface="+mn-ea"/>
+                <a:cs typeface="+mn-cs"/>
+              </a:defRPr>
+            </a:lvl2pPr>
+            <a:lvl3pPr marL="1143000" indent="-228600" algn="l" defTabSz="914400" rtl="0" eaLnBrk="1" latinLnBrk="0" hangingPunct="1">
+              <a:lnSpc>
+                <a:spcPct val="90000"/>
+              </a:lnSpc>
+              <a:spcBef>
+                <a:spcPts val="500"/>
+              </a:spcBef>
+              <a:buFont typeface="Arial" panose="020B0604020202020204" pitchFamily="34" charset="0"/>
+              <a:buChar char="•"/>
+              <a:defRPr sz="2000" kern="1200">
+                <a:solidFill>
+                  <a:schemeClr val="tx1"/>
+                </a:solidFill>
+                <a:latin typeface="+mn-lt"/>
+                <a:ea typeface="+mn-ea"/>
+                <a:cs typeface="+mn-cs"/>
+              </a:defRPr>
+            </a:lvl3pPr>
+            <a:lvl4pPr marL="1600200" indent="-228600" algn="l" defTabSz="914400" rtl="0" eaLnBrk="1" latinLnBrk="0" hangingPunct="1">
+              <a:lnSpc>
+                <a:spcPct val="90000"/>
+              </a:lnSpc>
+              <a:spcBef>
+                <a:spcPts val="500"/>
+              </a:spcBef>
+              <a:buFont typeface="Arial" panose="020B0604020202020204" pitchFamily="34" charset="0"/>
+              <a:buChar char="•"/>
+              <a:defRPr sz="1800" kern="1200">
+                <a:solidFill>
+                  <a:schemeClr val="tx1"/>
+                </a:solidFill>
+                <a:latin typeface="+mn-lt"/>
+                <a:ea typeface="+mn-ea"/>
+                <a:cs typeface="+mn-cs"/>
+              </a:defRPr>
+            </a:lvl4pPr>
+            <a:lvl5pPr marL="2057400" indent="-228600" algn="l" defTabSz="914400" rtl="0" eaLnBrk="1" latinLnBrk="0" hangingPunct="1">
+              <a:lnSpc>
+                <a:spcPct val="90000"/>
+              </a:lnSpc>
+              <a:spcBef>
+                <a:spcPts val="500"/>
+              </a:spcBef>
+              <a:buFont typeface="Arial" panose="020B0604020202020204" pitchFamily="34" charset="0"/>
+              <a:buChar char="•"/>
+              <a:defRPr sz="1800" kern="1200">
+                <a:solidFill>
+                  <a:schemeClr val="tx1"/>
+                </a:solidFill>
+                <a:latin typeface="+mn-lt"/>
+                <a:ea typeface="+mn-ea"/>
+                <a:cs typeface="+mn-cs"/>
+              </a:defRPr>
+            </a:lvl5pPr>
+            <a:lvl6pPr marL="2514600" indent="-228600" algn="l" defTabSz="914400" rtl="0" eaLnBrk="1" latinLnBrk="0" hangingPunct="1">
+              <a:lnSpc>
+                <a:spcPct val="90000"/>
+              </a:lnSpc>
+              <a:spcBef>
+                <a:spcPts val="500"/>
+              </a:spcBef>
+              <a:buFont typeface="Arial" panose="020B0604020202020204" pitchFamily="34" charset="0"/>
+              <a:buChar char="•"/>
+              <a:defRPr sz="1800" kern="1200">
+                <a:solidFill>
+                  <a:schemeClr val="tx1"/>
+                </a:solidFill>
+                <a:latin typeface="+mn-lt"/>
+                <a:ea typeface="+mn-ea"/>
+                <a:cs typeface="+mn-cs"/>
+              </a:defRPr>
+            </a:lvl6pPr>
+            <a:lvl7pPr marL="2971800" indent="-228600" algn="l" defTabSz="914400" rtl="0" eaLnBrk="1" latinLnBrk="0" hangingPunct="1">
+              <a:lnSpc>
+                <a:spcPct val="90000"/>
+              </a:lnSpc>
+              <a:spcBef>
+                <a:spcPts val="500"/>
+              </a:spcBef>
+              <a:buFont typeface="Arial" panose="020B0604020202020204" pitchFamily="34" charset="0"/>
+              <a:buChar char="•"/>
+              <a:defRPr sz="1800" kern="1200">
+                <a:solidFill>
+                  <a:schemeClr val="tx1"/>
+                </a:solidFill>
+                <a:latin typeface="+mn-lt"/>
+                <a:ea typeface="+mn-ea"/>
+                <a:cs typeface="+mn-cs"/>
+              </a:defRPr>
+            </a:lvl7pPr>
+            <a:lvl8pPr marL="3429000" indent="-228600" algn="l" defTabSz="914400" rtl="0" eaLnBrk="1" latinLnBrk="0" hangingPunct="1">
+              <a:lnSpc>
+                <a:spcPct val="90000"/>
+              </a:lnSpc>
+              <a:spcBef>
+                <a:spcPts val="500"/>
+              </a:spcBef>
+              <a:buFont typeface="Arial" panose="020B0604020202020204" pitchFamily="34" charset="0"/>
+              <a:buChar char="•"/>
+              <a:defRPr sz="1800" kern="1200">
+                <a:solidFill>
+                  <a:schemeClr val="tx1"/>
+                </a:solidFill>
+                <a:latin typeface="+mn-lt"/>
+                <a:ea typeface="+mn-ea"/>
+                <a:cs typeface="+mn-cs"/>
+              </a:defRPr>
+            </a:lvl8pPr>
+            <a:lvl9pPr marL="3886200" indent="-228600" algn="l" defTabSz="914400" rtl="0" eaLnBrk="1" latinLnBrk="0" hangingPunct="1">
+              <a:lnSpc>
+                <a:spcPct val="90000"/>
+              </a:lnSpc>
+              <a:spcBef>
+                <a:spcPts val="500"/>
+              </a:spcBef>
+              <a:buFont typeface="Arial" panose="020B0604020202020204" pitchFamily="34" charset="0"/>
+              <a:buChar char="•"/>
+              <a:defRPr sz="1800" kern="1200">
+                <a:solidFill>
+                  <a:schemeClr val="tx1"/>
+                </a:solidFill>
+                <a:latin typeface="+mn-lt"/>
+                <a:ea typeface="+mn-ea"/>
+                <a:cs typeface="+mn-cs"/>
+              </a:defRPr>
+            </a:lvl9pPr>
+          </a:lstStyle>
+          <a:p>
+            <a:pPr marL="342900" indent="-342900">
+              <a:lnSpc>
+                <a:spcPct val="150000"/>
+              </a:lnSpc>
+              <a:spcBef>
+                <a:spcPts val="600"/>
+              </a:spcBef>
+              <a:buFont typeface="Arial" panose="020B0604020202020204" pitchFamily="34" charset="0"/>
+              <a:buAutoNum type="arabicPeriod"/>
+            </a:pPr>
+            <a:r>
+              <a:rPr lang="nl-NL" sz="1800" dirty="0"/>
+              <a:t>Ga naar </a:t>
+            </a:r>
+            <a:r>
+              <a:rPr lang="nl-NL" sz="1800" dirty="0" err="1"/>
+              <a:t>Repos</a:t>
+            </a:r>
+            <a:r>
+              <a:rPr lang="nl-NL" sz="1800" dirty="0"/>
+              <a:t>.</a:t>
+            </a:r>
+          </a:p>
+          <a:p>
+            <a:pPr marL="342900" indent="-342900">
+              <a:lnSpc>
+                <a:spcPct val="150000"/>
+              </a:lnSpc>
+              <a:spcBef>
+                <a:spcPts val="600"/>
+              </a:spcBef>
+              <a:buFont typeface="Arial" panose="020B0604020202020204" pitchFamily="34" charset="0"/>
+              <a:buAutoNum type="arabicPeriod"/>
+            </a:pPr>
+            <a:r>
+              <a:rPr lang="nl-NL" sz="1800" dirty="0"/>
+              <a:t>Klik op [Pull </a:t>
+            </a:r>
+            <a:r>
+              <a:rPr lang="nl-NL" sz="1800" dirty="0" err="1"/>
+              <a:t>requests</a:t>
+            </a:r>
+            <a:r>
+              <a:rPr lang="nl-NL" sz="1800" dirty="0"/>
+              <a:t>] in het menu.</a:t>
+            </a:r>
+          </a:p>
+          <a:p>
+            <a:pPr marL="342900" indent="-342900">
+              <a:lnSpc>
+                <a:spcPct val="150000"/>
+              </a:lnSpc>
+              <a:spcBef>
+                <a:spcPts val="600"/>
+              </a:spcBef>
+              <a:buFont typeface="Arial" panose="020B0604020202020204" pitchFamily="34" charset="0"/>
+              <a:buAutoNum type="arabicPeriod"/>
+            </a:pPr>
+            <a:r>
+              <a:rPr lang="nl-NL" sz="1800" dirty="0"/>
+              <a:t>Klik op [New pull </a:t>
+            </a:r>
+            <a:r>
+              <a:rPr lang="nl-NL" sz="1800" dirty="0" err="1"/>
+              <a:t>request</a:t>
+            </a:r>
+            <a:r>
+              <a:rPr lang="nl-NL" sz="1800" dirty="0"/>
+              <a:t>].</a:t>
+            </a:r>
+            <a:endParaRPr lang="nl-NL" sz="1800" dirty="0">
+              <a:latin typeface="Courier New" panose="02070309020205020404" pitchFamily="49" charset="0"/>
+              <a:cs typeface="Courier New" panose="02070309020205020404" pitchFamily="49" charset="0"/>
+            </a:endParaRPr>
+          </a:p>
+          <a:p>
+            <a:pPr marL="0" indent="0">
+              <a:lnSpc>
+                <a:spcPct val="150000"/>
+              </a:lnSpc>
+              <a:spcBef>
+                <a:spcPts val="600"/>
+              </a:spcBef>
+              <a:buFont typeface="Arial" panose="020B0604020202020204" pitchFamily="34" charset="0"/>
+              <a:buNone/>
+            </a:pPr>
+            <a:endParaRPr lang="nl-NL" sz="1800" dirty="0">
+              <a:latin typeface="Courier New" panose="02070309020205020404" pitchFamily="49" charset="0"/>
+              <a:cs typeface="Courier New" panose="02070309020205020404" pitchFamily="49" charset="0"/>
+            </a:endParaRPr>
+          </a:p>
+        </p:txBody>
+      </p:sp>
+      <p:pic>
+        <p:nvPicPr>
+          <p:cNvPr id="9" name="Picture 8" descr="A screenshot of a computer&#10;&#10;Description automatically generated">
+            <a:extLst>
+              <a:ext uri="{FF2B5EF4-FFF2-40B4-BE49-F238E27FC236}">
+                <a16:creationId xmlns:a16="http://schemas.microsoft.com/office/drawing/2014/main" id="{87772F24-7AB5-8674-6947-98F99E31FBEB}"/>
+              </a:ext>
+            </a:extLst>
+          </p:cNvPr>
+          <p:cNvPicPr>
+            <a:picLocks noChangeAspect="1"/>
+          </p:cNvPicPr>
+          <p:nvPr/>
+        </p:nvPicPr>
+        <p:blipFill>
+          <a:blip r:embed="rId3">
+            <a:extLst>
+              <a:ext uri="{28A0092B-C50C-407E-A947-70E740481C1C}">
+                <a14:useLocalDpi xmlns:a14="http://schemas.microsoft.com/office/drawing/2010/main" val="0"/>
+              </a:ext>
+            </a:extLst>
+          </a:blip>
+          <a:stretch>
+            <a:fillRect/>
+          </a:stretch>
+        </p:blipFill>
+        <p:spPr>
+          <a:xfrm>
+            <a:off x="5578716" y="1540293"/>
+            <a:ext cx="5775084" cy="3777413"/>
+          </a:xfrm>
+          <a:prstGeom prst="rect">
+            <a:avLst/>
+          </a:prstGeom>
+          <a:ln>
+            <a:solidFill>
+              <a:schemeClr val="tx1"/>
+            </a:solidFill>
+          </a:ln>
+        </p:spPr>
+      </p:pic>
+    </p:spTree>
+    <p:extLst>
+      <p:ext uri="{BB962C8B-B14F-4D97-AF65-F5344CB8AC3E}">
+        <p14:creationId xmlns:p14="http://schemas.microsoft.com/office/powerpoint/2010/main" val="2034741184"/>
+      </p:ext>
+    </p:extLst>
+  </p:cSld>
+  <p:clrMapOvr>
+    <a:masterClrMapping/>
+  </p:clrMapOvr>
+</p:sld>
+</file>
+
+<file path=ppt/slides/slide51.xml><?xml version="1.0" encoding="utf-8"?>
+<p:sld xmlns:a="http://schemas.openxmlformats.org/drawingml/2006/main" xmlns:r="http://schemas.openxmlformats.org/officeDocument/2006/relationships" xmlns:p="http://schemas.openxmlformats.org/presentationml/2006/main">
+  <p:cSld>
+    <p:spTree>
+      <p:nvGrpSpPr>
+        <p:cNvPr id="1" name="">
+          <a:extLst>
+            <a:ext uri="{FF2B5EF4-FFF2-40B4-BE49-F238E27FC236}">
               <a16:creationId xmlns:a16="http://schemas.microsoft.com/office/drawing/2014/main" id="{D18B04F9-24C5-70E7-FA3C-61FA72A5ECEF}"/>
             </a:ext>
           </a:extLst>
@@ -29894,7 +30644,7 @@
 </p:sld>
 </file>
 
-<file path=ppt/slides/slide51.xml><?xml version="1.0" encoding="utf-8"?>
+<file path=ppt/slides/slide52.xml><?xml version="1.0" encoding="utf-8"?>
 <p:sld xmlns:a="http://schemas.openxmlformats.org/drawingml/2006/main" xmlns:r="http://schemas.openxmlformats.org/officeDocument/2006/relationships" xmlns:p="http://schemas.openxmlformats.org/presentationml/2006/main">
   <p:cSld>
     <p:spTree>
@@ -30251,7 +31001,7 @@
 </p:sld>
 </file>
 
-<file path=ppt/slides/slide52.xml><?xml version="1.0" encoding="utf-8"?>
+<file path=ppt/slides/slide53.xml><?xml version="1.0" encoding="utf-8"?>
 <p:sld xmlns:a="http://schemas.openxmlformats.org/drawingml/2006/main" xmlns:r="http://schemas.openxmlformats.org/officeDocument/2006/relationships" xmlns:p="http://schemas.openxmlformats.org/presentationml/2006/main">
   <p:cSld>
     <p:spTree>
@@ -30620,7 +31370,7 @@
 </p:sld>
 </file>
 
-<file path=ppt/slides/slide53.xml><?xml version="1.0" encoding="utf-8"?>
+<file path=ppt/slides/slide54.xml><?xml version="1.0" encoding="utf-8"?>
 <p:sld xmlns:a="http://schemas.openxmlformats.org/drawingml/2006/main" xmlns:r="http://schemas.openxmlformats.org/officeDocument/2006/relationships" xmlns:p="http://schemas.openxmlformats.org/presentationml/2006/main">
   <p:cSld>
     <p:spTree>
@@ -30709,7 +31459,7 @@
 </p:sld>
 </file>
 
-<file path=ppt/slides/slide54.xml><?xml version="1.0" encoding="utf-8"?>
+<file path=ppt/slides/slide55.xml><?xml version="1.0" encoding="utf-8"?>
 <p:sld xmlns:a="http://schemas.openxmlformats.org/drawingml/2006/main" xmlns:r="http://schemas.openxmlformats.org/officeDocument/2006/relationships" xmlns:p="http://schemas.openxmlformats.org/presentationml/2006/main">
   <p:cSld>
     <p:spTree>
@@ -31234,7 +31984,7 @@
 </p:sld>
 </file>
 
-<file path=ppt/slides/slide55.xml><?xml version="1.0" encoding="utf-8"?>
+<file path=ppt/slides/slide56.xml><?xml version="1.0" encoding="utf-8"?>
 <p:sld xmlns:a="http://schemas.openxmlformats.org/drawingml/2006/main" xmlns:r="http://schemas.openxmlformats.org/officeDocument/2006/relationships" xmlns:p="http://schemas.openxmlformats.org/presentationml/2006/main">
   <p:cSld>
     <p:spTree>
@@ -31772,7 +32522,7 @@
 </p:sld>
 </file>
 
-<file path=ppt/slides/slide56.xml><?xml version="1.0" encoding="utf-8"?>
+<file path=ppt/slides/slide57.xml><?xml version="1.0" encoding="utf-8"?>
 <p:sld xmlns:a="http://schemas.openxmlformats.org/drawingml/2006/main" xmlns:r="http://schemas.openxmlformats.org/officeDocument/2006/relationships" xmlns:p="http://schemas.openxmlformats.org/presentationml/2006/main">
   <p:cSld>
     <p:spTree>
@@ -32253,7 +33003,7 @@
 </p:sld>
 </file>
 
-<file path=ppt/slides/slide57.xml><?xml version="1.0" encoding="utf-8"?>
+<file path=ppt/slides/slide58.xml><?xml version="1.0" encoding="utf-8"?>
 <p:sld xmlns:a="http://schemas.openxmlformats.org/drawingml/2006/main" xmlns:r="http://schemas.openxmlformats.org/officeDocument/2006/relationships" xmlns:p="http://schemas.openxmlformats.org/presentationml/2006/main">
   <p:cSld>
     <p:spTree>
@@ -32655,7 +33405,7 @@
 </p:sld>
 </file>
 
-<file path=ppt/slides/slide58.xml><?xml version="1.0" encoding="utf-8"?>
+<file path=ppt/slides/slide59.xml><?xml version="1.0" encoding="utf-8"?>
 <p:sld xmlns:a="http://schemas.openxmlformats.org/drawingml/2006/main" xmlns:r="http://schemas.openxmlformats.org/officeDocument/2006/relationships" xmlns:p="http://schemas.openxmlformats.org/presentationml/2006/main">
   <p:cSld>
     <p:spTree>
@@ -32735,589 +33485,6 @@
     <p:extLst>
       <p:ext uri="{BB962C8B-B14F-4D97-AF65-F5344CB8AC3E}">
         <p14:creationId xmlns:p14="http://schemas.microsoft.com/office/powerpoint/2010/main" val="631291868"/>
-      </p:ext>
-    </p:extLst>
-  </p:cSld>
-  <p:clrMapOvr>
-    <a:masterClrMapping/>
-  </p:clrMapOvr>
-</p:sld>
-</file>
-
-<file path=ppt/slides/slide59.xml><?xml version="1.0" encoding="utf-8"?>
-<p:sld xmlns:a="http://schemas.openxmlformats.org/drawingml/2006/main" xmlns:r="http://schemas.openxmlformats.org/officeDocument/2006/relationships" xmlns:p="http://schemas.openxmlformats.org/presentationml/2006/main">
-  <p:cSld>
-    <p:spTree>
-      <p:nvGrpSpPr>
-        <p:cNvPr id="1" name="">
-          <a:extLst>
-            <a:ext uri="{FF2B5EF4-FFF2-40B4-BE49-F238E27FC236}">
-              <a16:creationId xmlns:a16="http://schemas.microsoft.com/office/drawing/2014/main" id="{F36B35B7-4993-ED63-E632-F6E1AE4B38C3}"/>
-            </a:ext>
-          </a:extLst>
-        </p:cNvPr>
-        <p:cNvGrpSpPr/>
-        <p:nvPr/>
-      </p:nvGrpSpPr>
-      <p:grpSpPr>
-        <a:xfrm>
-          <a:off x="0" y="0"/>
-          <a:ext cx="0" cy="0"/>
-          <a:chOff x="0" y="0"/>
-          <a:chExt cx="0" cy="0"/>
-        </a:xfrm>
-      </p:grpSpPr>
-      <p:sp>
-        <p:nvSpPr>
-          <p:cNvPr id="2" name="Title 1">
-            <a:extLst>
-              <a:ext uri="{FF2B5EF4-FFF2-40B4-BE49-F238E27FC236}">
-                <a16:creationId xmlns:a16="http://schemas.microsoft.com/office/drawing/2014/main" id="{D4A11133-C749-2482-5CCD-B1321F229085}"/>
-              </a:ext>
-            </a:extLst>
-          </p:cNvPr>
-          <p:cNvSpPr>
-            <a:spLocks noGrp="1"/>
-          </p:cNvSpPr>
-          <p:nvPr>
-            <p:ph type="title"/>
-          </p:nvPr>
-        </p:nvSpPr>
-        <p:spPr>
-          <a:xfrm>
-            <a:off x="838200" y="365126"/>
-            <a:ext cx="10515600" cy="718608"/>
-          </a:xfrm>
-        </p:spPr>
-        <p:txBody>
-          <a:bodyPr>
-            <a:normAutofit/>
-          </a:bodyPr>
-          <a:lstStyle/>
-          <a:p>
-            <a:r>
-              <a:rPr lang="nl-NL" sz="3600" dirty="0" err="1"/>
-              <a:t>Branch</a:t>
-            </a:r>
-            <a:r>
-              <a:rPr lang="nl-NL" sz="3600" dirty="0"/>
-              <a:t> </a:t>
-            </a:r>
-            <a:r>
-              <a:rPr lang="nl-NL" sz="3600" dirty="0" err="1"/>
-              <a:t>Policies</a:t>
-            </a:r>
-            <a:endParaRPr lang="nl-NL" sz="3600" noProof="0" dirty="0"/>
-          </a:p>
-        </p:txBody>
-      </p:sp>
-      <p:sp>
-        <p:nvSpPr>
-          <p:cNvPr id="15" name="Content Placeholder 2">
-            <a:extLst>
-              <a:ext uri="{FF2B5EF4-FFF2-40B4-BE49-F238E27FC236}">
-                <a16:creationId xmlns:a16="http://schemas.microsoft.com/office/drawing/2014/main" id="{74B3ADDA-62C6-F61E-AC4A-99FD10D09AF5}"/>
-              </a:ext>
-            </a:extLst>
-          </p:cNvPr>
-          <p:cNvSpPr txBox="1">
-            <a:spLocks/>
-          </p:cNvSpPr>
-          <p:nvPr/>
-        </p:nvSpPr>
-        <p:spPr>
-          <a:xfrm>
-            <a:off x="838199" y="1456267"/>
-            <a:ext cx="4548189" cy="4720696"/>
-          </a:xfrm>
-          <a:prstGeom prst="rect">
-            <a:avLst/>
-          </a:prstGeom>
-        </p:spPr>
-        <p:txBody>
-          <a:bodyPr vert="horz" lIns="91440" tIns="45720" rIns="91440" bIns="45720" rtlCol="0">
-            <a:noAutofit/>
-          </a:bodyPr>
-          <a:lstStyle>
-            <a:lvl1pPr marL="228600" indent="-228600" algn="l" defTabSz="914400" rtl="0" eaLnBrk="1" latinLnBrk="0" hangingPunct="1">
-              <a:lnSpc>
-                <a:spcPct val="90000"/>
-              </a:lnSpc>
-              <a:spcBef>
-                <a:spcPts val="1000"/>
-              </a:spcBef>
-              <a:buFont typeface="Arial" panose="020B0604020202020204" pitchFamily="34" charset="0"/>
-              <a:buChar char="•"/>
-              <a:defRPr sz="2800" kern="1200">
-                <a:solidFill>
-                  <a:schemeClr val="tx1"/>
-                </a:solidFill>
-                <a:latin typeface="+mn-lt"/>
-                <a:ea typeface="+mn-ea"/>
-                <a:cs typeface="+mn-cs"/>
-              </a:defRPr>
-            </a:lvl1pPr>
-            <a:lvl2pPr marL="685800" indent="-228600" algn="l" defTabSz="914400" rtl="0" eaLnBrk="1" latinLnBrk="0" hangingPunct="1">
-              <a:lnSpc>
-                <a:spcPct val="90000"/>
-              </a:lnSpc>
-              <a:spcBef>
-                <a:spcPts val="500"/>
-              </a:spcBef>
-              <a:buFont typeface="Arial" panose="020B0604020202020204" pitchFamily="34" charset="0"/>
-              <a:buChar char="•"/>
-              <a:defRPr sz="2400" kern="1200">
-                <a:solidFill>
-                  <a:schemeClr val="tx1"/>
-                </a:solidFill>
-                <a:latin typeface="+mn-lt"/>
-                <a:ea typeface="+mn-ea"/>
-                <a:cs typeface="+mn-cs"/>
-              </a:defRPr>
-            </a:lvl2pPr>
-            <a:lvl3pPr marL="1143000" indent="-228600" algn="l" defTabSz="914400" rtl="0" eaLnBrk="1" latinLnBrk="0" hangingPunct="1">
-              <a:lnSpc>
-                <a:spcPct val="90000"/>
-              </a:lnSpc>
-              <a:spcBef>
-                <a:spcPts val="500"/>
-              </a:spcBef>
-              <a:buFont typeface="Arial" panose="020B0604020202020204" pitchFamily="34" charset="0"/>
-              <a:buChar char="•"/>
-              <a:defRPr sz="2000" kern="1200">
-                <a:solidFill>
-                  <a:schemeClr val="tx1"/>
-                </a:solidFill>
-                <a:latin typeface="+mn-lt"/>
-                <a:ea typeface="+mn-ea"/>
-                <a:cs typeface="+mn-cs"/>
-              </a:defRPr>
-            </a:lvl3pPr>
-            <a:lvl4pPr marL="1600200" indent="-228600" algn="l" defTabSz="914400" rtl="0" eaLnBrk="1" latinLnBrk="0" hangingPunct="1">
-              <a:lnSpc>
-                <a:spcPct val="90000"/>
-              </a:lnSpc>
-              <a:spcBef>
-                <a:spcPts val="500"/>
-              </a:spcBef>
-              <a:buFont typeface="Arial" panose="020B0604020202020204" pitchFamily="34" charset="0"/>
-              <a:buChar char="•"/>
-              <a:defRPr sz="1800" kern="1200">
-                <a:solidFill>
-                  <a:schemeClr val="tx1"/>
-                </a:solidFill>
-                <a:latin typeface="+mn-lt"/>
-                <a:ea typeface="+mn-ea"/>
-                <a:cs typeface="+mn-cs"/>
-              </a:defRPr>
-            </a:lvl4pPr>
-            <a:lvl5pPr marL="2057400" indent="-228600" algn="l" defTabSz="914400" rtl="0" eaLnBrk="1" latinLnBrk="0" hangingPunct="1">
-              <a:lnSpc>
-                <a:spcPct val="90000"/>
-              </a:lnSpc>
-              <a:spcBef>
-                <a:spcPts val="500"/>
-              </a:spcBef>
-              <a:buFont typeface="Arial" panose="020B0604020202020204" pitchFamily="34" charset="0"/>
-              <a:buChar char="•"/>
-              <a:defRPr sz="1800" kern="1200">
-                <a:solidFill>
-                  <a:schemeClr val="tx1"/>
-                </a:solidFill>
-                <a:latin typeface="+mn-lt"/>
-                <a:ea typeface="+mn-ea"/>
-                <a:cs typeface="+mn-cs"/>
-              </a:defRPr>
-            </a:lvl5pPr>
-            <a:lvl6pPr marL="2514600" indent="-228600" algn="l" defTabSz="914400" rtl="0" eaLnBrk="1" latinLnBrk="0" hangingPunct="1">
-              <a:lnSpc>
-                <a:spcPct val="90000"/>
-              </a:lnSpc>
-              <a:spcBef>
-                <a:spcPts val="500"/>
-              </a:spcBef>
-              <a:buFont typeface="Arial" panose="020B0604020202020204" pitchFamily="34" charset="0"/>
-              <a:buChar char="•"/>
-              <a:defRPr sz="1800" kern="1200">
-                <a:solidFill>
-                  <a:schemeClr val="tx1"/>
-                </a:solidFill>
-                <a:latin typeface="+mn-lt"/>
-                <a:ea typeface="+mn-ea"/>
-                <a:cs typeface="+mn-cs"/>
-              </a:defRPr>
-            </a:lvl6pPr>
-            <a:lvl7pPr marL="2971800" indent="-228600" algn="l" defTabSz="914400" rtl="0" eaLnBrk="1" latinLnBrk="0" hangingPunct="1">
-              <a:lnSpc>
-                <a:spcPct val="90000"/>
-              </a:lnSpc>
-              <a:spcBef>
-                <a:spcPts val="500"/>
-              </a:spcBef>
-              <a:buFont typeface="Arial" panose="020B0604020202020204" pitchFamily="34" charset="0"/>
-              <a:buChar char="•"/>
-              <a:defRPr sz="1800" kern="1200">
-                <a:solidFill>
-                  <a:schemeClr val="tx1"/>
-                </a:solidFill>
-                <a:latin typeface="+mn-lt"/>
-                <a:ea typeface="+mn-ea"/>
-                <a:cs typeface="+mn-cs"/>
-              </a:defRPr>
-            </a:lvl7pPr>
-            <a:lvl8pPr marL="3429000" indent="-228600" algn="l" defTabSz="914400" rtl="0" eaLnBrk="1" latinLnBrk="0" hangingPunct="1">
-              <a:lnSpc>
-                <a:spcPct val="90000"/>
-              </a:lnSpc>
-              <a:spcBef>
-                <a:spcPts val="500"/>
-              </a:spcBef>
-              <a:buFont typeface="Arial" panose="020B0604020202020204" pitchFamily="34" charset="0"/>
-              <a:buChar char="•"/>
-              <a:defRPr sz="1800" kern="1200">
-                <a:solidFill>
-                  <a:schemeClr val="tx1"/>
-                </a:solidFill>
-                <a:latin typeface="+mn-lt"/>
-                <a:ea typeface="+mn-ea"/>
-                <a:cs typeface="+mn-cs"/>
-              </a:defRPr>
-            </a:lvl8pPr>
-            <a:lvl9pPr marL="3886200" indent="-228600" algn="l" defTabSz="914400" rtl="0" eaLnBrk="1" latinLnBrk="0" hangingPunct="1">
-              <a:lnSpc>
-                <a:spcPct val="90000"/>
-              </a:lnSpc>
-              <a:spcBef>
-                <a:spcPts val="500"/>
-              </a:spcBef>
-              <a:buFont typeface="Arial" panose="020B0604020202020204" pitchFamily="34" charset="0"/>
-              <a:buChar char="•"/>
-              <a:defRPr sz="1800" kern="1200">
-                <a:solidFill>
-                  <a:schemeClr val="tx1"/>
-                </a:solidFill>
-                <a:latin typeface="+mn-lt"/>
-                <a:ea typeface="+mn-ea"/>
-                <a:cs typeface="+mn-cs"/>
-              </a:defRPr>
-            </a:lvl9pPr>
-          </a:lstStyle>
-          <a:p>
-            <a:pPr marL="0" indent="0">
-              <a:lnSpc>
-                <a:spcPct val="100000"/>
-              </a:lnSpc>
-              <a:spcBef>
-                <a:spcPts val="600"/>
-              </a:spcBef>
-              <a:buFont typeface="Arial" panose="020B0604020202020204" pitchFamily="34" charset="0"/>
-              <a:buNone/>
-            </a:pPr>
-            <a:r>
-              <a:rPr lang="nl-NL" sz="1800" b="1" dirty="0">
-                <a:cs typeface="Courier New" panose="02070309020205020404" pitchFamily="49" charset="0"/>
-              </a:rPr>
-              <a:t>Instellen via repository:</a:t>
-            </a:r>
-          </a:p>
-          <a:p>
-            <a:pPr>
-              <a:lnSpc>
-                <a:spcPct val="100000"/>
-              </a:lnSpc>
-              <a:spcBef>
-                <a:spcPts val="600"/>
-              </a:spcBef>
-              <a:buFontTx/>
-              <a:buChar char="-"/>
-            </a:pPr>
-            <a:r>
-              <a:rPr lang="nl-NL" sz="1800" dirty="0">
-                <a:cs typeface="Courier New" panose="02070309020205020404" pitchFamily="49" charset="0"/>
-              </a:rPr>
-              <a:t>Ga naar [Branches].</a:t>
-            </a:r>
-          </a:p>
-          <a:p>
-            <a:pPr>
-              <a:lnSpc>
-                <a:spcPct val="100000"/>
-              </a:lnSpc>
-              <a:spcBef>
-                <a:spcPts val="600"/>
-              </a:spcBef>
-              <a:buFontTx/>
-              <a:buChar char="-"/>
-            </a:pPr>
-            <a:r>
-              <a:rPr lang="nl-NL" sz="1800" dirty="0">
-                <a:cs typeface="Courier New" panose="02070309020205020404" pitchFamily="49" charset="0"/>
-              </a:rPr>
-              <a:t>Klik op [</a:t>
-            </a:r>
-            <a:r>
-              <a:rPr lang="nl-NL" sz="1800" dirty="0">
-                <a:latin typeface="Courier New" panose="02070309020205020404" pitchFamily="49" charset="0"/>
-                <a:cs typeface="Courier New" panose="02070309020205020404" pitchFamily="49" charset="0"/>
-              </a:rPr>
-              <a:t>⁞</a:t>
-            </a:r>
-            <a:r>
-              <a:rPr lang="nl-NL" sz="1800" dirty="0">
-                <a:cs typeface="Courier New" panose="02070309020205020404" pitchFamily="49" charset="0"/>
-              </a:rPr>
-              <a:t>] achter een </a:t>
-            </a:r>
-            <a:r>
-              <a:rPr lang="nl-NL" sz="1800" dirty="0" err="1">
-                <a:cs typeface="Courier New" panose="02070309020205020404" pitchFamily="49" charset="0"/>
-              </a:rPr>
-              <a:t>branch</a:t>
-            </a:r>
-            <a:r>
-              <a:rPr lang="nl-NL" sz="1800" dirty="0">
-                <a:cs typeface="Courier New" panose="02070309020205020404" pitchFamily="49" charset="0"/>
-              </a:rPr>
-              <a:t>.</a:t>
-            </a:r>
-          </a:p>
-          <a:p>
-            <a:pPr>
-              <a:lnSpc>
-                <a:spcPct val="100000"/>
-              </a:lnSpc>
-              <a:spcBef>
-                <a:spcPts val="600"/>
-              </a:spcBef>
-              <a:buFontTx/>
-              <a:buChar char="-"/>
-            </a:pPr>
-            <a:r>
-              <a:rPr lang="nl-NL" sz="1800" dirty="0">
-                <a:cs typeface="Courier New" panose="02070309020205020404" pitchFamily="49" charset="0"/>
-              </a:rPr>
-              <a:t>Selecteer [</a:t>
-            </a:r>
-            <a:r>
-              <a:rPr lang="nl-NL" sz="1800" dirty="0" err="1">
-                <a:cs typeface="Courier New" panose="02070309020205020404" pitchFamily="49" charset="0"/>
-              </a:rPr>
-              <a:t>Branch</a:t>
-            </a:r>
-            <a:r>
-              <a:rPr lang="nl-NL" sz="1800" dirty="0">
-                <a:cs typeface="Courier New" panose="02070309020205020404" pitchFamily="49" charset="0"/>
-              </a:rPr>
-              <a:t> </a:t>
-            </a:r>
-            <a:r>
-              <a:rPr lang="nl-NL" sz="1800" dirty="0" err="1">
-                <a:cs typeface="Courier New" panose="02070309020205020404" pitchFamily="49" charset="0"/>
-              </a:rPr>
-              <a:t>Policies</a:t>
-            </a:r>
-            <a:r>
-              <a:rPr lang="nl-NL" sz="1800" dirty="0">
-                <a:cs typeface="Courier New" panose="02070309020205020404" pitchFamily="49" charset="0"/>
-              </a:rPr>
-              <a:t>]</a:t>
-            </a:r>
-          </a:p>
-          <a:p>
-            <a:pPr marL="0" indent="0">
-              <a:lnSpc>
-                <a:spcPct val="100000"/>
-              </a:lnSpc>
-              <a:spcBef>
-                <a:spcPts val="600"/>
-              </a:spcBef>
-              <a:buNone/>
-            </a:pPr>
-            <a:endParaRPr lang="nl-NL" sz="1800" dirty="0">
-              <a:cs typeface="Courier New" panose="02070309020205020404" pitchFamily="49" charset="0"/>
-            </a:endParaRPr>
-          </a:p>
-          <a:p>
-            <a:pPr marL="0" indent="0">
-              <a:lnSpc>
-                <a:spcPct val="100000"/>
-              </a:lnSpc>
-              <a:spcBef>
-                <a:spcPts val="600"/>
-              </a:spcBef>
-              <a:buNone/>
-            </a:pPr>
-            <a:r>
-              <a:rPr lang="nl-NL" sz="1800" b="1" dirty="0">
-                <a:cs typeface="Courier New" panose="02070309020205020404" pitchFamily="49" charset="0"/>
-              </a:rPr>
-              <a:t>Instellen via Project </a:t>
-            </a:r>
-            <a:r>
-              <a:rPr lang="nl-NL" sz="1800" b="1" dirty="0" err="1">
-                <a:cs typeface="Courier New" panose="02070309020205020404" pitchFamily="49" charset="0"/>
-              </a:rPr>
-              <a:t>settings</a:t>
-            </a:r>
-            <a:r>
-              <a:rPr lang="nl-NL" sz="1800" b="1" dirty="0">
-                <a:cs typeface="Courier New" panose="02070309020205020404" pitchFamily="49" charset="0"/>
-              </a:rPr>
-              <a:t>:</a:t>
-            </a:r>
-          </a:p>
-          <a:p>
-            <a:pPr>
-              <a:lnSpc>
-                <a:spcPct val="100000"/>
-              </a:lnSpc>
-              <a:spcBef>
-                <a:spcPts val="600"/>
-              </a:spcBef>
-              <a:buFontTx/>
-              <a:buChar char="-"/>
-            </a:pPr>
-            <a:r>
-              <a:rPr lang="nl-NL" sz="1800" dirty="0">
-                <a:cs typeface="Courier New" panose="02070309020205020404" pitchFamily="49" charset="0"/>
-              </a:rPr>
-              <a:t>Ga naar [Repositories].</a:t>
-            </a:r>
-          </a:p>
-          <a:p>
-            <a:pPr>
-              <a:lnSpc>
-                <a:spcPct val="100000"/>
-              </a:lnSpc>
-              <a:spcBef>
-                <a:spcPts val="600"/>
-              </a:spcBef>
-              <a:buFontTx/>
-              <a:buChar char="-"/>
-            </a:pPr>
-            <a:r>
-              <a:rPr lang="nl-NL" sz="1800" dirty="0">
-                <a:cs typeface="Courier New" panose="02070309020205020404" pitchFamily="49" charset="0"/>
-              </a:rPr>
-              <a:t>Ga naar [</a:t>
-            </a:r>
-            <a:r>
-              <a:rPr lang="nl-NL" sz="1800" dirty="0" err="1">
-                <a:cs typeface="Courier New" panose="02070309020205020404" pitchFamily="49" charset="0"/>
-              </a:rPr>
-              <a:t>Policies</a:t>
-            </a:r>
-            <a:r>
-              <a:rPr lang="nl-NL" sz="1800" dirty="0">
-                <a:cs typeface="Courier New" panose="02070309020205020404" pitchFamily="49" charset="0"/>
-              </a:rPr>
-              <a:t>].</a:t>
-            </a:r>
-          </a:p>
-          <a:p>
-            <a:pPr>
-              <a:lnSpc>
-                <a:spcPct val="100000"/>
-              </a:lnSpc>
-              <a:spcBef>
-                <a:spcPts val="600"/>
-              </a:spcBef>
-              <a:buFontTx/>
-              <a:buChar char="-"/>
-            </a:pPr>
-            <a:r>
-              <a:rPr lang="nl-NL" sz="1800" dirty="0">
-                <a:cs typeface="Courier New" panose="02070309020205020404" pitchFamily="49" charset="0"/>
-              </a:rPr>
-              <a:t>Klik onderaan op [</a:t>
-            </a:r>
-            <a:r>
-              <a:rPr lang="nl-NL" sz="1800" dirty="0" err="1">
-                <a:cs typeface="Courier New" panose="02070309020205020404" pitchFamily="49" charset="0"/>
-              </a:rPr>
-              <a:t>Branch</a:t>
-            </a:r>
-            <a:r>
-              <a:rPr lang="nl-NL" sz="1800" dirty="0">
-                <a:cs typeface="Courier New" panose="02070309020205020404" pitchFamily="49" charset="0"/>
-              </a:rPr>
-              <a:t> </a:t>
-            </a:r>
-            <a:r>
-              <a:rPr lang="nl-NL" sz="1800" dirty="0" err="1">
-                <a:cs typeface="Courier New" panose="02070309020205020404" pitchFamily="49" charset="0"/>
-              </a:rPr>
-              <a:t>Policies</a:t>
-            </a:r>
-            <a:r>
-              <a:rPr lang="nl-NL" sz="1800" dirty="0">
-                <a:cs typeface="Courier New" panose="02070309020205020404" pitchFamily="49" charset="0"/>
-              </a:rPr>
-              <a:t>].</a:t>
-            </a:r>
-          </a:p>
-          <a:p>
-            <a:pPr marL="0" indent="0">
-              <a:lnSpc>
-                <a:spcPct val="100000"/>
-              </a:lnSpc>
-              <a:spcBef>
-                <a:spcPts val="600"/>
-              </a:spcBef>
-              <a:buFont typeface="Arial" panose="020B0604020202020204" pitchFamily="34" charset="0"/>
-              <a:buNone/>
-            </a:pPr>
-            <a:endParaRPr lang="nl-NL" sz="1800" dirty="0">
-              <a:cs typeface="Courier New" panose="02070309020205020404" pitchFamily="49" charset="0"/>
-            </a:endParaRPr>
-          </a:p>
-        </p:txBody>
-      </p:sp>
-      <p:pic>
-        <p:nvPicPr>
-          <p:cNvPr id="5" name="Picture 4" descr="A screenshot of a computer&#10;&#10;Description automatically generated">
-            <a:extLst>
-              <a:ext uri="{FF2B5EF4-FFF2-40B4-BE49-F238E27FC236}">
-                <a16:creationId xmlns:a16="http://schemas.microsoft.com/office/drawing/2014/main" id="{3C804938-29B9-170E-3018-FFFFE4144617}"/>
-              </a:ext>
-            </a:extLst>
-          </p:cNvPr>
-          <p:cNvPicPr>
-            <a:picLocks noChangeAspect="1"/>
-          </p:cNvPicPr>
-          <p:nvPr/>
-        </p:nvPicPr>
-        <p:blipFill>
-          <a:blip r:embed="rId3">
-            <a:extLst>
-              <a:ext uri="{28A0092B-C50C-407E-A947-70E740481C1C}">
-                <a14:useLocalDpi xmlns:a14="http://schemas.microsoft.com/office/drawing/2010/main" val="0"/>
-              </a:ext>
-            </a:extLst>
-          </a:blip>
-          <a:stretch>
-            <a:fillRect/>
-          </a:stretch>
-        </p:blipFill>
-        <p:spPr>
-          <a:xfrm>
-            <a:off x="6169602" y="1456267"/>
-            <a:ext cx="5184198" cy="4412705"/>
-          </a:xfrm>
-          <a:prstGeom prst="rect">
-            <a:avLst/>
-          </a:prstGeom>
-          <a:ln>
-            <a:solidFill>
-              <a:schemeClr val="tx1"/>
-            </a:solidFill>
-          </a:ln>
-        </p:spPr>
-      </p:pic>
-    </p:spTree>
-    <p:extLst>
-      <p:ext uri="{BB962C8B-B14F-4D97-AF65-F5344CB8AC3E}">
-        <p14:creationId xmlns:p14="http://schemas.microsoft.com/office/powerpoint/2010/main" val="240145038"/>
       </p:ext>
     </p:extLst>
   </p:cSld>
@@ -34181,6 +34348,589 @@
         <p:cNvPr id="1" name="">
           <a:extLst>
             <a:ext uri="{FF2B5EF4-FFF2-40B4-BE49-F238E27FC236}">
+              <a16:creationId xmlns:a16="http://schemas.microsoft.com/office/drawing/2014/main" id="{F36B35B7-4993-ED63-E632-F6E1AE4B38C3}"/>
+            </a:ext>
+          </a:extLst>
+        </p:cNvPr>
+        <p:cNvGrpSpPr/>
+        <p:nvPr/>
+      </p:nvGrpSpPr>
+      <p:grpSpPr>
+        <a:xfrm>
+          <a:off x="0" y="0"/>
+          <a:ext cx="0" cy="0"/>
+          <a:chOff x="0" y="0"/>
+          <a:chExt cx="0" cy="0"/>
+        </a:xfrm>
+      </p:grpSpPr>
+      <p:sp>
+        <p:nvSpPr>
+          <p:cNvPr id="2" name="Title 1">
+            <a:extLst>
+              <a:ext uri="{FF2B5EF4-FFF2-40B4-BE49-F238E27FC236}">
+                <a16:creationId xmlns:a16="http://schemas.microsoft.com/office/drawing/2014/main" id="{D4A11133-C749-2482-5CCD-B1321F229085}"/>
+              </a:ext>
+            </a:extLst>
+          </p:cNvPr>
+          <p:cNvSpPr>
+            <a:spLocks noGrp="1"/>
+          </p:cNvSpPr>
+          <p:nvPr>
+            <p:ph type="title"/>
+          </p:nvPr>
+        </p:nvSpPr>
+        <p:spPr>
+          <a:xfrm>
+            <a:off x="838200" y="365126"/>
+            <a:ext cx="10515600" cy="718608"/>
+          </a:xfrm>
+        </p:spPr>
+        <p:txBody>
+          <a:bodyPr>
+            <a:normAutofit/>
+          </a:bodyPr>
+          <a:lstStyle/>
+          <a:p>
+            <a:r>
+              <a:rPr lang="nl-NL" sz="3600" dirty="0" err="1"/>
+              <a:t>Branch</a:t>
+            </a:r>
+            <a:r>
+              <a:rPr lang="nl-NL" sz="3600" dirty="0"/>
+              <a:t> </a:t>
+            </a:r>
+            <a:r>
+              <a:rPr lang="nl-NL" sz="3600" dirty="0" err="1"/>
+              <a:t>Policies</a:t>
+            </a:r>
+            <a:endParaRPr lang="nl-NL" sz="3600" noProof="0" dirty="0"/>
+          </a:p>
+        </p:txBody>
+      </p:sp>
+      <p:sp>
+        <p:nvSpPr>
+          <p:cNvPr id="15" name="Content Placeholder 2">
+            <a:extLst>
+              <a:ext uri="{FF2B5EF4-FFF2-40B4-BE49-F238E27FC236}">
+                <a16:creationId xmlns:a16="http://schemas.microsoft.com/office/drawing/2014/main" id="{74B3ADDA-62C6-F61E-AC4A-99FD10D09AF5}"/>
+              </a:ext>
+            </a:extLst>
+          </p:cNvPr>
+          <p:cNvSpPr txBox="1">
+            <a:spLocks/>
+          </p:cNvSpPr>
+          <p:nvPr/>
+        </p:nvSpPr>
+        <p:spPr>
+          <a:xfrm>
+            <a:off x="838199" y="1456267"/>
+            <a:ext cx="4548189" cy="4720696"/>
+          </a:xfrm>
+          <a:prstGeom prst="rect">
+            <a:avLst/>
+          </a:prstGeom>
+        </p:spPr>
+        <p:txBody>
+          <a:bodyPr vert="horz" lIns="91440" tIns="45720" rIns="91440" bIns="45720" rtlCol="0">
+            <a:noAutofit/>
+          </a:bodyPr>
+          <a:lstStyle>
+            <a:lvl1pPr marL="228600" indent="-228600" algn="l" defTabSz="914400" rtl="0" eaLnBrk="1" latinLnBrk="0" hangingPunct="1">
+              <a:lnSpc>
+                <a:spcPct val="90000"/>
+              </a:lnSpc>
+              <a:spcBef>
+                <a:spcPts val="1000"/>
+              </a:spcBef>
+              <a:buFont typeface="Arial" panose="020B0604020202020204" pitchFamily="34" charset="0"/>
+              <a:buChar char="•"/>
+              <a:defRPr sz="2800" kern="1200">
+                <a:solidFill>
+                  <a:schemeClr val="tx1"/>
+                </a:solidFill>
+                <a:latin typeface="+mn-lt"/>
+                <a:ea typeface="+mn-ea"/>
+                <a:cs typeface="+mn-cs"/>
+              </a:defRPr>
+            </a:lvl1pPr>
+            <a:lvl2pPr marL="685800" indent="-228600" algn="l" defTabSz="914400" rtl="0" eaLnBrk="1" latinLnBrk="0" hangingPunct="1">
+              <a:lnSpc>
+                <a:spcPct val="90000"/>
+              </a:lnSpc>
+              <a:spcBef>
+                <a:spcPts val="500"/>
+              </a:spcBef>
+              <a:buFont typeface="Arial" panose="020B0604020202020204" pitchFamily="34" charset="0"/>
+              <a:buChar char="•"/>
+              <a:defRPr sz="2400" kern="1200">
+                <a:solidFill>
+                  <a:schemeClr val="tx1"/>
+                </a:solidFill>
+                <a:latin typeface="+mn-lt"/>
+                <a:ea typeface="+mn-ea"/>
+                <a:cs typeface="+mn-cs"/>
+              </a:defRPr>
+            </a:lvl2pPr>
+            <a:lvl3pPr marL="1143000" indent="-228600" algn="l" defTabSz="914400" rtl="0" eaLnBrk="1" latinLnBrk="0" hangingPunct="1">
+              <a:lnSpc>
+                <a:spcPct val="90000"/>
+              </a:lnSpc>
+              <a:spcBef>
+                <a:spcPts val="500"/>
+              </a:spcBef>
+              <a:buFont typeface="Arial" panose="020B0604020202020204" pitchFamily="34" charset="0"/>
+              <a:buChar char="•"/>
+              <a:defRPr sz="2000" kern="1200">
+                <a:solidFill>
+                  <a:schemeClr val="tx1"/>
+                </a:solidFill>
+                <a:latin typeface="+mn-lt"/>
+                <a:ea typeface="+mn-ea"/>
+                <a:cs typeface="+mn-cs"/>
+              </a:defRPr>
+            </a:lvl3pPr>
+            <a:lvl4pPr marL="1600200" indent="-228600" algn="l" defTabSz="914400" rtl="0" eaLnBrk="1" latinLnBrk="0" hangingPunct="1">
+              <a:lnSpc>
+                <a:spcPct val="90000"/>
+              </a:lnSpc>
+              <a:spcBef>
+                <a:spcPts val="500"/>
+              </a:spcBef>
+              <a:buFont typeface="Arial" panose="020B0604020202020204" pitchFamily="34" charset="0"/>
+              <a:buChar char="•"/>
+              <a:defRPr sz="1800" kern="1200">
+                <a:solidFill>
+                  <a:schemeClr val="tx1"/>
+                </a:solidFill>
+                <a:latin typeface="+mn-lt"/>
+                <a:ea typeface="+mn-ea"/>
+                <a:cs typeface="+mn-cs"/>
+              </a:defRPr>
+            </a:lvl4pPr>
+            <a:lvl5pPr marL="2057400" indent="-228600" algn="l" defTabSz="914400" rtl="0" eaLnBrk="1" latinLnBrk="0" hangingPunct="1">
+              <a:lnSpc>
+                <a:spcPct val="90000"/>
+              </a:lnSpc>
+              <a:spcBef>
+                <a:spcPts val="500"/>
+              </a:spcBef>
+              <a:buFont typeface="Arial" panose="020B0604020202020204" pitchFamily="34" charset="0"/>
+              <a:buChar char="•"/>
+              <a:defRPr sz="1800" kern="1200">
+                <a:solidFill>
+                  <a:schemeClr val="tx1"/>
+                </a:solidFill>
+                <a:latin typeface="+mn-lt"/>
+                <a:ea typeface="+mn-ea"/>
+                <a:cs typeface="+mn-cs"/>
+              </a:defRPr>
+            </a:lvl5pPr>
+            <a:lvl6pPr marL="2514600" indent="-228600" algn="l" defTabSz="914400" rtl="0" eaLnBrk="1" latinLnBrk="0" hangingPunct="1">
+              <a:lnSpc>
+                <a:spcPct val="90000"/>
+              </a:lnSpc>
+              <a:spcBef>
+                <a:spcPts val="500"/>
+              </a:spcBef>
+              <a:buFont typeface="Arial" panose="020B0604020202020204" pitchFamily="34" charset="0"/>
+              <a:buChar char="•"/>
+              <a:defRPr sz="1800" kern="1200">
+                <a:solidFill>
+                  <a:schemeClr val="tx1"/>
+                </a:solidFill>
+                <a:latin typeface="+mn-lt"/>
+                <a:ea typeface="+mn-ea"/>
+                <a:cs typeface="+mn-cs"/>
+              </a:defRPr>
+            </a:lvl6pPr>
+            <a:lvl7pPr marL="2971800" indent="-228600" algn="l" defTabSz="914400" rtl="0" eaLnBrk="1" latinLnBrk="0" hangingPunct="1">
+              <a:lnSpc>
+                <a:spcPct val="90000"/>
+              </a:lnSpc>
+              <a:spcBef>
+                <a:spcPts val="500"/>
+              </a:spcBef>
+              <a:buFont typeface="Arial" panose="020B0604020202020204" pitchFamily="34" charset="0"/>
+              <a:buChar char="•"/>
+              <a:defRPr sz="1800" kern="1200">
+                <a:solidFill>
+                  <a:schemeClr val="tx1"/>
+                </a:solidFill>
+                <a:latin typeface="+mn-lt"/>
+                <a:ea typeface="+mn-ea"/>
+                <a:cs typeface="+mn-cs"/>
+              </a:defRPr>
+            </a:lvl7pPr>
+            <a:lvl8pPr marL="3429000" indent="-228600" algn="l" defTabSz="914400" rtl="0" eaLnBrk="1" latinLnBrk="0" hangingPunct="1">
+              <a:lnSpc>
+                <a:spcPct val="90000"/>
+              </a:lnSpc>
+              <a:spcBef>
+                <a:spcPts val="500"/>
+              </a:spcBef>
+              <a:buFont typeface="Arial" panose="020B0604020202020204" pitchFamily="34" charset="0"/>
+              <a:buChar char="•"/>
+              <a:defRPr sz="1800" kern="1200">
+                <a:solidFill>
+                  <a:schemeClr val="tx1"/>
+                </a:solidFill>
+                <a:latin typeface="+mn-lt"/>
+                <a:ea typeface="+mn-ea"/>
+                <a:cs typeface="+mn-cs"/>
+              </a:defRPr>
+            </a:lvl8pPr>
+            <a:lvl9pPr marL="3886200" indent="-228600" algn="l" defTabSz="914400" rtl="0" eaLnBrk="1" latinLnBrk="0" hangingPunct="1">
+              <a:lnSpc>
+                <a:spcPct val="90000"/>
+              </a:lnSpc>
+              <a:spcBef>
+                <a:spcPts val="500"/>
+              </a:spcBef>
+              <a:buFont typeface="Arial" panose="020B0604020202020204" pitchFamily="34" charset="0"/>
+              <a:buChar char="•"/>
+              <a:defRPr sz="1800" kern="1200">
+                <a:solidFill>
+                  <a:schemeClr val="tx1"/>
+                </a:solidFill>
+                <a:latin typeface="+mn-lt"/>
+                <a:ea typeface="+mn-ea"/>
+                <a:cs typeface="+mn-cs"/>
+              </a:defRPr>
+            </a:lvl9pPr>
+          </a:lstStyle>
+          <a:p>
+            <a:pPr marL="0" indent="0">
+              <a:lnSpc>
+                <a:spcPct val="100000"/>
+              </a:lnSpc>
+              <a:spcBef>
+                <a:spcPts val="600"/>
+              </a:spcBef>
+              <a:buFont typeface="Arial" panose="020B0604020202020204" pitchFamily="34" charset="0"/>
+              <a:buNone/>
+            </a:pPr>
+            <a:r>
+              <a:rPr lang="nl-NL" sz="1800" b="1" dirty="0">
+                <a:cs typeface="Courier New" panose="02070309020205020404" pitchFamily="49" charset="0"/>
+              </a:rPr>
+              <a:t>Instellen via repository:</a:t>
+            </a:r>
+          </a:p>
+          <a:p>
+            <a:pPr>
+              <a:lnSpc>
+                <a:spcPct val="100000"/>
+              </a:lnSpc>
+              <a:spcBef>
+                <a:spcPts val="600"/>
+              </a:spcBef>
+              <a:buFontTx/>
+              <a:buChar char="-"/>
+            </a:pPr>
+            <a:r>
+              <a:rPr lang="nl-NL" sz="1800" dirty="0">
+                <a:cs typeface="Courier New" panose="02070309020205020404" pitchFamily="49" charset="0"/>
+              </a:rPr>
+              <a:t>Ga naar [Branches].</a:t>
+            </a:r>
+          </a:p>
+          <a:p>
+            <a:pPr>
+              <a:lnSpc>
+                <a:spcPct val="100000"/>
+              </a:lnSpc>
+              <a:spcBef>
+                <a:spcPts val="600"/>
+              </a:spcBef>
+              <a:buFontTx/>
+              <a:buChar char="-"/>
+            </a:pPr>
+            <a:r>
+              <a:rPr lang="nl-NL" sz="1800" dirty="0">
+                <a:cs typeface="Courier New" panose="02070309020205020404" pitchFamily="49" charset="0"/>
+              </a:rPr>
+              <a:t>Klik op [</a:t>
+            </a:r>
+            <a:r>
+              <a:rPr lang="nl-NL" sz="1800" dirty="0">
+                <a:latin typeface="Courier New" panose="02070309020205020404" pitchFamily="49" charset="0"/>
+                <a:cs typeface="Courier New" panose="02070309020205020404" pitchFamily="49" charset="0"/>
+              </a:rPr>
+              <a:t>⁞</a:t>
+            </a:r>
+            <a:r>
+              <a:rPr lang="nl-NL" sz="1800" dirty="0">
+                <a:cs typeface="Courier New" panose="02070309020205020404" pitchFamily="49" charset="0"/>
+              </a:rPr>
+              <a:t>] achter een </a:t>
+            </a:r>
+            <a:r>
+              <a:rPr lang="nl-NL" sz="1800" dirty="0" err="1">
+                <a:cs typeface="Courier New" panose="02070309020205020404" pitchFamily="49" charset="0"/>
+              </a:rPr>
+              <a:t>branch</a:t>
+            </a:r>
+            <a:r>
+              <a:rPr lang="nl-NL" sz="1800" dirty="0">
+                <a:cs typeface="Courier New" panose="02070309020205020404" pitchFamily="49" charset="0"/>
+              </a:rPr>
+              <a:t>.</a:t>
+            </a:r>
+          </a:p>
+          <a:p>
+            <a:pPr>
+              <a:lnSpc>
+                <a:spcPct val="100000"/>
+              </a:lnSpc>
+              <a:spcBef>
+                <a:spcPts val="600"/>
+              </a:spcBef>
+              <a:buFontTx/>
+              <a:buChar char="-"/>
+            </a:pPr>
+            <a:r>
+              <a:rPr lang="nl-NL" sz="1800" dirty="0">
+                <a:cs typeface="Courier New" panose="02070309020205020404" pitchFamily="49" charset="0"/>
+              </a:rPr>
+              <a:t>Selecteer [</a:t>
+            </a:r>
+            <a:r>
+              <a:rPr lang="nl-NL" sz="1800" dirty="0" err="1">
+                <a:cs typeface="Courier New" panose="02070309020205020404" pitchFamily="49" charset="0"/>
+              </a:rPr>
+              <a:t>Branch</a:t>
+            </a:r>
+            <a:r>
+              <a:rPr lang="nl-NL" sz="1800" dirty="0">
+                <a:cs typeface="Courier New" panose="02070309020205020404" pitchFamily="49" charset="0"/>
+              </a:rPr>
+              <a:t> </a:t>
+            </a:r>
+            <a:r>
+              <a:rPr lang="nl-NL" sz="1800" dirty="0" err="1">
+                <a:cs typeface="Courier New" panose="02070309020205020404" pitchFamily="49" charset="0"/>
+              </a:rPr>
+              <a:t>Policies</a:t>
+            </a:r>
+            <a:r>
+              <a:rPr lang="nl-NL" sz="1800" dirty="0">
+                <a:cs typeface="Courier New" panose="02070309020205020404" pitchFamily="49" charset="0"/>
+              </a:rPr>
+              <a:t>]</a:t>
+            </a:r>
+          </a:p>
+          <a:p>
+            <a:pPr marL="0" indent="0">
+              <a:lnSpc>
+                <a:spcPct val="100000"/>
+              </a:lnSpc>
+              <a:spcBef>
+                <a:spcPts val="600"/>
+              </a:spcBef>
+              <a:buNone/>
+            </a:pPr>
+            <a:endParaRPr lang="nl-NL" sz="1800" dirty="0">
+              <a:cs typeface="Courier New" panose="02070309020205020404" pitchFamily="49" charset="0"/>
+            </a:endParaRPr>
+          </a:p>
+          <a:p>
+            <a:pPr marL="0" indent="0">
+              <a:lnSpc>
+                <a:spcPct val="100000"/>
+              </a:lnSpc>
+              <a:spcBef>
+                <a:spcPts val="600"/>
+              </a:spcBef>
+              <a:buNone/>
+            </a:pPr>
+            <a:r>
+              <a:rPr lang="nl-NL" sz="1800" b="1" dirty="0">
+                <a:cs typeface="Courier New" panose="02070309020205020404" pitchFamily="49" charset="0"/>
+              </a:rPr>
+              <a:t>Instellen via Project </a:t>
+            </a:r>
+            <a:r>
+              <a:rPr lang="nl-NL" sz="1800" b="1" dirty="0" err="1">
+                <a:cs typeface="Courier New" panose="02070309020205020404" pitchFamily="49" charset="0"/>
+              </a:rPr>
+              <a:t>settings</a:t>
+            </a:r>
+            <a:r>
+              <a:rPr lang="nl-NL" sz="1800" b="1" dirty="0">
+                <a:cs typeface="Courier New" panose="02070309020205020404" pitchFamily="49" charset="0"/>
+              </a:rPr>
+              <a:t>:</a:t>
+            </a:r>
+          </a:p>
+          <a:p>
+            <a:pPr>
+              <a:lnSpc>
+                <a:spcPct val="100000"/>
+              </a:lnSpc>
+              <a:spcBef>
+                <a:spcPts val="600"/>
+              </a:spcBef>
+              <a:buFontTx/>
+              <a:buChar char="-"/>
+            </a:pPr>
+            <a:r>
+              <a:rPr lang="nl-NL" sz="1800" dirty="0">
+                <a:cs typeface="Courier New" panose="02070309020205020404" pitchFamily="49" charset="0"/>
+              </a:rPr>
+              <a:t>Ga naar [Repositories].</a:t>
+            </a:r>
+          </a:p>
+          <a:p>
+            <a:pPr>
+              <a:lnSpc>
+                <a:spcPct val="100000"/>
+              </a:lnSpc>
+              <a:spcBef>
+                <a:spcPts val="600"/>
+              </a:spcBef>
+              <a:buFontTx/>
+              <a:buChar char="-"/>
+            </a:pPr>
+            <a:r>
+              <a:rPr lang="nl-NL" sz="1800" dirty="0">
+                <a:cs typeface="Courier New" panose="02070309020205020404" pitchFamily="49" charset="0"/>
+              </a:rPr>
+              <a:t>Ga naar [</a:t>
+            </a:r>
+            <a:r>
+              <a:rPr lang="nl-NL" sz="1800" dirty="0" err="1">
+                <a:cs typeface="Courier New" panose="02070309020205020404" pitchFamily="49" charset="0"/>
+              </a:rPr>
+              <a:t>Policies</a:t>
+            </a:r>
+            <a:r>
+              <a:rPr lang="nl-NL" sz="1800" dirty="0">
+                <a:cs typeface="Courier New" panose="02070309020205020404" pitchFamily="49" charset="0"/>
+              </a:rPr>
+              <a:t>].</a:t>
+            </a:r>
+          </a:p>
+          <a:p>
+            <a:pPr>
+              <a:lnSpc>
+                <a:spcPct val="100000"/>
+              </a:lnSpc>
+              <a:spcBef>
+                <a:spcPts val="600"/>
+              </a:spcBef>
+              <a:buFontTx/>
+              <a:buChar char="-"/>
+            </a:pPr>
+            <a:r>
+              <a:rPr lang="nl-NL" sz="1800" dirty="0">
+                <a:cs typeface="Courier New" panose="02070309020205020404" pitchFamily="49" charset="0"/>
+              </a:rPr>
+              <a:t>Klik onderaan op [</a:t>
+            </a:r>
+            <a:r>
+              <a:rPr lang="nl-NL" sz="1800" dirty="0" err="1">
+                <a:cs typeface="Courier New" panose="02070309020205020404" pitchFamily="49" charset="0"/>
+              </a:rPr>
+              <a:t>Branch</a:t>
+            </a:r>
+            <a:r>
+              <a:rPr lang="nl-NL" sz="1800" dirty="0">
+                <a:cs typeface="Courier New" panose="02070309020205020404" pitchFamily="49" charset="0"/>
+              </a:rPr>
+              <a:t> </a:t>
+            </a:r>
+            <a:r>
+              <a:rPr lang="nl-NL" sz="1800" dirty="0" err="1">
+                <a:cs typeface="Courier New" panose="02070309020205020404" pitchFamily="49" charset="0"/>
+              </a:rPr>
+              <a:t>Policies</a:t>
+            </a:r>
+            <a:r>
+              <a:rPr lang="nl-NL" sz="1800" dirty="0">
+                <a:cs typeface="Courier New" panose="02070309020205020404" pitchFamily="49" charset="0"/>
+              </a:rPr>
+              <a:t>].</a:t>
+            </a:r>
+          </a:p>
+          <a:p>
+            <a:pPr marL="0" indent="0">
+              <a:lnSpc>
+                <a:spcPct val="100000"/>
+              </a:lnSpc>
+              <a:spcBef>
+                <a:spcPts val="600"/>
+              </a:spcBef>
+              <a:buFont typeface="Arial" panose="020B0604020202020204" pitchFamily="34" charset="0"/>
+              <a:buNone/>
+            </a:pPr>
+            <a:endParaRPr lang="nl-NL" sz="1800" dirty="0">
+              <a:cs typeface="Courier New" panose="02070309020205020404" pitchFamily="49" charset="0"/>
+            </a:endParaRPr>
+          </a:p>
+        </p:txBody>
+      </p:sp>
+      <p:pic>
+        <p:nvPicPr>
+          <p:cNvPr id="5" name="Picture 4" descr="A screenshot of a computer&#10;&#10;Description automatically generated">
+            <a:extLst>
+              <a:ext uri="{FF2B5EF4-FFF2-40B4-BE49-F238E27FC236}">
+                <a16:creationId xmlns:a16="http://schemas.microsoft.com/office/drawing/2014/main" id="{3C804938-29B9-170E-3018-FFFFE4144617}"/>
+              </a:ext>
+            </a:extLst>
+          </p:cNvPr>
+          <p:cNvPicPr>
+            <a:picLocks noChangeAspect="1"/>
+          </p:cNvPicPr>
+          <p:nvPr/>
+        </p:nvPicPr>
+        <p:blipFill>
+          <a:blip r:embed="rId3">
+            <a:extLst>
+              <a:ext uri="{28A0092B-C50C-407E-A947-70E740481C1C}">
+                <a14:useLocalDpi xmlns:a14="http://schemas.microsoft.com/office/drawing/2010/main" val="0"/>
+              </a:ext>
+            </a:extLst>
+          </a:blip>
+          <a:stretch>
+            <a:fillRect/>
+          </a:stretch>
+        </p:blipFill>
+        <p:spPr>
+          <a:xfrm>
+            <a:off x="6169602" y="1456267"/>
+            <a:ext cx="5184198" cy="4412705"/>
+          </a:xfrm>
+          <a:prstGeom prst="rect">
+            <a:avLst/>
+          </a:prstGeom>
+          <a:ln>
+            <a:solidFill>
+              <a:schemeClr val="tx1"/>
+            </a:solidFill>
+          </a:ln>
+        </p:spPr>
+      </p:pic>
+    </p:spTree>
+    <p:extLst>
+      <p:ext uri="{BB962C8B-B14F-4D97-AF65-F5344CB8AC3E}">
+        <p14:creationId xmlns:p14="http://schemas.microsoft.com/office/powerpoint/2010/main" val="240145038"/>
+      </p:ext>
+    </p:extLst>
+  </p:cSld>
+  <p:clrMapOvr>
+    <a:masterClrMapping/>
+  </p:clrMapOvr>
+</p:sld>
+</file>
+
+<file path=ppt/slides/slide61.xml><?xml version="1.0" encoding="utf-8"?>
+<p:sld xmlns:a="http://schemas.openxmlformats.org/drawingml/2006/main" xmlns:r="http://schemas.openxmlformats.org/officeDocument/2006/relationships" xmlns:p="http://schemas.openxmlformats.org/presentationml/2006/main">
+  <p:cSld>
+    <p:spTree>
+      <p:nvGrpSpPr>
+        <p:cNvPr id="1" name="">
+          <a:extLst>
+            <a:ext uri="{FF2B5EF4-FFF2-40B4-BE49-F238E27FC236}">
               <a16:creationId xmlns:a16="http://schemas.microsoft.com/office/drawing/2014/main" id="{E19DFC77-8324-EEF5-9364-F1ECD1654716}"/>
             </a:ext>
           </a:extLst>
@@ -34665,7 +35415,7 @@
 </p:sld>
 </file>
 
-<file path=ppt/slides/slide61.xml><?xml version="1.0" encoding="utf-8"?>
+<file path=ppt/slides/slide62.xml><?xml version="1.0" encoding="utf-8"?>
 <p:sld xmlns:a="http://schemas.openxmlformats.org/drawingml/2006/main" xmlns:r="http://schemas.openxmlformats.org/officeDocument/2006/relationships" xmlns:p="http://schemas.openxmlformats.org/presentationml/2006/main">
   <p:cSld>
     <p:spTree>
@@ -34754,7 +35504,7 @@
 </p:sld>
 </file>
 
-<file path=ppt/slides/slide62.xml><?xml version="1.0" encoding="utf-8"?>
+<file path=ppt/slides/slide63.xml><?xml version="1.0" encoding="utf-8"?>
 <p:sld xmlns:a="http://schemas.openxmlformats.org/drawingml/2006/main" xmlns:r="http://schemas.openxmlformats.org/officeDocument/2006/relationships" xmlns:p="http://schemas.openxmlformats.org/presentationml/2006/main">
   <p:cSld>
     <p:spTree>
@@ -35338,7 +36088,7 @@
 </p:sld>
 </file>
 
-<file path=ppt/slides/slide63.xml><?xml version="1.0" encoding="utf-8"?>
+<file path=ppt/slides/slide64.xml><?xml version="1.0" encoding="utf-8"?>
 <p:sld xmlns:a="http://schemas.openxmlformats.org/drawingml/2006/main" xmlns:r="http://schemas.openxmlformats.org/officeDocument/2006/relationships" xmlns:p="http://schemas.openxmlformats.org/presentationml/2006/main">
   <p:cSld>
     <p:spTree>
@@ -35831,7 +36581,7 @@
 </p:sld>
 </file>
 
-<file path=ppt/slides/slide64.xml><?xml version="1.0" encoding="utf-8"?>
+<file path=ppt/slides/slide65.xml><?xml version="1.0" encoding="utf-8"?>
 <p:sld xmlns:a="http://schemas.openxmlformats.org/drawingml/2006/main" xmlns:r="http://schemas.openxmlformats.org/officeDocument/2006/relationships" xmlns:p="http://schemas.openxmlformats.org/presentationml/2006/main">
   <p:cSld>
     <p:spTree>
@@ -36341,7 +37091,7 @@
 </p:sld>
 </file>
 
-<file path=ppt/slides/slide65.xml><?xml version="1.0" encoding="utf-8"?>
+<file path=ppt/slides/slide66.xml><?xml version="1.0" encoding="utf-8"?>
 <p:sld xmlns:a="http://schemas.openxmlformats.org/drawingml/2006/main" xmlns:r="http://schemas.openxmlformats.org/officeDocument/2006/relationships" xmlns:p="http://schemas.openxmlformats.org/presentationml/2006/main">
   <p:cSld>
     <p:spTree>

--- a/git_course/2_collaboration/git_collaboration.pptx
+++ b/git_course/2_collaboration/git_collaboration.pptx
@@ -1856,18 +1856,7 @@
               <a:tabLst/>
               <a:defRPr/>
             </a:pPr>
-            <a:r>
-              <a:rPr lang="nl-NL" dirty="0"/>
-              <a:t>Demo: GH: </a:t>
-            </a:r>
-            <a:r>
-              <a:rPr lang="nl-NL" dirty="0" err="1"/>
-              <a:t>create</a:t>
-            </a:r>
-            <a:r>
-              <a:rPr lang="nl-NL" dirty="0"/>
-              <a:t> workflow.</a:t>
-            </a:r>
+            <a:endParaRPr lang="nl-NL" dirty="0"/>
           </a:p>
         </p:txBody>
       </p:sp>
@@ -2212,7 +2201,18 @@
               <a:tabLst/>
               <a:defRPr/>
             </a:pPr>
-            <a:endParaRPr lang="nl-NL" dirty="0"/>
+            <a:r>
+              <a:rPr lang="nl-NL" dirty="0"/>
+              <a:t>Demo: GH: </a:t>
+            </a:r>
+            <a:r>
+              <a:rPr lang="nl-NL" dirty="0" err="1"/>
+              <a:t>create</a:t>
+            </a:r>
+            <a:r>
+              <a:rPr lang="nl-NL" dirty="0"/>
+              <a:t> workflow.</a:t>
+            </a:r>
           </a:p>
         </p:txBody>
       </p:sp>
@@ -4913,18 +4913,7 @@
               <a:tabLst/>
               <a:defRPr/>
             </a:pPr>
-            <a:r>
-              <a:rPr lang="nl-NL" dirty="0"/>
-              <a:t>Demo: </a:t>
-            </a:r>
-            <a:r>
-              <a:rPr lang="nl-NL" dirty="0" err="1"/>
-              <a:t>branch</a:t>
-            </a:r>
-            <a:r>
-              <a:rPr lang="nl-NL" dirty="0"/>
-              <a:t> tracking</a:t>
-            </a:r>
+            <a:endParaRPr lang="nl-NL" dirty="0"/>
           </a:p>
         </p:txBody>
       </p:sp>
@@ -5025,7 +5014,18 @@
               <a:tabLst/>
               <a:defRPr/>
             </a:pPr>
-            <a:endParaRPr lang="nl-NL" dirty="0"/>
+            <a:r>
+              <a:rPr lang="nl-NL" dirty="0"/>
+              <a:t>Demo: </a:t>
+            </a:r>
+            <a:r>
+              <a:rPr lang="nl-NL" dirty="0" err="1"/>
+              <a:t>branch</a:t>
+            </a:r>
+            <a:r>
+              <a:rPr lang="nl-NL" dirty="0"/>
+              <a:t> tracking</a:t>
+            </a:r>
           </a:p>
         </p:txBody>
       </p:sp>
@@ -9402,7 +9402,7 @@
             </a:pPr>
             <a:r>
               <a:rPr lang="nl-NL" sz="1600" dirty="0"/>
-              <a:t>Maakt directory aan met de naam van het repository.</a:t>
+              <a:t>Maakt werk directory aan met de naam van het repository.</a:t>
             </a:r>
           </a:p>
           <a:p>
@@ -11557,7 +11557,7 @@
                 <a:latin typeface="Courier New" panose="02070309020205020404" pitchFamily="49" charset="0"/>
                 <a:cs typeface="Courier New" panose="02070309020205020404" pitchFamily="49" charset="0"/>
               </a:rPr>
-              <a:t> https://github.com/LFKoning/pig-latin</a:t>
+              <a:t> https://github.com/You/pig-latin</a:t>
             </a:r>
           </a:p>
           <a:p>
@@ -22082,7 +22082,7 @@
               <a:rPr lang="nl-NL" sz="1800" dirty="0">
                 <a:cs typeface="Courier New" panose="02070309020205020404" pitchFamily="49" charset="0"/>
               </a:rPr>
-              <a:t>Voor welke branches de pipeline draait.</a:t>
+              <a:t>Voor welke branches de Workflow draait.</a:t>
             </a:r>
           </a:p>
           <a:p>
@@ -22933,6 +22933,42 @@
                 <a:cs typeface="Courier New" panose="02070309020205020404" pitchFamily="49" charset="0"/>
               </a:rPr>
               <a:t>Klik op een Workflow run voor logging.</a:t>
+            </a:r>
+          </a:p>
+        </p:txBody>
+      </p:sp>
+      <p:sp>
+        <p:nvSpPr>
+          <p:cNvPr id="3" name="TextBox 2">
+            <a:extLst>
+              <a:ext uri="{FF2B5EF4-FFF2-40B4-BE49-F238E27FC236}">
+                <a16:creationId xmlns:a16="http://schemas.microsoft.com/office/drawing/2014/main" id="{D48E1496-6026-7555-F17E-08164D7C81F6}"/>
+              </a:ext>
+            </a:extLst>
+          </p:cNvPr>
+          <p:cNvSpPr txBox="1"/>
+          <p:nvPr/>
+        </p:nvSpPr>
+        <p:spPr>
+          <a:xfrm>
+            <a:off x="9619967" y="6471982"/>
+            <a:ext cx="2499246" cy="307777"/>
+          </a:xfrm>
+          <a:prstGeom prst="rect">
+            <a:avLst/>
+          </a:prstGeom>
+          <a:noFill/>
+        </p:spPr>
+        <p:txBody>
+          <a:bodyPr wrap="square">
+            <a:spAutoFit/>
+          </a:bodyPr>
+          <a:lstStyle/>
+          <a:p>
+            <a:pPr algn="r"/>
+            <a:r>
+              <a:rPr lang="en-US" sz="1400" dirty="0"/>
+              <a:t>D: create workflow.</a:t>
             </a:r>
           </a:p>
         </p:txBody>
@@ -39259,6 +39295,7 @@
             </a:extLst>
           </p:cNvPr>
           <p:cNvCxnSpPr>
+            <a:cxnSpLocks/>
             <a:stCxn id="9" idx="6"/>
             <a:endCxn id="6" idx="1"/>
           </p:cNvCxnSpPr>
@@ -39268,48 +39305,6 @@
           <a:xfrm flipV="1">
             <a:off x="2283236" y="5321354"/>
             <a:ext cx="989255" cy="1"/>
-          </a:xfrm>
-          <a:prstGeom prst="straightConnector1">
-            <a:avLst/>
-          </a:prstGeom>
-          <a:ln>
-            <a:headEnd type="triangle"/>
-            <a:tailEnd type="triangle"/>
-          </a:ln>
-        </p:spPr>
-        <p:style>
-          <a:lnRef idx="3">
-            <a:schemeClr val="dk1"/>
-          </a:lnRef>
-          <a:fillRef idx="0">
-            <a:schemeClr val="dk1"/>
-          </a:fillRef>
-          <a:effectRef idx="2">
-            <a:schemeClr val="dk1"/>
-          </a:effectRef>
-          <a:fontRef idx="minor">
-            <a:schemeClr val="tx1"/>
-          </a:fontRef>
-        </p:style>
-      </p:cxnSp>
-      <p:cxnSp>
-        <p:nvCxnSpPr>
-          <p:cNvPr id="12" name="Straight Arrow Connector 11">
-            <a:extLst>
-              <a:ext uri="{FF2B5EF4-FFF2-40B4-BE49-F238E27FC236}">
-                <a16:creationId xmlns:a16="http://schemas.microsoft.com/office/drawing/2014/main" id="{8196E141-97AA-ED45-AB35-DEA5942C0A37}"/>
-              </a:ext>
-            </a:extLst>
-          </p:cNvPr>
-          <p:cNvCxnSpPr>
-            <a:cxnSpLocks/>
-          </p:cNvCxnSpPr>
-          <p:nvPr/>
-        </p:nvCxnSpPr>
-        <p:spPr>
-          <a:xfrm rot="5400000" flipH="1">
-            <a:off x="2777863" y="5025302"/>
-            <a:ext cx="1" cy="966651"/>
           </a:xfrm>
           <a:prstGeom prst="straightConnector1">
             <a:avLst/>
